--- a/docs/pptx/whole/jx-linsubhr-sens-grade3.pptx
+++ b/docs/pptx/whole/jx-linsubhr-sens-grade3.pptx
@@ -5339,7 +5339,7 @@
           <p:spPr>
             <a:xfrm>
               <a:off x="817517" y="1896563"/>
-              <a:ext cx="6236116" cy="82021"/>
+              <a:ext cx="6899879" cy="82021"/>
             </a:xfrm>
             <a:prstGeom prst="rect">
               <a:avLst/>
@@ -5371,7 +5371,7 @@
                   <a:latin typeface="Helvetica"/>
                   <a:cs typeface="Helvetica"/>
                 </a:rPr>
-                <a:t>subHR per 0.1 ratio decline: 1.29 (1.16-1.43), p = &lt;0.001  |  per IQR decline (Δ = 0.27): 2.00 (1.50-2.67)  |  IQR: [0.71, 0.98]</a:t>
+                <a:t>subHR per 0.1 ratio decline: 1.29 (1.16-1.43), p_Bonf = &lt;0.001 (n = 6)  |  per IQR decline (Δ = 0.27): 2.00 (1.50-2.67)  |  IQR: [0.71, 0.98]</a:t>
               </a:r>
             </a:p>
           </p:txBody>

--- a/docs/pptx/whole/jx-linsubhr-sens-grade3.pptx
+++ b/docs/pptx/whole/jx-linsubhr-sens-grade3.pptx
@@ -5062,8 +5062,8 @@
           </p:nvSpPr>
           <p:spPr>
             <a:xfrm>
-              <a:off x="1980137" y="5785772"/>
-              <a:ext cx="155356" cy="80101"/>
+              <a:off x="1977028" y="5785772"/>
+              <a:ext cx="161574" cy="80101"/>
             </a:xfrm>
             <a:prstGeom prst="rect">
               <a:avLst/>
@@ -5095,7 +5095,7 @@
                   <a:latin typeface="Helvetica"/>
                   <a:cs typeface="Helvetica"/>
                 </a:rPr>
-                <a:t>0.6</a:t>
+                <a:t>-40</a:t>
               </a:r>
             </a:p>
           </p:txBody>
@@ -5108,8 +5108,8 @@
           </p:nvSpPr>
           <p:spPr>
             <a:xfrm>
-              <a:off x="3731922" y="5785772"/>
-              <a:ext cx="155356" cy="80101"/>
+              <a:off x="3728813" y="5785772"/>
+              <a:ext cx="161574" cy="80101"/>
             </a:xfrm>
             <a:prstGeom prst="rect">
               <a:avLst/>
@@ -5141,7 +5141,7 @@
                   <a:latin typeface="Helvetica"/>
                   <a:cs typeface="Helvetica"/>
                 </a:rPr>
-                <a:t>0.8</a:t>
+                <a:t>-20</a:t>
               </a:r>
             </a:p>
           </p:txBody>
@@ -5154,8 +5154,8 @@
           </p:nvSpPr>
           <p:spPr>
             <a:xfrm>
-              <a:off x="5483707" y="5785772"/>
-              <a:ext cx="155356" cy="80101"/>
+              <a:off x="5530296" y="5785772"/>
+              <a:ext cx="62179" cy="80101"/>
             </a:xfrm>
             <a:prstGeom prst="rect">
               <a:avLst/>
@@ -5187,7 +5187,7 @@
                   <a:latin typeface="Helvetica"/>
                   <a:cs typeface="Helvetica"/>
                 </a:rPr>
-                <a:t>1.0</a:t>
+                <a:t>0</a:t>
               </a:r>
             </a:p>
           </p:txBody>
@@ -5200,8 +5200,8 @@
           </p:nvSpPr>
           <p:spPr>
             <a:xfrm>
-              <a:off x="7235493" y="5785772"/>
-              <a:ext cx="155356" cy="80101"/>
+              <a:off x="7250992" y="5785772"/>
+              <a:ext cx="124358" cy="80101"/>
             </a:xfrm>
             <a:prstGeom prst="rect">
               <a:avLst/>
@@ -5233,7 +5233,7 @@
                   <a:latin typeface="Helvetica"/>
                   <a:cs typeface="Helvetica"/>
                 </a:rPr>
-                <a:t>1.2</a:t>
+                <a:t>20</a:t>
               </a:r>
             </a:p>
           </p:txBody>
@@ -5246,8 +5246,8 @@
           </p:nvSpPr>
           <p:spPr>
             <a:xfrm>
-              <a:off x="2691419" y="5925448"/>
-              <a:ext cx="4051889" cy="100218"/>
+              <a:off x="1561815" y="5925448"/>
+              <a:ext cx="6311097" cy="100218"/>
             </a:xfrm>
             <a:prstGeom prst="rect">
               <a:avLst/>
@@ -5279,7 +5279,7 @@
                   <a:latin typeface="Helvetica"/>
                   <a:cs typeface="Helvetica"/>
                 </a:rPr>
-                <a:t>Sensitivity eGFR Ratio (CKD-EPI 2012 CysC / CKD-EPI 2021 Cr)</a:t>
+                <a:t>Sensitivity eGFR Difference (%): 100 × (CKD-EPI 2012 CysC − CKD-EPI 2021 Cr) / CKD-EPI 2021 Cr</a:t>
               </a:r>
             </a:p>
           </p:txBody>
@@ -5339,7 +5339,7 @@
           <p:spPr>
             <a:xfrm>
               <a:off x="817517" y="1896563"/>
-              <a:ext cx="6899879" cy="82021"/>
+              <a:ext cx="7026615" cy="82021"/>
             </a:xfrm>
             <a:prstGeom prst="rect">
               <a:avLst/>
@@ -5371,7 +5371,7 @@
                   <a:latin typeface="Helvetica"/>
                   <a:cs typeface="Helvetica"/>
                 </a:rPr>
-                <a:t>subHR per 0.1 ratio decline: 1.29 (1.16-1.43), p_Bonf = &lt;0.001 (n = 6)  |  per IQR decline (Δ = 0.27): 2.00 (1.50-2.67)  |  IQR: [0.71, 0.98]</a:t>
+                <a:t>subHR per 10 % decline: 1.29 (1.16-1.43), p_Bonf = &lt;0.001 (n = 6)  |  per IQR decline (Δ = 27.5 %): 2.00 (1.50-2.67)  |  IQR: [-29.1, -1.6] %</a:t>
               </a:r>
             </a:p>
           </p:txBody>

--- a/docs/pptx/whole/jx-linsubhr-sens-grade3.pptx
+++ b/docs/pptx/whole/jx-linsubhr-sens-grade3.pptx
@@ -2265,34 +2265,26 @@
         </p:sp>
         <p:sp>
           <p:nvSpPr>
-            <p:cNvPr id="4" name="pl4"/>
+            <p:cNvPr id="4" name="rc4"/>
             <p:cNvSpPr/>
             <p:nvPr/>
           </p:nvSpPr>
           <p:spPr>
             <a:xfrm>
-              <a:off x="817517" y="5142518"/>
-              <a:ext cx="7799693" cy="0"/>
+              <a:off x="457200" y="1600200"/>
+              <a:ext cx="8229600" cy="4525962"/>
             </a:xfrm>
-            <a:custGeom>
+            <a:prstGeom prst="rect">
               <a:avLst/>
-              <a:pathLst>
-                <a:path w="7799693" h="0">
-                  <a:moveTo>
-                    <a:pt x="0" y="0"/>
-                  </a:moveTo>
-                  <a:lnTo>
-                    <a:pt x="7799693" y="0"/>
-                  </a:lnTo>
-                  <a:lnTo>
-                    <a:pt x="7799693" y="0"/>
-                  </a:lnTo>
-                </a:path>
-              </a:pathLst>
-            </a:custGeom>
-            <a:ln w="6775" cap="flat">
+            </a:prstGeom>
+            <a:solidFill>
+              <a:srgbClr val="FFFFFF">
+                <a:alpha val="100000"/>
+              </a:srgbClr>
+            </a:solidFill>
+            <a:ln w="13550" cap="rnd">
               <a:solidFill>
-                <a:srgbClr val="EBEBEB">
+                <a:srgbClr val="FFFFFF">
                   <a:alpha val="100000"/>
                 </a:srgbClr>
               </a:solidFill>
@@ -2314,21 +2306,21 @@
           </p:nvSpPr>
           <p:spPr>
             <a:xfrm>
-              <a:off x="817517" y="4313054"/>
-              <a:ext cx="7799693" cy="0"/>
+              <a:off x="887106" y="3250627"/>
+              <a:ext cx="7660515" cy="0"/>
             </a:xfrm>
             <a:custGeom>
               <a:avLst/>
               <a:pathLst>
-                <a:path w="7799693" h="0">
+                <a:path w="7660515" h="0">
                   <a:moveTo>
                     <a:pt x="0" y="0"/>
                   </a:moveTo>
                   <a:lnTo>
-                    <a:pt x="7799693" y="0"/>
-                  </a:lnTo>
-                  <a:lnTo>
-                    <a:pt x="7799693" y="0"/>
+                    <a:pt x="7660515" y="0"/>
+                  </a:lnTo>
+                  <a:lnTo>
+                    <a:pt x="7660515" y="0"/>
                   </a:lnTo>
                 </a:path>
               </a:pathLst>
@@ -2357,21 +2349,21 @@
           </p:nvSpPr>
           <p:spPr>
             <a:xfrm>
-              <a:off x="817517" y="3483591"/>
-              <a:ext cx="7799693" cy="0"/>
+              <a:off x="887106" y="2951293"/>
+              <a:ext cx="7660515" cy="0"/>
             </a:xfrm>
             <a:custGeom>
               <a:avLst/>
               <a:pathLst>
-                <a:path w="7799693" h="0">
+                <a:path w="7660515" h="0">
                   <a:moveTo>
                     <a:pt x="0" y="0"/>
                   </a:moveTo>
                   <a:lnTo>
-                    <a:pt x="7799693" y="0"/>
-                  </a:lnTo>
-                  <a:lnTo>
-                    <a:pt x="7799693" y="0"/>
+                    <a:pt x="7660515" y="0"/>
+                  </a:lnTo>
+                  <a:lnTo>
+                    <a:pt x="7660515" y="0"/>
                   </a:lnTo>
                 </a:path>
               </a:pathLst>
@@ -2400,21 +2392,21 @@
           </p:nvSpPr>
           <p:spPr>
             <a:xfrm>
-              <a:off x="817517" y="2654127"/>
-              <a:ext cx="7799693" cy="0"/>
+              <a:off x="887106" y="2651959"/>
+              <a:ext cx="7660515" cy="0"/>
             </a:xfrm>
             <a:custGeom>
               <a:avLst/>
               <a:pathLst>
-                <a:path w="7799693" h="0">
+                <a:path w="7660515" h="0">
                   <a:moveTo>
                     <a:pt x="0" y="0"/>
                   </a:moveTo>
                   <a:lnTo>
-                    <a:pt x="7799693" y="0"/>
-                  </a:lnTo>
-                  <a:lnTo>
-                    <a:pt x="7799693" y="0"/>
+                    <a:pt x="7660515" y="0"/>
+                  </a:lnTo>
+                  <a:lnTo>
+                    <a:pt x="7660515" y="0"/>
                   </a:lnTo>
                 </a:path>
               </a:pathLst>
@@ -2443,21 +2435,21 @@
           </p:nvSpPr>
           <p:spPr>
             <a:xfrm>
-              <a:off x="1181923" y="2073503"/>
-              <a:ext cx="0" cy="3649639"/>
+              <a:off x="887106" y="2352625"/>
+              <a:ext cx="7660515" cy="0"/>
             </a:xfrm>
             <a:custGeom>
               <a:avLst/>
               <a:pathLst>
-                <a:path w="0" h="3649639">
+                <a:path w="7660515" h="0">
                   <a:moveTo>
-                    <a:pt x="0" y="3649639"/>
+                    <a:pt x="0" y="0"/>
                   </a:moveTo>
                   <a:lnTo>
-                    <a:pt x="0" y="0"/>
-                  </a:lnTo>
-                  <a:lnTo>
-                    <a:pt x="0" y="0"/>
+                    <a:pt x="7660515" y="0"/>
+                  </a:lnTo>
+                  <a:lnTo>
+                    <a:pt x="7660515" y="0"/>
                   </a:lnTo>
                 </a:path>
               </a:pathLst>
@@ -2486,15 +2478,15 @@
           </p:nvSpPr>
           <p:spPr>
             <a:xfrm>
-              <a:off x="2933708" y="2073503"/>
-              <a:ext cx="0" cy="3649639"/>
+              <a:off x="1245010" y="2143092"/>
+              <a:ext cx="0" cy="1317069"/>
             </a:xfrm>
             <a:custGeom>
               <a:avLst/>
               <a:pathLst>
-                <a:path w="0" h="3649639">
+                <a:path w="0" h="1317069">
                   <a:moveTo>
-                    <a:pt x="0" y="3649639"/>
+                    <a:pt x="0" y="1317069"/>
                   </a:moveTo>
                   <a:lnTo>
                     <a:pt x="0" y="0"/>
@@ -2529,15 +2521,15 @@
           </p:nvSpPr>
           <p:spPr>
             <a:xfrm>
-              <a:off x="4685493" y="2073503"/>
-              <a:ext cx="0" cy="3649639"/>
+              <a:off x="2965536" y="2143092"/>
+              <a:ext cx="0" cy="1317069"/>
             </a:xfrm>
             <a:custGeom>
               <a:avLst/>
               <a:pathLst>
-                <a:path w="0" h="3649639">
+                <a:path w="0" h="1317069">
                   <a:moveTo>
-                    <a:pt x="0" y="3649639"/>
+                    <a:pt x="0" y="1317069"/>
                   </a:moveTo>
                   <a:lnTo>
                     <a:pt x="0" y="0"/>
@@ -2572,15 +2564,15 @@
           </p:nvSpPr>
           <p:spPr>
             <a:xfrm>
-              <a:off x="6437278" y="2073503"/>
-              <a:ext cx="0" cy="3649639"/>
+              <a:off x="4686062" y="2143092"/>
+              <a:ext cx="0" cy="1317069"/>
             </a:xfrm>
             <a:custGeom>
               <a:avLst/>
               <a:pathLst>
-                <a:path w="0" h="3649639">
+                <a:path w="0" h="1317069">
                   <a:moveTo>
-                    <a:pt x="0" y="3649639"/>
+                    <a:pt x="0" y="1317069"/>
                   </a:moveTo>
                   <a:lnTo>
                     <a:pt x="0" y="0"/>
@@ -2615,15 +2607,15 @@
           </p:nvSpPr>
           <p:spPr>
             <a:xfrm>
-              <a:off x="8189063" y="2073503"/>
-              <a:ext cx="0" cy="3649639"/>
+              <a:off x="6406588" y="2143092"/>
+              <a:ext cx="0" cy="1317069"/>
             </a:xfrm>
             <a:custGeom>
               <a:avLst/>
               <a:pathLst>
-                <a:path w="0" h="3649639">
+                <a:path w="0" h="1317069">
                   <a:moveTo>
-                    <a:pt x="0" y="3649639"/>
+                    <a:pt x="0" y="1317069"/>
                   </a:moveTo>
                   <a:lnTo>
                     <a:pt x="0" y="0"/>
@@ -2658,26 +2650,26 @@
           </p:nvSpPr>
           <p:spPr>
             <a:xfrm>
-              <a:off x="817517" y="5557249"/>
-              <a:ext cx="7799693" cy="0"/>
+              <a:off x="8127114" y="2143092"/>
+              <a:ext cx="0" cy="1317069"/>
             </a:xfrm>
             <a:custGeom>
               <a:avLst/>
               <a:pathLst>
-                <a:path w="7799693" h="0">
+                <a:path w="0" h="1317069">
                   <a:moveTo>
+                    <a:pt x="0" y="1317069"/>
+                  </a:moveTo>
+                  <a:lnTo>
                     <a:pt x="0" y="0"/>
-                  </a:moveTo>
-                  <a:lnTo>
-                    <a:pt x="7799693" y="0"/>
-                  </a:lnTo>
-                  <a:lnTo>
-                    <a:pt x="7799693" y="0"/>
+                  </a:lnTo>
+                  <a:lnTo>
+                    <a:pt x="0" y="0"/>
                   </a:lnTo>
                 </a:path>
               </a:pathLst>
             </a:custGeom>
-            <a:ln w="13550" cap="flat">
+            <a:ln w="6775" cap="flat">
               <a:solidFill>
                 <a:srgbClr val="EBEBEB">
                   <a:alpha val="100000"/>
@@ -2701,21 +2693,21 @@
           </p:nvSpPr>
           <p:spPr>
             <a:xfrm>
-              <a:off x="817517" y="4727786"/>
-              <a:ext cx="7799693" cy="0"/>
+              <a:off x="887106" y="3400294"/>
+              <a:ext cx="7660515" cy="0"/>
             </a:xfrm>
             <a:custGeom>
               <a:avLst/>
               <a:pathLst>
-                <a:path w="7799693" h="0">
+                <a:path w="7660515" h="0">
                   <a:moveTo>
                     <a:pt x="0" y="0"/>
                   </a:moveTo>
                   <a:lnTo>
-                    <a:pt x="7799693" y="0"/>
-                  </a:lnTo>
-                  <a:lnTo>
-                    <a:pt x="7799693" y="0"/>
+                    <a:pt x="7660515" y="0"/>
+                  </a:lnTo>
+                  <a:lnTo>
+                    <a:pt x="7660515" y="0"/>
                   </a:lnTo>
                 </a:path>
               </a:pathLst>
@@ -2744,21 +2736,21 @@
           </p:nvSpPr>
           <p:spPr>
             <a:xfrm>
-              <a:off x="817517" y="3898322"/>
-              <a:ext cx="7799693" cy="0"/>
+              <a:off x="887106" y="3100960"/>
+              <a:ext cx="7660515" cy="0"/>
             </a:xfrm>
             <a:custGeom>
               <a:avLst/>
               <a:pathLst>
-                <a:path w="7799693" h="0">
+                <a:path w="7660515" h="0">
                   <a:moveTo>
                     <a:pt x="0" y="0"/>
                   </a:moveTo>
                   <a:lnTo>
-                    <a:pt x="7799693" y="0"/>
-                  </a:lnTo>
-                  <a:lnTo>
-                    <a:pt x="7799693" y="0"/>
+                    <a:pt x="7660515" y="0"/>
+                  </a:lnTo>
+                  <a:lnTo>
+                    <a:pt x="7660515" y="0"/>
                   </a:lnTo>
                 </a:path>
               </a:pathLst>
@@ -2787,21 +2779,21 @@
           </p:nvSpPr>
           <p:spPr>
             <a:xfrm>
-              <a:off x="817517" y="3068859"/>
-              <a:ext cx="7799693" cy="0"/>
+              <a:off x="887106" y="2801626"/>
+              <a:ext cx="7660515" cy="0"/>
             </a:xfrm>
             <a:custGeom>
               <a:avLst/>
               <a:pathLst>
-                <a:path w="7799693" h="0">
+                <a:path w="7660515" h="0">
                   <a:moveTo>
                     <a:pt x="0" y="0"/>
                   </a:moveTo>
                   <a:lnTo>
-                    <a:pt x="7799693" y="0"/>
-                  </a:lnTo>
-                  <a:lnTo>
-                    <a:pt x="7799693" y="0"/>
+                    <a:pt x="7660515" y="0"/>
+                  </a:lnTo>
+                  <a:lnTo>
+                    <a:pt x="7660515" y="0"/>
                   </a:lnTo>
                 </a:path>
               </a:pathLst>
@@ -2830,21 +2822,21 @@
           </p:nvSpPr>
           <p:spPr>
             <a:xfrm>
-              <a:off x="817517" y="2239395"/>
-              <a:ext cx="7799693" cy="0"/>
+              <a:off x="887106" y="2502292"/>
+              <a:ext cx="7660515" cy="0"/>
             </a:xfrm>
             <a:custGeom>
               <a:avLst/>
               <a:pathLst>
-                <a:path w="7799693" h="0">
+                <a:path w="7660515" h="0">
                   <a:moveTo>
                     <a:pt x="0" y="0"/>
                   </a:moveTo>
                   <a:lnTo>
-                    <a:pt x="7799693" y="0"/>
-                  </a:lnTo>
-                  <a:lnTo>
-                    <a:pt x="7799693" y="0"/>
+                    <a:pt x="7660515" y="0"/>
+                  </a:lnTo>
+                  <a:lnTo>
+                    <a:pt x="7660515" y="0"/>
                   </a:lnTo>
                 </a:path>
               </a:pathLst>
@@ -2873,21 +2865,21 @@
           </p:nvSpPr>
           <p:spPr>
             <a:xfrm>
-              <a:off x="2057816" y="2073503"/>
-              <a:ext cx="0" cy="3649639"/>
+              <a:off x="887106" y="2202958"/>
+              <a:ext cx="7660515" cy="0"/>
             </a:xfrm>
             <a:custGeom>
               <a:avLst/>
               <a:pathLst>
-                <a:path w="0" h="3649639">
+                <a:path w="7660515" h="0">
                   <a:moveTo>
-                    <a:pt x="0" y="3649639"/>
+                    <a:pt x="0" y="0"/>
                   </a:moveTo>
                   <a:lnTo>
-                    <a:pt x="0" y="0"/>
-                  </a:lnTo>
-                  <a:lnTo>
-                    <a:pt x="0" y="0"/>
+                    <a:pt x="7660515" y="0"/>
+                  </a:lnTo>
+                  <a:lnTo>
+                    <a:pt x="7660515" y="0"/>
                   </a:lnTo>
                 </a:path>
               </a:pathLst>
@@ -2916,15 +2908,15 @@
           </p:nvSpPr>
           <p:spPr>
             <a:xfrm>
-              <a:off x="3809601" y="2073503"/>
-              <a:ext cx="0" cy="3649639"/>
+              <a:off x="2105273" y="2143092"/>
+              <a:ext cx="0" cy="1317069"/>
             </a:xfrm>
             <a:custGeom>
               <a:avLst/>
               <a:pathLst>
-                <a:path w="0" h="3649639">
+                <a:path w="0" h="1317069">
                   <a:moveTo>
-                    <a:pt x="0" y="3649639"/>
+                    <a:pt x="0" y="1317069"/>
                   </a:moveTo>
                   <a:lnTo>
                     <a:pt x="0" y="0"/>
@@ -2959,15 +2951,15 @@
           </p:nvSpPr>
           <p:spPr>
             <a:xfrm>
-              <a:off x="5561386" y="2073503"/>
-              <a:ext cx="0" cy="3649639"/>
+              <a:off x="3825799" y="2143092"/>
+              <a:ext cx="0" cy="1317069"/>
             </a:xfrm>
             <a:custGeom>
               <a:avLst/>
               <a:pathLst>
-                <a:path w="0" h="3649639">
+                <a:path w="0" h="1317069">
                   <a:moveTo>
-                    <a:pt x="0" y="3649639"/>
+                    <a:pt x="0" y="1317069"/>
                   </a:moveTo>
                   <a:lnTo>
                     <a:pt x="0" y="0"/>
@@ -3002,15 +2994,15 @@
           </p:nvSpPr>
           <p:spPr>
             <a:xfrm>
-              <a:off x="7313171" y="2073503"/>
-              <a:ext cx="0" cy="3649639"/>
+              <a:off x="5546325" y="2143092"/>
+              <a:ext cx="0" cy="1317069"/>
             </a:xfrm>
             <a:custGeom>
               <a:avLst/>
               <a:pathLst>
-                <a:path w="0" h="3649639">
+                <a:path w="0" h="1317069">
                   <a:moveTo>
-                    <a:pt x="0" y="3649639"/>
+                    <a:pt x="0" y="1317069"/>
                   </a:moveTo>
                   <a:lnTo>
                     <a:pt x="0" y="0"/>
@@ -3039,618 +3031,661 @@
         </p:sp>
         <p:sp>
           <p:nvSpPr>
-            <p:cNvPr id="22" name="pg22"/>
+            <p:cNvPr id="22" name="pl22"/>
             <p:cNvSpPr/>
             <p:nvPr/>
           </p:nvSpPr>
           <p:spPr>
             <a:xfrm>
-              <a:off x="1172049" y="2697812"/>
-              <a:ext cx="7090630" cy="2700903"/>
+              <a:off x="7266851" y="2143092"/>
+              <a:ext cx="0" cy="1317069"/>
             </a:xfrm>
             <a:custGeom>
               <a:avLst/>
               <a:pathLst>
-                <a:path w="7090630" h="2700903">
+                <a:path w="0" h="1317069">
+                  <a:moveTo>
+                    <a:pt x="0" y="1317069"/>
+                  </a:moveTo>
+                  <a:lnTo>
+                    <a:pt x="0" y="0"/>
+                  </a:lnTo>
+                  <a:lnTo>
+                    <a:pt x="0" y="0"/>
+                  </a:lnTo>
+                </a:path>
+              </a:pathLst>
+            </a:custGeom>
+            <a:ln w="13550" cap="flat">
+              <a:solidFill>
+                <a:srgbClr val="EBEBEB">
+                  <a:alpha val="100000"/>
+                </a:srgbClr>
+              </a:solidFill>
+              <a:prstDash val="solid"/>
+              <a:round/>
+            </a:ln>
+          </p:spPr>
+          <p:txBody>
+            <a:bodyPr/>
+            <a:lstStyle/>
+            <a:p/>
+          </p:txBody>
+        </p:sp>
+        <p:sp>
+          <p:nvSpPr>
+            <p:cNvPr id="23" name="pg23"/>
+            <p:cNvSpPr/>
+            <p:nvPr/>
+          </p:nvSpPr>
+          <p:spPr>
+            <a:xfrm>
+              <a:off x="1235312" y="2368390"/>
+              <a:ext cx="6964104" cy="974692"/>
+            </a:xfrm>
+            <a:custGeom>
+              <a:avLst/>
+              <a:pathLst>
+                <a:path w="6964104" h="974692">
                   <a:moveTo>
                     <a:pt x="0" y="0"/>
                   </a:moveTo>
                   <a:lnTo>
-                    <a:pt x="71622" y="82333"/>
-                  </a:lnTo>
-                  <a:lnTo>
-                    <a:pt x="143245" y="162296"/>
-                  </a:lnTo>
-                  <a:lnTo>
-                    <a:pt x="214867" y="239956"/>
-                  </a:lnTo>
-                  <a:lnTo>
-                    <a:pt x="286490" y="315381"/>
-                  </a:lnTo>
-                  <a:lnTo>
-                    <a:pt x="358112" y="388633"/>
-                  </a:lnTo>
-                  <a:lnTo>
-                    <a:pt x="429735" y="459777"/>
-                  </a:lnTo>
-                  <a:lnTo>
-                    <a:pt x="501357" y="528872"/>
-                  </a:lnTo>
-                  <a:lnTo>
-                    <a:pt x="572980" y="595977"/>
-                  </a:lnTo>
-                  <a:lnTo>
-                    <a:pt x="644602" y="661150"/>
-                  </a:lnTo>
-                  <a:lnTo>
-                    <a:pt x="716225" y="724447"/>
-                  </a:lnTo>
-                  <a:lnTo>
-                    <a:pt x="787847" y="785921"/>
-                  </a:lnTo>
-                  <a:lnTo>
-                    <a:pt x="859470" y="845625"/>
-                  </a:lnTo>
-                  <a:lnTo>
-                    <a:pt x="931092" y="903610"/>
-                  </a:lnTo>
-                  <a:lnTo>
-                    <a:pt x="1002715" y="959925"/>
-                  </a:lnTo>
-                  <a:lnTo>
-                    <a:pt x="1074337" y="1014619"/>
-                  </a:lnTo>
-                  <a:lnTo>
-                    <a:pt x="1145960" y="1067738"/>
-                  </a:lnTo>
-                  <a:lnTo>
-                    <a:pt x="1217582" y="1119328"/>
-                  </a:lnTo>
-                  <a:lnTo>
-                    <a:pt x="1289205" y="1169432"/>
-                  </a:lnTo>
-                  <a:lnTo>
-                    <a:pt x="1360827" y="1218093"/>
-                  </a:lnTo>
-                  <a:lnTo>
-                    <a:pt x="1432450" y="1265353"/>
-                  </a:lnTo>
-                  <a:lnTo>
-                    <a:pt x="1504073" y="1311253"/>
-                  </a:lnTo>
-                  <a:lnTo>
-                    <a:pt x="1575695" y="1355831"/>
-                  </a:lnTo>
-                  <a:lnTo>
-                    <a:pt x="1647318" y="1399125"/>
-                  </a:lnTo>
-                  <a:lnTo>
-                    <a:pt x="1718940" y="1441173"/>
-                  </a:lnTo>
-                  <a:lnTo>
-                    <a:pt x="1790563" y="1482010"/>
-                  </a:lnTo>
-                  <a:lnTo>
-                    <a:pt x="1862185" y="1521671"/>
-                  </a:lnTo>
-                  <a:lnTo>
-                    <a:pt x="1933808" y="1560190"/>
-                  </a:lnTo>
-                  <a:lnTo>
-                    <a:pt x="2005430" y="1597600"/>
-                  </a:lnTo>
-                  <a:lnTo>
-                    <a:pt x="2077053" y="1633933"/>
-                  </a:lnTo>
-                  <a:lnTo>
-                    <a:pt x="2148675" y="1669219"/>
-                  </a:lnTo>
-                  <a:lnTo>
-                    <a:pt x="2220298" y="1703490"/>
-                  </a:lnTo>
-                  <a:lnTo>
-                    <a:pt x="2291920" y="1736774"/>
-                  </a:lnTo>
-                  <a:lnTo>
-                    <a:pt x="2363543" y="1769100"/>
-                  </a:lnTo>
-                  <a:lnTo>
-                    <a:pt x="2435165" y="1800494"/>
-                  </a:lnTo>
-                  <a:lnTo>
-                    <a:pt x="2506788" y="1830985"/>
-                  </a:lnTo>
-                  <a:lnTo>
-                    <a:pt x="2578410" y="1860598"/>
-                  </a:lnTo>
-                  <a:lnTo>
-                    <a:pt x="2650033" y="1889358"/>
-                  </a:lnTo>
-                  <a:lnTo>
-                    <a:pt x="2721655" y="1917290"/>
-                  </a:lnTo>
-                  <a:lnTo>
-                    <a:pt x="2793278" y="1944418"/>
-                  </a:lnTo>
-                  <a:lnTo>
-                    <a:pt x="2864901" y="1970765"/>
-                  </a:lnTo>
-                  <a:lnTo>
-                    <a:pt x="2936523" y="1996353"/>
-                  </a:lnTo>
-                  <a:lnTo>
-                    <a:pt x="3008146" y="2021204"/>
-                  </a:lnTo>
-                  <a:lnTo>
-                    <a:pt x="3079768" y="2036399"/>
-                  </a:lnTo>
-                  <a:lnTo>
-                    <a:pt x="3151391" y="2046338"/>
-                  </a:lnTo>
-                  <a:lnTo>
-                    <a:pt x="3223013" y="2056158"/>
-                  </a:lnTo>
-                  <a:lnTo>
-                    <a:pt x="3294636" y="2065859"/>
-                  </a:lnTo>
-                  <a:lnTo>
-                    <a:pt x="3366258" y="2075442"/>
-                  </a:lnTo>
-                  <a:lnTo>
-                    <a:pt x="3437881" y="2084910"/>
-                  </a:lnTo>
-                  <a:lnTo>
-                    <a:pt x="3509503" y="2094264"/>
-                  </a:lnTo>
-                  <a:lnTo>
-                    <a:pt x="3581126" y="2103505"/>
-                  </a:lnTo>
-                  <a:lnTo>
-                    <a:pt x="3652748" y="2112634"/>
-                  </a:lnTo>
-                  <a:lnTo>
-                    <a:pt x="3724371" y="2121653"/>
-                  </a:lnTo>
-                  <a:lnTo>
-                    <a:pt x="3795993" y="2130563"/>
-                  </a:lnTo>
-                  <a:lnTo>
-                    <a:pt x="3867616" y="2139365"/>
-                  </a:lnTo>
-                  <a:lnTo>
-                    <a:pt x="3939238" y="2148061"/>
-                  </a:lnTo>
-                  <a:lnTo>
-                    <a:pt x="4010861" y="2156652"/>
-                  </a:lnTo>
-                  <a:lnTo>
-                    <a:pt x="4082483" y="2165139"/>
-                  </a:lnTo>
-                  <a:lnTo>
-                    <a:pt x="4154106" y="2173524"/>
-                  </a:lnTo>
-                  <a:lnTo>
-                    <a:pt x="4225729" y="2181808"/>
-                  </a:lnTo>
-                  <a:lnTo>
-                    <a:pt x="4297351" y="2189991"/>
-                  </a:lnTo>
-                  <a:lnTo>
-                    <a:pt x="4368974" y="2198076"/>
-                  </a:lnTo>
-                  <a:lnTo>
-                    <a:pt x="4440596" y="2206063"/>
-                  </a:lnTo>
-                  <a:lnTo>
-                    <a:pt x="4512219" y="2213954"/>
-                  </a:lnTo>
-                  <a:lnTo>
-                    <a:pt x="4583841" y="2221749"/>
-                  </a:lnTo>
-                  <a:lnTo>
-                    <a:pt x="4655464" y="2229450"/>
-                  </a:lnTo>
-                  <a:lnTo>
-                    <a:pt x="4727086" y="2237058"/>
-                  </a:lnTo>
-                  <a:lnTo>
-                    <a:pt x="4798709" y="2244574"/>
-                  </a:lnTo>
-                  <a:lnTo>
-                    <a:pt x="4870331" y="2252000"/>
-                  </a:lnTo>
-                  <a:lnTo>
-                    <a:pt x="4941954" y="2259336"/>
-                  </a:lnTo>
-                  <a:lnTo>
-                    <a:pt x="5013576" y="2266583"/>
-                  </a:lnTo>
-                  <a:lnTo>
-                    <a:pt x="5085199" y="2273743"/>
-                  </a:lnTo>
-                  <a:lnTo>
-                    <a:pt x="5156821" y="2280816"/>
-                  </a:lnTo>
-                  <a:lnTo>
-                    <a:pt x="5228444" y="2287804"/>
-                  </a:lnTo>
-                  <a:lnTo>
-                    <a:pt x="5300066" y="2294707"/>
-                  </a:lnTo>
-                  <a:lnTo>
-                    <a:pt x="5371689" y="2301527"/>
-                  </a:lnTo>
-                  <a:lnTo>
-                    <a:pt x="5443311" y="2308265"/>
-                  </a:lnTo>
-                  <a:lnTo>
-                    <a:pt x="5514934" y="2314921"/>
-                  </a:lnTo>
-                  <a:lnTo>
-                    <a:pt x="5586557" y="2321497"/>
-                  </a:lnTo>
-                  <a:lnTo>
-                    <a:pt x="5658179" y="2327993"/>
-                  </a:lnTo>
-                  <a:lnTo>
-                    <a:pt x="5729802" y="2334412"/>
-                  </a:lnTo>
-                  <a:lnTo>
-                    <a:pt x="5801424" y="2340752"/>
-                  </a:lnTo>
-                  <a:lnTo>
-                    <a:pt x="5873047" y="2347016"/>
-                  </a:lnTo>
-                  <a:lnTo>
-                    <a:pt x="5944669" y="2353204"/>
-                  </a:lnTo>
-                  <a:lnTo>
-                    <a:pt x="6016292" y="2359318"/>
-                  </a:lnTo>
-                  <a:lnTo>
-                    <a:pt x="6087914" y="2365358"/>
-                  </a:lnTo>
-                  <a:lnTo>
-                    <a:pt x="6159537" y="2371325"/>
-                  </a:lnTo>
-                  <a:lnTo>
-                    <a:pt x="6231159" y="2377219"/>
-                  </a:lnTo>
-                  <a:lnTo>
-                    <a:pt x="6302782" y="2383043"/>
-                  </a:lnTo>
-                  <a:lnTo>
-                    <a:pt x="6374404" y="2388796"/>
-                  </a:lnTo>
-                  <a:lnTo>
-                    <a:pt x="6446027" y="2394480"/>
-                  </a:lnTo>
-                  <a:lnTo>
-                    <a:pt x="6517649" y="2400095"/>
-                  </a:lnTo>
-                  <a:lnTo>
-                    <a:pt x="6589272" y="2405642"/>
-                  </a:lnTo>
-                  <a:lnTo>
-                    <a:pt x="6660894" y="2411123"/>
-                  </a:lnTo>
-                  <a:lnTo>
-                    <a:pt x="6732517" y="2416537"/>
-                  </a:lnTo>
-                  <a:lnTo>
-                    <a:pt x="6804139" y="2421886"/>
-                  </a:lnTo>
-                  <a:lnTo>
-                    <a:pt x="6875762" y="2427170"/>
-                  </a:lnTo>
-                  <a:lnTo>
-                    <a:pt x="6947385" y="2432390"/>
-                  </a:lnTo>
-                  <a:lnTo>
-                    <a:pt x="7019007" y="2437547"/>
-                  </a:lnTo>
-                  <a:lnTo>
-                    <a:pt x="7090630" y="2442642"/>
-                  </a:lnTo>
-                  <a:lnTo>
-                    <a:pt x="7090630" y="2700903"/>
-                  </a:lnTo>
-                  <a:lnTo>
-                    <a:pt x="7019007" y="2696203"/>
-                  </a:lnTo>
-                  <a:lnTo>
-                    <a:pt x="6947385" y="2691363"/>
-                  </a:lnTo>
-                  <a:lnTo>
-                    <a:pt x="6875762" y="2686381"/>
-                  </a:lnTo>
-                  <a:lnTo>
-                    <a:pt x="6804139" y="2681250"/>
-                  </a:lnTo>
-                  <a:lnTo>
-                    <a:pt x="6732517" y="2675967"/>
-                  </a:lnTo>
-                  <a:lnTo>
-                    <a:pt x="6660894" y="2670528"/>
-                  </a:lnTo>
-                  <a:lnTo>
-                    <a:pt x="6589272" y="2664927"/>
-                  </a:lnTo>
-                  <a:lnTo>
-                    <a:pt x="6517649" y="2659160"/>
-                  </a:lnTo>
-                  <a:lnTo>
-                    <a:pt x="6446027" y="2653223"/>
-                  </a:lnTo>
-                  <a:lnTo>
-                    <a:pt x="6374404" y="2647109"/>
-                  </a:lnTo>
-                  <a:lnTo>
-                    <a:pt x="6302782" y="2640814"/>
-                  </a:lnTo>
-                  <a:lnTo>
-                    <a:pt x="6231159" y="2634333"/>
-                  </a:lnTo>
-                  <a:lnTo>
-                    <a:pt x="6159537" y="2627659"/>
-                  </a:lnTo>
-                  <a:lnTo>
-                    <a:pt x="6087914" y="2620787"/>
-                  </a:lnTo>
-                  <a:lnTo>
-                    <a:pt x="6016292" y="2613712"/>
-                  </a:lnTo>
-                  <a:lnTo>
-                    <a:pt x="5944669" y="2606427"/>
-                  </a:lnTo>
-                  <a:lnTo>
-                    <a:pt x="5873047" y="2598926"/>
-                  </a:lnTo>
-                  <a:lnTo>
-                    <a:pt x="5801424" y="2591203"/>
-                  </a:lnTo>
-                  <a:lnTo>
-                    <a:pt x="5729802" y="2583250"/>
-                  </a:lnTo>
-                  <a:lnTo>
-                    <a:pt x="5658179" y="2575062"/>
-                  </a:lnTo>
-                  <a:lnTo>
-                    <a:pt x="5586557" y="2566631"/>
-                  </a:lnTo>
-                  <a:lnTo>
-                    <a:pt x="5514934" y="2557950"/>
-                  </a:lnTo>
-                  <a:lnTo>
-                    <a:pt x="5443311" y="2549012"/>
-                  </a:lnTo>
-                  <a:lnTo>
-                    <a:pt x="5371689" y="2539809"/>
-                  </a:lnTo>
-                  <a:lnTo>
-                    <a:pt x="5300066" y="2530333"/>
-                  </a:lnTo>
-                  <a:lnTo>
-                    <a:pt x="5228444" y="2520576"/>
-                  </a:lnTo>
-                  <a:lnTo>
-                    <a:pt x="5156821" y="2510529"/>
-                  </a:lnTo>
-                  <a:lnTo>
-                    <a:pt x="5085199" y="2500185"/>
-                  </a:lnTo>
-                  <a:lnTo>
-                    <a:pt x="5013576" y="2489534"/>
-                  </a:lnTo>
-                  <a:lnTo>
-                    <a:pt x="4941954" y="2478568"/>
-                  </a:lnTo>
-                  <a:lnTo>
-                    <a:pt x="4870331" y="2467276"/>
-                  </a:lnTo>
-                  <a:lnTo>
-                    <a:pt x="4798709" y="2455649"/>
-                  </a:lnTo>
-                  <a:lnTo>
-                    <a:pt x="4727086" y="2443678"/>
-                  </a:lnTo>
-                  <a:lnTo>
-                    <a:pt x="4655464" y="2431352"/>
-                  </a:lnTo>
-                  <a:lnTo>
-                    <a:pt x="4583841" y="2418661"/>
-                  </a:lnTo>
-                  <a:lnTo>
-                    <a:pt x="4512219" y="2405593"/>
-                  </a:lnTo>
-                  <a:lnTo>
-                    <a:pt x="4440596" y="2392138"/>
-                  </a:lnTo>
-                  <a:lnTo>
-                    <a:pt x="4368974" y="2378283"/>
-                  </a:lnTo>
-                  <a:lnTo>
-                    <a:pt x="4297351" y="2364018"/>
-                  </a:lnTo>
-                  <a:lnTo>
-                    <a:pt x="4225729" y="2349331"/>
-                  </a:lnTo>
-                  <a:lnTo>
-                    <a:pt x="4154106" y="2334207"/>
-                  </a:lnTo>
-                  <a:lnTo>
-                    <a:pt x="4082483" y="2318636"/>
-                  </a:lnTo>
-                  <a:lnTo>
-                    <a:pt x="4010861" y="2302603"/>
-                  </a:lnTo>
-                  <a:lnTo>
-                    <a:pt x="3939238" y="2286094"/>
-                  </a:lnTo>
-                  <a:lnTo>
-                    <a:pt x="3867616" y="2269096"/>
-                  </a:lnTo>
-                  <a:lnTo>
-                    <a:pt x="3795993" y="2251594"/>
-                  </a:lnTo>
-                  <a:lnTo>
-                    <a:pt x="3724371" y="2233573"/>
-                  </a:lnTo>
-                  <a:lnTo>
-                    <a:pt x="3652748" y="2215018"/>
-                  </a:lnTo>
-                  <a:lnTo>
-                    <a:pt x="3581126" y="2195913"/>
-                  </a:lnTo>
-                  <a:lnTo>
-                    <a:pt x="3509503" y="2176241"/>
-                  </a:lnTo>
-                  <a:lnTo>
-                    <a:pt x="3437881" y="2155986"/>
-                  </a:lnTo>
-                  <a:lnTo>
-                    <a:pt x="3366258" y="2135131"/>
-                  </a:lnTo>
-                  <a:lnTo>
-                    <a:pt x="3294636" y="2113657"/>
-                  </a:lnTo>
-                  <a:lnTo>
-                    <a:pt x="3223013" y="2091547"/>
-                  </a:lnTo>
-                  <a:lnTo>
-                    <a:pt x="3151391" y="2068781"/>
-                  </a:lnTo>
-                  <a:lnTo>
-                    <a:pt x="3079768" y="2045340"/>
-                  </a:lnTo>
-                  <a:lnTo>
-                    <a:pt x="3008146" y="2026337"/>
-                  </a:lnTo>
-                  <a:lnTo>
-                    <a:pt x="2936523" y="2016153"/>
-                  </a:lnTo>
-                  <a:lnTo>
-                    <a:pt x="2864901" y="2005845"/>
-                  </a:lnTo>
-                  <a:lnTo>
-                    <a:pt x="2793278" y="1995410"/>
-                  </a:lnTo>
-                  <a:lnTo>
-                    <a:pt x="2721655" y="1984848"/>
-                  </a:lnTo>
-                  <a:lnTo>
-                    <a:pt x="2650033" y="1974157"/>
-                  </a:lnTo>
-                  <a:lnTo>
-                    <a:pt x="2578410" y="1963335"/>
-                  </a:lnTo>
-                  <a:lnTo>
-                    <a:pt x="2506788" y="1952381"/>
-                  </a:lnTo>
-                  <a:lnTo>
-                    <a:pt x="2435165" y="1941293"/>
-                  </a:lnTo>
-                  <a:lnTo>
-                    <a:pt x="2363543" y="1930069"/>
-                  </a:lnTo>
-                  <a:lnTo>
-                    <a:pt x="2291920" y="1918708"/>
-                  </a:lnTo>
-                  <a:lnTo>
-                    <a:pt x="2220298" y="1907209"/>
-                  </a:lnTo>
-                  <a:lnTo>
-                    <a:pt x="2148675" y="1895568"/>
-                  </a:lnTo>
-                  <a:lnTo>
-                    <a:pt x="2077053" y="1883786"/>
-                  </a:lnTo>
-                  <a:lnTo>
-                    <a:pt x="2005430" y="1871859"/>
-                  </a:lnTo>
-                  <a:lnTo>
-                    <a:pt x="1933808" y="1859787"/>
-                  </a:lnTo>
-                  <a:lnTo>
-                    <a:pt x="1862185" y="1847567"/>
-                  </a:lnTo>
-                  <a:lnTo>
-                    <a:pt x="1790563" y="1835197"/>
-                  </a:lnTo>
-                  <a:lnTo>
-                    <a:pt x="1718940" y="1822677"/>
-                  </a:lnTo>
-                  <a:lnTo>
-                    <a:pt x="1647318" y="1810003"/>
-                  </a:lnTo>
-                  <a:lnTo>
-                    <a:pt x="1575695" y="1797174"/>
-                  </a:lnTo>
-                  <a:lnTo>
-                    <a:pt x="1504073" y="1784189"/>
-                  </a:lnTo>
-                  <a:lnTo>
-                    <a:pt x="1432450" y="1771045"/>
-                  </a:lnTo>
-                  <a:lnTo>
-                    <a:pt x="1360827" y="1757740"/>
-                  </a:lnTo>
-                  <a:lnTo>
-                    <a:pt x="1289205" y="1744273"/>
-                  </a:lnTo>
-                  <a:lnTo>
-                    <a:pt x="1217582" y="1730640"/>
-                  </a:lnTo>
-                  <a:lnTo>
-                    <a:pt x="1145960" y="1716842"/>
-                  </a:lnTo>
-                  <a:lnTo>
-                    <a:pt x="1074337" y="1702874"/>
-                  </a:lnTo>
-                  <a:lnTo>
-                    <a:pt x="1002715" y="1688736"/>
-                  </a:lnTo>
-                  <a:lnTo>
-                    <a:pt x="931092" y="1674425"/>
-                  </a:lnTo>
-                  <a:lnTo>
-                    <a:pt x="859470" y="1659939"/>
-                  </a:lnTo>
-                  <a:lnTo>
-                    <a:pt x="787847" y="1645276"/>
-                  </a:lnTo>
-                  <a:lnTo>
-                    <a:pt x="716225" y="1630434"/>
-                  </a:lnTo>
-                  <a:lnTo>
-                    <a:pt x="644602" y="1615410"/>
-                  </a:lnTo>
-                  <a:lnTo>
-                    <a:pt x="572980" y="1600203"/>
-                  </a:lnTo>
-                  <a:lnTo>
-                    <a:pt x="501357" y="1584810"/>
-                  </a:lnTo>
-                  <a:lnTo>
-                    <a:pt x="429735" y="1569228"/>
-                  </a:lnTo>
-                  <a:lnTo>
-                    <a:pt x="358112" y="1553456"/>
-                  </a:lnTo>
-                  <a:lnTo>
-                    <a:pt x="286490" y="1537492"/>
-                  </a:lnTo>
-                  <a:lnTo>
-                    <a:pt x="214867" y="1521332"/>
-                  </a:lnTo>
-                  <a:lnTo>
-                    <a:pt x="143245" y="1504975"/>
-                  </a:lnTo>
-                  <a:lnTo>
-                    <a:pt x="71622" y="1488417"/>
-                  </a:lnTo>
-                  <a:lnTo>
-                    <a:pt x="0" y="1471658"/>
+                    <a:pt x="70344" y="29712"/>
+                  </a:lnTo>
+                  <a:lnTo>
+                    <a:pt x="140688" y="58568"/>
+                  </a:lnTo>
+                  <a:lnTo>
+                    <a:pt x="211033" y="86594"/>
+                  </a:lnTo>
+                  <a:lnTo>
+                    <a:pt x="281377" y="113813"/>
+                  </a:lnTo>
+                  <a:lnTo>
+                    <a:pt x="351722" y="140248"/>
+                  </a:lnTo>
+                  <a:lnTo>
+                    <a:pt x="422066" y="165922"/>
+                  </a:lnTo>
+                  <a:lnTo>
+                    <a:pt x="492411" y="190857"/>
+                  </a:lnTo>
+                  <a:lnTo>
+                    <a:pt x="562755" y="215074"/>
+                  </a:lnTo>
+                  <a:lnTo>
+                    <a:pt x="633100" y="238593"/>
+                  </a:lnTo>
+                  <a:lnTo>
+                    <a:pt x="703444" y="261436"/>
+                  </a:lnTo>
+                  <a:lnTo>
+                    <a:pt x="773789" y="283620"/>
+                  </a:lnTo>
+                  <a:lnTo>
+                    <a:pt x="844133" y="305166"/>
+                  </a:lnTo>
+                  <a:lnTo>
+                    <a:pt x="914478" y="326091"/>
+                  </a:lnTo>
+                  <a:lnTo>
+                    <a:pt x="984822" y="346414"/>
+                  </a:lnTo>
+                  <a:lnTo>
+                    <a:pt x="1055167" y="366152"/>
+                  </a:lnTo>
+                  <a:lnTo>
+                    <a:pt x="1125511" y="385321"/>
+                  </a:lnTo>
+                  <a:lnTo>
+                    <a:pt x="1195856" y="403939"/>
+                  </a:lnTo>
+                  <a:lnTo>
+                    <a:pt x="1266200" y="422020"/>
+                  </a:lnTo>
+                  <a:lnTo>
+                    <a:pt x="1336545" y="439581"/>
+                  </a:lnTo>
+                  <a:lnTo>
+                    <a:pt x="1406889" y="456636"/>
+                  </a:lnTo>
+                  <a:lnTo>
+                    <a:pt x="1477234" y="473200"/>
+                  </a:lnTo>
+                  <a:lnTo>
+                    <a:pt x="1547578" y="489287"/>
+                  </a:lnTo>
+                  <a:lnTo>
+                    <a:pt x="1617923" y="504911"/>
+                  </a:lnTo>
+                  <a:lnTo>
+                    <a:pt x="1688267" y="520085"/>
+                  </a:lnTo>
+                  <a:lnTo>
+                    <a:pt x="1758612" y="534822"/>
+                  </a:lnTo>
+                  <a:lnTo>
+                    <a:pt x="1828956" y="549135"/>
+                  </a:lnTo>
+                  <a:lnTo>
+                    <a:pt x="1899301" y="563036"/>
+                  </a:lnTo>
+                  <a:lnTo>
+                    <a:pt x="1969645" y="576536"/>
+                  </a:lnTo>
+                  <a:lnTo>
+                    <a:pt x="2039990" y="589648"/>
+                  </a:lnTo>
+                  <a:lnTo>
+                    <a:pt x="2110334" y="602382"/>
+                  </a:lnTo>
+                  <a:lnTo>
+                    <a:pt x="2180679" y="614749"/>
+                  </a:lnTo>
+                  <a:lnTo>
+                    <a:pt x="2251023" y="626761"/>
+                  </a:lnTo>
+                  <a:lnTo>
+                    <a:pt x="2321368" y="638426"/>
+                  </a:lnTo>
+                  <a:lnTo>
+                    <a:pt x="2391712" y="649756"/>
+                  </a:lnTo>
+                  <a:lnTo>
+                    <a:pt x="2462057" y="660759"/>
+                  </a:lnTo>
+                  <a:lnTo>
+                    <a:pt x="2532401" y="671446"/>
+                  </a:lnTo>
+                  <a:lnTo>
+                    <a:pt x="2602746" y="681825"/>
+                  </a:lnTo>
+                  <a:lnTo>
+                    <a:pt x="2673090" y="691905"/>
+                  </a:lnTo>
+                  <a:lnTo>
+                    <a:pt x="2743435" y="701694"/>
+                  </a:lnTo>
+                  <a:lnTo>
+                    <a:pt x="2813779" y="711202"/>
+                  </a:lnTo>
+                  <a:lnTo>
+                    <a:pt x="2884124" y="720436"/>
+                  </a:lnTo>
+                  <a:lnTo>
+                    <a:pt x="2954468" y="729405"/>
+                  </a:lnTo>
+                  <a:lnTo>
+                    <a:pt x="3024813" y="734888"/>
+                  </a:lnTo>
+                  <a:lnTo>
+                    <a:pt x="3095157" y="738475"/>
+                  </a:lnTo>
+                  <a:lnTo>
+                    <a:pt x="3165502" y="742019"/>
+                  </a:lnTo>
+                  <a:lnTo>
+                    <a:pt x="3235846" y="745519"/>
+                  </a:lnTo>
+                  <a:lnTo>
+                    <a:pt x="3306191" y="748978"/>
+                  </a:lnTo>
+                  <a:lnTo>
+                    <a:pt x="3376535" y="752395"/>
+                  </a:lnTo>
+                  <a:lnTo>
+                    <a:pt x="3446880" y="755770"/>
+                  </a:lnTo>
+                  <a:lnTo>
+                    <a:pt x="3517224" y="759105"/>
+                  </a:lnTo>
+                  <a:lnTo>
+                    <a:pt x="3587569" y="762400"/>
+                  </a:lnTo>
+                  <a:lnTo>
+                    <a:pt x="3657913" y="765654"/>
+                  </a:lnTo>
+                  <a:lnTo>
+                    <a:pt x="3728257" y="768870"/>
+                  </a:lnTo>
+                  <a:lnTo>
+                    <a:pt x="3798602" y="772046"/>
+                  </a:lnTo>
+                  <a:lnTo>
+                    <a:pt x="3868946" y="775184"/>
+                  </a:lnTo>
+                  <a:lnTo>
+                    <a:pt x="3939291" y="778285"/>
+                  </a:lnTo>
+                  <a:lnTo>
+                    <a:pt x="4009635" y="781348"/>
+                  </a:lnTo>
+                  <a:lnTo>
+                    <a:pt x="4079980" y="784373"/>
+                  </a:lnTo>
+                  <a:lnTo>
+                    <a:pt x="4150324" y="787363"/>
+                  </a:lnTo>
+                  <a:lnTo>
+                    <a:pt x="4220669" y="790316"/>
+                  </a:lnTo>
+                  <a:lnTo>
+                    <a:pt x="4291013" y="793234"/>
+                  </a:lnTo>
+                  <a:lnTo>
+                    <a:pt x="4361358" y="796116"/>
+                  </a:lnTo>
+                  <a:lnTo>
+                    <a:pt x="4431702" y="798963"/>
+                  </a:lnTo>
+                  <a:lnTo>
+                    <a:pt x="4502047" y="801777"/>
+                  </a:lnTo>
+                  <a:lnTo>
+                    <a:pt x="4572391" y="804556"/>
+                  </a:lnTo>
+                  <a:lnTo>
+                    <a:pt x="4642736" y="807301"/>
+                  </a:lnTo>
+                  <a:lnTo>
+                    <a:pt x="4713080" y="810014"/>
+                  </a:lnTo>
+                  <a:lnTo>
+                    <a:pt x="4783425" y="812693"/>
+                  </a:lnTo>
+                  <a:lnTo>
+                    <a:pt x="4853769" y="815341"/>
+                  </a:lnTo>
+                  <a:lnTo>
+                    <a:pt x="4924114" y="817956"/>
+                  </a:lnTo>
+                  <a:lnTo>
+                    <a:pt x="4994458" y="820540"/>
+                  </a:lnTo>
+                  <a:lnTo>
+                    <a:pt x="5064803" y="823092"/>
+                  </a:lnTo>
+                  <a:lnTo>
+                    <a:pt x="5135147" y="825614"/>
+                  </a:lnTo>
+                  <a:lnTo>
+                    <a:pt x="5205492" y="828105"/>
+                  </a:lnTo>
+                  <a:lnTo>
+                    <a:pt x="5275836" y="830567"/>
+                  </a:lnTo>
+                  <a:lnTo>
+                    <a:pt x="5346181" y="832998"/>
+                  </a:lnTo>
+                  <a:lnTo>
+                    <a:pt x="5416525" y="835400"/>
+                  </a:lnTo>
+                  <a:lnTo>
+                    <a:pt x="5486870" y="837773"/>
+                  </a:lnTo>
+                  <a:lnTo>
+                    <a:pt x="5557214" y="840118"/>
+                  </a:lnTo>
+                  <a:lnTo>
+                    <a:pt x="5627559" y="842434"/>
+                  </a:lnTo>
+                  <a:lnTo>
+                    <a:pt x="5697903" y="844722"/>
+                  </a:lnTo>
+                  <a:lnTo>
+                    <a:pt x="5768248" y="846983"/>
+                  </a:lnTo>
+                  <a:lnTo>
+                    <a:pt x="5838592" y="849216"/>
+                  </a:lnTo>
+                  <a:lnTo>
+                    <a:pt x="5908937" y="851422"/>
+                  </a:lnTo>
+                  <a:lnTo>
+                    <a:pt x="5979281" y="853602"/>
+                  </a:lnTo>
+                  <a:lnTo>
+                    <a:pt x="6049626" y="855755"/>
+                  </a:lnTo>
+                  <a:lnTo>
+                    <a:pt x="6119970" y="857882"/>
+                  </a:lnTo>
+                  <a:lnTo>
+                    <a:pt x="6190315" y="859984"/>
+                  </a:lnTo>
+                  <a:lnTo>
+                    <a:pt x="6260659" y="862060"/>
+                  </a:lnTo>
+                  <a:lnTo>
+                    <a:pt x="6331004" y="864111"/>
+                  </a:lnTo>
+                  <a:lnTo>
+                    <a:pt x="6401348" y="866138"/>
+                  </a:lnTo>
+                  <a:lnTo>
+                    <a:pt x="6471693" y="868139"/>
+                  </a:lnTo>
+                  <a:lnTo>
+                    <a:pt x="6542037" y="870117"/>
+                  </a:lnTo>
+                  <a:lnTo>
+                    <a:pt x="6612382" y="872071"/>
+                  </a:lnTo>
+                  <a:lnTo>
+                    <a:pt x="6682726" y="874001"/>
+                  </a:lnTo>
+                  <a:lnTo>
+                    <a:pt x="6753071" y="875908"/>
+                  </a:lnTo>
+                  <a:lnTo>
+                    <a:pt x="6823415" y="877792"/>
+                  </a:lnTo>
+                  <a:lnTo>
+                    <a:pt x="6893760" y="879653"/>
+                  </a:lnTo>
+                  <a:lnTo>
+                    <a:pt x="6964104" y="881492"/>
+                  </a:lnTo>
+                  <a:lnTo>
+                    <a:pt x="6964104" y="974692"/>
+                  </a:lnTo>
+                  <a:lnTo>
+                    <a:pt x="6893760" y="972996"/>
+                  </a:lnTo>
+                  <a:lnTo>
+                    <a:pt x="6823415" y="971249"/>
+                  </a:lnTo>
+                  <a:lnTo>
+                    <a:pt x="6753071" y="969451"/>
+                  </a:lnTo>
+                  <a:lnTo>
+                    <a:pt x="6682726" y="967600"/>
+                  </a:lnTo>
+                  <a:lnTo>
+                    <a:pt x="6612382" y="965693"/>
+                  </a:lnTo>
+                  <a:lnTo>
+                    <a:pt x="6542037" y="963730"/>
+                  </a:lnTo>
+                  <a:lnTo>
+                    <a:pt x="6471693" y="961709"/>
+                  </a:lnTo>
+                  <a:lnTo>
+                    <a:pt x="6401348" y="959628"/>
+                  </a:lnTo>
+                  <a:lnTo>
+                    <a:pt x="6331004" y="957485"/>
+                  </a:lnTo>
+                  <a:lnTo>
+                    <a:pt x="6260659" y="955279"/>
+                  </a:lnTo>
+                  <a:lnTo>
+                    <a:pt x="6190315" y="953007"/>
+                  </a:lnTo>
+                  <a:lnTo>
+                    <a:pt x="6119970" y="950668"/>
+                  </a:lnTo>
+                  <a:lnTo>
+                    <a:pt x="6049626" y="948260"/>
+                  </a:lnTo>
+                  <a:lnTo>
+                    <a:pt x="5979281" y="945780"/>
+                  </a:lnTo>
+                  <a:lnTo>
+                    <a:pt x="5908937" y="943227"/>
+                  </a:lnTo>
+                  <a:lnTo>
+                    <a:pt x="5838592" y="940598"/>
+                  </a:lnTo>
+                  <a:lnTo>
+                    <a:pt x="5768248" y="937891"/>
+                  </a:lnTo>
+                  <a:lnTo>
+                    <a:pt x="5697903" y="935104"/>
+                  </a:lnTo>
+                  <a:lnTo>
+                    <a:pt x="5627559" y="932234"/>
+                  </a:lnTo>
+                  <a:lnTo>
+                    <a:pt x="5557214" y="929279"/>
+                  </a:lnTo>
+                  <a:lnTo>
+                    <a:pt x="5486870" y="926236"/>
+                  </a:lnTo>
+                  <a:lnTo>
+                    <a:pt x="5416525" y="923104"/>
+                  </a:lnTo>
+                  <a:lnTo>
+                    <a:pt x="5346181" y="919878"/>
+                  </a:lnTo>
+                  <a:lnTo>
+                    <a:pt x="5275836" y="916557"/>
+                  </a:lnTo>
+                  <a:lnTo>
+                    <a:pt x="5205492" y="913137"/>
+                  </a:lnTo>
+                  <a:lnTo>
+                    <a:pt x="5135147" y="909616"/>
+                  </a:lnTo>
+                  <a:lnTo>
+                    <a:pt x="5064803" y="905991"/>
+                  </a:lnTo>
+                  <a:lnTo>
+                    <a:pt x="4994458" y="902258"/>
+                  </a:lnTo>
+                  <a:lnTo>
+                    <a:pt x="4924114" y="898414"/>
+                  </a:lnTo>
+                  <a:lnTo>
+                    <a:pt x="4853769" y="894456"/>
+                  </a:lnTo>
+                  <a:lnTo>
+                    <a:pt x="4783425" y="890382"/>
+                  </a:lnTo>
+                  <a:lnTo>
+                    <a:pt x="4713080" y="886186"/>
+                  </a:lnTo>
+                  <a:lnTo>
+                    <a:pt x="4642736" y="881866"/>
+                  </a:lnTo>
+                  <a:lnTo>
+                    <a:pt x="4572391" y="877417"/>
+                  </a:lnTo>
+                  <a:lnTo>
+                    <a:pt x="4502047" y="872837"/>
+                  </a:lnTo>
+                  <a:lnTo>
+                    <a:pt x="4431702" y="868122"/>
+                  </a:lnTo>
+                  <a:lnTo>
+                    <a:pt x="4361358" y="863266"/>
+                  </a:lnTo>
+                  <a:lnTo>
+                    <a:pt x="4291013" y="858266"/>
+                  </a:lnTo>
+                  <a:lnTo>
+                    <a:pt x="4220669" y="853118"/>
+                  </a:lnTo>
+                  <a:lnTo>
+                    <a:pt x="4150324" y="847818"/>
+                  </a:lnTo>
+                  <a:lnTo>
+                    <a:pt x="4079980" y="842360"/>
+                  </a:lnTo>
+                  <a:lnTo>
+                    <a:pt x="4009635" y="836741"/>
+                  </a:lnTo>
+                  <a:lnTo>
+                    <a:pt x="3939291" y="830955"/>
+                  </a:lnTo>
+                  <a:lnTo>
+                    <a:pt x="3868946" y="824997"/>
+                  </a:lnTo>
+                  <a:lnTo>
+                    <a:pt x="3798602" y="818863"/>
+                  </a:lnTo>
+                  <a:lnTo>
+                    <a:pt x="3728257" y="812547"/>
+                  </a:lnTo>
+                  <a:lnTo>
+                    <a:pt x="3657913" y="806044"/>
+                  </a:lnTo>
+                  <a:lnTo>
+                    <a:pt x="3587569" y="799348"/>
+                  </a:lnTo>
+                  <a:lnTo>
+                    <a:pt x="3517224" y="792453"/>
+                  </a:lnTo>
+                  <a:lnTo>
+                    <a:pt x="3446880" y="785354"/>
+                  </a:lnTo>
+                  <a:lnTo>
+                    <a:pt x="3376535" y="778044"/>
+                  </a:lnTo>
+                  <a:lnTo>
+                    <a:pt x="3306191" y="770518"/>
+                  </a:lnTo>
+                  <a:lnTo>
+                    <a:pt x="3235846" y="762769"/>
+                  </a:lnTo>
+                  <a:lnTo>
+                    <a:pt x="3165502" y="754790"/>
+                  </a:lnTo>
+                  <a:lnTo>
+                    <a:pt x="3095157" y="746574"/>
+                  </a:lnTo>
+                  <a:lnTo>
+                    <a:pt x="3024813" y="738115"/>
+                  </a:lnTo>
+                  <a:lnTo>
+                    <a:pt x="2954468" y="731257"/>
+                  </a:lnTo>
+                  <a:lnTo>
+                    <a:pt x="2884124" y="727582"/>
+                  </a:lnTo>
+                  <a:lnTo>
+                    <a:pt x="2813779" y="723862"/>
+                  </a:lnTo>
+                  <a:lnTo>
+                    <a:pt x="2743435" y="720096"/>
+                  </a:lnTo>
+                  <a:lnTo>
+                    <a:pt x="2673090" y="716285"/>
+                  </a:lnTo>
+                  <a:lnTo>
+                    <a:pt x="2602746" y="712427"/>
+                  </a:lnTo>
+                  <a:lnTo>
+                    <a:pt x="2532401" y="708521"/>
+                  </a:lnTo>
+                  <a:lnTo>
+                    <a:pt x="2462057" y="704568"/>
+                  </a:lnTo>
+                  <a:lnTo>
+                    <a:pt x="2391712" y="700567"/>
+                  </a:lnTo>
+                  <a:lnTo>
+                    <a:pt x="2321368" y="696516"/>
+                  </a:lnTo>
+                  <a:lnTo>
+                    <a:pt x="2251023" y="692416"/>
+                  </a:lnTo>
+                  <a:lnTo>
+                    <a:pt x="2180679" y="688266"/>
+                  </a:lnTo>
+                  <a:lnTo>
+                    <a:pt x="2110334" y="684066"/>
+                  </a:lnTo>
+                  <a:lnTo>
+                    <a:pt x="2039990" y="679814"/>
+                  </a:lnTo>
+                  <a:lnTo>
+                    <a:pt x="1969645" y="675510"/>
+                  </a:lnTo>
+                  <a:lnTo>
+                    <a:pt x="1899301" y="671153"/>
+                  </a:lnTo>
+                  <a:lnTo>
+                    <a:pt x="1828956" y="666743"/>
+                  </a:lnTo>
+                  <a:lnTo>
+                    <a:pt x="1758612" y="662279"/>
+                  </a:lnTo>
+                  <a:lnTo>
+                    <a:pt x="1688267" y="657761"/>
+                  </a:lnTo>
+                  <a:lnTo>
+                    <a:pt x="1617923" y="653187"/>
+                  </a:lnTo>
+                  <a:lnTo>
+                    <a:pt x="1547578" y="648558"/>
+                  </a:lnTo>
+                  <a:lnTo>
+                    <a:pt x="1477234" y="643871"/>
+                  </a:lnTo>
+                  <a:lnTo>
+                    <a:pt x="1406889" y="639128"/>
+                  </a:lnTo>
+                  <a:lnTo>
+                    <a:pt x="1336545" y="634327"/>
+                  </a:lnTo>
+                  <a:lnTo>
+                    <a:pt x="1266200" y="629467"/>
+                  </a:lnTo>
+                  <a:lnTo>
+                    <a:pt x="1195856" y="624547"/>
+                  </a:lnTo>
+                  <a:lnTo>
+                    <a:pt x="1125511" y="619567"/>
+                  </a:lnTo>
+                  <a:lnTo>
+                    <a:pt x="1055167" y="614527"/>
+                  </a:lnTo>
+                  <a:lnTo>
+                    <a:pt x="984822" y="609425"/>
+                  </a:lnTo>
+                  <a:lnTo>
+                    <a:pt x="914478" y="604260"/>
+                  </a:lnTo>
+                  <a:lnTo>
+                    <a:pt x="844133" y="599033"/>
+                  </a:lnTo>
+                  <a:lnTo>
+                    <a:pt x="773789" y="593741"/>
+                  </a:lnTo>
+                  <a:lnTo>
+                    <a:pt x="703444" y="588385"/>
+                  </a:lnTo>
+                  <a:lnTo>
+                    <a:pt x="633100" y="582963"/>
+                  </a:lnTo>
+                  <a:lnTo>
+                    <a:pt x="562755" y="577475"/>
+                  </a:lnTo>
+                  <a:lnTo>
+                    <a:pt x="492411" y="571920"/>
+                  </a:lnTo>
+                  <a:lnTo>
+                    <a:pt x="422066" y="566297"/>
+                  </a:lnTo>
+                  <a:lnTo>
+                    <a:pt x="351722" y="560606"/>
+                  </a:lnTo>
+                  <a:lnTo>
+                    <a:pt x="281377" y="554844"/>
+                  </a:lnTo>
+                  <a:lnTo>
+                    <a:pt x="211033" y="549013"/>
+                  </a:lnTo>
+                  <a:lnTo>
+                    <a:pt x="140688" y="543110"/>
+                  </a:lnTo>
+                  <a:lnTo>
+                    <a:pt x="70344" y="537134"/>
+                  </a:lnTo>
+                  <a:lnTo>
+                    <a:pt x="0" y="531086"/>
                   </a:lnTo>
                   <a:close/>
                 </a:path>
@@ -3670,643 +3705,318 @@
         </p:sp>
         <p:sp>
           <p:nvSpPr>
-            <p:cNvPr id="23" name="pl23"/>
-            <p:cNvSpPr/>
-            <p:nvPr/>
-          </p:nvSpPr>
-          <p:spPr>
-            <a:xfrm>
-              <a:off x="1172049" y="2697812"/>
-              <a:ext cx="7090630" cy="2442642"/>
-            </a:xfrm>
-            <a:custGeom>
-              <a:avLst/>
-              <a:pathLst>
-                <a:path w="7090630" h="2442642">
-                  <a:moveTo>
-                    <a:pt x="0" y="0"/>
-                  </a:moveTo>
-                  <a:lnTo>
-                    <a:pt x="71622" y="82333"/>
-                  </a:lnTo>
-                  <a:lnTo>
-                    <a:pt x="143245" y="162296"/>
-                  </a:lnTo>
-                  <a:lnTo>
-                    <a:pt x="214867" y="239956"/>
-                  </a:lnTo>
-                  <a:lnTo>
-                    <a:pt x="286490" y="315381"/>
-                  </a:lnTo>
-                  <a:lnTo>
-                    <a:pt x="358112" y="388633"/>
-                  </a:lnTo>
-                  <a:lnTo>
-                    <a:pt x="429735" y="459777"/>
-                  </a:lnTo>
-                  <a:lnTo>
-                    <a:pt x="501357" y="528872"/>
-                  </a:lnTo>
-                  <a:lnTo>
-                    <a:pt x="572980" y="595977"/>
-                  </a:lnTo>
-                  <a:lnTo>
-                    <a:pt x="644602" y="661150"/>
-                  </a:lnTo>
-                  <a:lnTo>
-                    <a:pt x="716225" y="724447"/>
-                  </a:lnTo>
-                  <a:lnTo>
-                    <a:pt x="787847" y="785921"/>
-                  </a:lnTo>
-                  <a:lnTo>
-                    <a:pt x="859470" y="845625"/>
-                  </a:lnTo>
-                  <a:lnTo>
-                    <a:pt x="931092" y="903610"/>
-                  </a:lnTo>
-                  <a:lnTo>
-                    <a:pt x="1002715" y="959925"/>
-                  </a:lnTo>
-                  <a:lnTo>
-                    <a:pt x="1074337" y="1014619"/>
-                  </a:lnTo>
-                  <a:lnTo>
-                    <a:pt x="1145960" y="1067738"/>
-                  </a:lnTo>
-                  <a:lnTo>
-                    <a:pt x="1217582" y="1119328"/>
-                  </a:lnTo>
-                  <a:lnTo>
-                    <a:pt x="1289205" y="1169432"/>
-                  </a:lnTo>
-                  <a:lnTo>
-                    <a:pt x="1360827" y="1218093"/>
-                  </a:lnTo>
-                  <a:lnTo>
-                    <a:pt x="1432450" y="1265353"/>
-                  </a:lnTo>
-                  <a:lnTo>
-                    <a:pt x="1504073" y="1311253"/>
-                  </a:lnTo>
-                  <a:lnTo>
-                    <a:pt x="1575695" y="1355831"/>
-                  </a:lnTo>
-                  <a:lnTo>
-                    <a:pt x="1647318" y="1399125"/>
-                  </a:lnTo>
-                  <a:lnTo>
-                    <a:pt x="1718940" y="1441173"/>
-                  </a:lnTo>
-                  <a:lnTo>
-                    <a:pt x="1790563" y="1482010"/>
-                  </a:lnTo>
-                  <a:lnTo>
-                    <a:pt x="1862185" y="1521671"/>
-                  </a:lnTo>
-                  <a:lnTo>
-                    <a:pt x="1933808" y="1560190"/>
-                  </a:lnTo>
-                  <a:lnTo>
-                    <a:pt x="2005430" y="1597600"/>
-                  </a:lnTo>
-                  <a:lnTo>
-                    <a:pt x="2077053" y="1633933"/>
-                  </a:lnTo>
-                  <a:lnTo>
-                    <a:pt x="2148675" y="1669219"/>
-                  </a:lnTo>
-                  <a:lnTo>
-                    <a:pt x="2220298" y="1703490"/>
-                  </a:lnTo>
-                  <a:lnTo>
-                    <a:pt x="2291920" y="1736774"/>
-                  </a:lnTo>
-                  <a:lnTo>
-                    <a:pt x="2363543" y="1769100"/>
-                  </a:lnTo>
-                  <a:lnTo>
-                    <a:pt x="2435165" y="1800494"/>
-                  </a:lnTo>
-                  <a:lnTo>
-                    <a:pt x="2506788" y="1830985"/>
-                  </a:lnTo>
-                  <a:lnTo>
-                    <a:pt x="2578410" y="1860598"/>
-                  </a:lnTo>
-                  <a:lnTo>
-                    <a:pt x="2650033" y="1889358"/>
-                  </a:lnTo>
-                  <a:lnTo>
-                    <a:pt x="2721655" y="1917290"/>
-                  </a:lnTo>
-                  <a:lnTo>
-                    <a:pt x="2793278" y="1944418"/>
-                  </a:lnTo>
-                  <a:lnTo>
-                    <a:pt x="2864901" y="1970765"/>
-                  </a:lnTo>
-                  <a:lnTo>
-                    <a:pt x="2936523" y="1996353"/>
-                  </a:lnTo>
-                  <a:lnTo>
-                    <a:pt x="3008146" y="2021204"/>
-                  </a:lnTo>
-                  <a:lnTo>
-                    <a:pt x="3079768" y="2036399"/>
-                  </a:lnTo>
-                  <a:lnTo>
-                    <a:pt x="3151391" y="2046338"/>
-                  </a:lnTo>
-                  <a:lnTo>
-                    <a:pt x="3223013" y="2056158"/>
-                  </a:lnTo>
-                  <a:lnTo>
-                    <a:pt x="3294636" y="2065859"/>
-                  </a:lnTo>
-                  <a:lnTo>
-                    <a:pt x="3366258" y="2075442"/>
-                  </a:lnTo>
-                  <a:lnTo>
-                    <a:pt x="3437881" y="2084910"/>
-                  </a:lnTo>
-                  <a:lnTo>
-                    <a:pt x="3509503" y="2094264"/>
-                  </a:lnTo>
-                  <a:lnTo>
-                    <a:pt x="3581126" y="2103505"/>
-                  </a:lnTo>
-                  <a:lnTo>
-                    <a:pt x="3652748" y="2112634"/>
-                  </a:lnTo>
-                  <a:lnTo>
-                    <a:pt x="3724371" y="2121653"/>
-                  </a:lnTo>
-                  <a:lnTo>
-                    <a:pt x="3795993" y="2130563"/>
-                  </a:lnTo>
-                  <a:lnTo>
-                    <a:pt x="3867616" y="2139365"/>
-                  </a:lnTo>
-                  <a:lnTo>
-                    <a:pt x="3939238" y="2148061"/>
-                  </a:lnTo>
-                  <a:lnTo>
-                    <a:pt x="4010861" y="2156652"/>
-                  </a:lnTo>
-                  <a:lnTo>
-                    <a:pt x="4082483" y="2165139"/>
-                  </a:lnTo>
-                  <a:lnTo>
-                    <a:pt x="4154106" y="2173524"/>
-                  </a:lnTo>
-                  <a:lnTo>
-                    <a:pt x="4225729" y="2181808"/>
-                  </a:lnTo>
-                  <a:lnTo>
-                    <a:pt x="4297351" y="2189991"/>
-                  </a:lnTo>
-                  <a:lnTo>
-                    <a:pt x="4368974" y="2198076"/>
-                  </a:lnTo>
-                  <a:lnTo>
-                    <a:pt x="4440596" y="2206063"/>
-                  </a:lnTo>
-                  <a:lnTo>
-                    <a:pt x="4512219" y="2213954"/>
-                  </a:lnTo>
-                  <a:lnTo>
-                    <a:pt x="4583841" y="2221749"/>
-                  </a:lnTo>
-                  <a:lnTo>
-                    <a:pt x="4655464" y="2229450"/>
-                  </a:lnTo>
-                  <a:lnTo>
-                    <a:pt x="4727086" y="2237058"/>
-                  </a:lnTo>
-                  <a:lnTo>
-                    <a:pt x="4798709" y="2244574"/>
-                  </a:lnTo>
-                  <a:lnTo>
-                    <a:pt x="4870331" y="2252000"/>
-                  </a:lnTo>
-                  <a:lnTo>
-                    <a:pt x="4941954" y="2259336"/>
-                  </a:lnTo>
-                  <a:lnTo>
-                    <a:pt x="5013576" y="2266583"/>
-                  </a:lnTo>
-                  <a:lnTo>
-                    <a:pt x="5085199" y="2273743"/>
-                  </a:lnTo>
-                  <a:lnTo>
-                    <a:pt x="5156821" y="2280816"/>
-                  </a:lnTo>
-                  <a:lnTo>
-                    <a:pt x="5228444" y="2287804"/>
-                  </a:lnTo>
-                  <a:lnTo>
-                    <a:pt x="5300066" y="2294707"/>
-                  </a:lnTo>
-                  <a:lnTo>
-                    <a:pt x="5371689" y="2301527"/>
-                  </a:lnTo>
-                  <a:lnTo>
-                    <a:pt x="5443311" y="2308265"/>
-                  </a:lnTo>
-                  <a:lnTo>
-                    <a:pt x="5514934" y="2314921"/>
-                  </a:lnTo>
-                  <a:lnTo>
-                    <a:pt x="5586557" y="2321497"/>
-                  </a:lnTo>
-                  <a:lnTo>
-                    <a:pt x="5658179" y="2327993"/>
-                  </a:lnTo>
-                  <a:lnTo>
-                    <a:pt x="5729802" y="2334412"/>
-                  </a:lnTo>
-                  <a:lnTo>
-                    <a:pt x="5801424" y="2340752"/>
-                  </a:lnTo>
-                  <a:lnTo>
-                    <a:pt x="5873047" y="2347016"/>
-                  </a:lnTo>
-                  <a:lnTo>
-                    <a:pt x="5944669" y="2353204"/>
-                  </a:lnTo>
-                  <a:lnTo>
-                    <a:pt x="6016292" y="2359318"/>
-                  </a:lnTo>
-                  <a:lnTo>
-                    <a:pt x="6087914" y="2365358"/>
-                  </a:lnTo>
-                  <a:lnTo>
-                    <a:pt x="6159537" y="2371325"/>
-                  </a:lnTo>
-                  <a:lnTo>
-                    <a:pt x="6231159" y="2377219"/>
-                  </a:lnTo>
-                  <a:lnTo>
-                    <a:pt x="6302782" y="2383043"/>
-                  </a:lnTo>
-                  <a:lnTo>
-                    <a:pt x="6374404" y="2388796"/>
-                  </a:lnTo>
-                  <a:lnTo>
-                    <a:pt x="6446027" y="2394480"/>
-                  </a:lnTo>
-                  <a:lnTo>
-                    <a:pt x="6517649" y="2400095"/>
-                  </a:lnTo>
-                  <a:lnTo>
-                    <a:pt x="6589272" y="2405642"/>
-                  </a:lnTo>
-                  <a:lnTo>
-                    <a:pt x="6660894" y="2411123"/>
-                  </a:lnTo>
-                  <a:lnTo>
-                    <a:pt x="6732517" y="2416537"/>
-                  </a:lnTo>
-                  <a:lnTo>
-                    <a:pt x="6804139" y="2421886"/>
-                  </a:lnTo>
-                  <a:lnTo>
-                    <a:pt x="6875762" y="2427170"/>
-                  </a:lnTo>
-                  <a:lnTo>
-                    <a:pt x="6947385" y="2432390"/>
-                  </a:lnTo>
-                  <a:lnTo>
-                    <a:pt x="7019007" y="2437547"/>
-                  </a:lnTo>
-                  <a:lnTo>
-                    <a:pt x="7090630" y="2442642"/>
-                  </a:lnTo>
-                </a:path>
-              </a:pathLst>
-            </a:custGeom>
-          </p:spPr>
-          <p:txBody>
-            <a:bodyPr/>
-            <a:lstStyle/>
-            <a:p/>
-          </p:txBody>
-        </p:sp>
-        <p:sp>
-          <p:nvSpPr>
             <p:cNvPr id="24" name="pl24"/>
             <p:cNvSpPr/>
             <p:nvPr/>
           </p:nvSpPr>
           <p:spPr>
             <a:xfrm>
-              <a:off x="1172049" y="4169470"/>
-              <a:ext cx="7090630" cy="1229245"/>
+              <a:off x="1235312" y="2368390"/>
+              <a:ext cx="6964104" cy="881492"/>
             </a:xfrm>
             <a:custGeom>
               <a:avLst/>
               <a:pathLst>
-                <a:path w="7090630" h="1229245">
+                <a:path w="6964104" h="881492">
                   <a:moveTo>
-                    <a:pt x="7090630" y="1229245"/>
+                    <a:pt x="0" y="0"/>
                   </a:moveTo>
                   <a:lnTo>
-                    <a:pt x="7019007" y="1224545"/>
-                  </a:lnTo>
-                  <a:lnTo>
-                    <a:pt x="6947385" y="1219705"/>
-                  </a:lnTo>
-                  <a:lnTo>
-                    <a:pt x="6875762" y="1214723"/>
-                  </a:lnTo>
-                  <a:lnTo>
-                    <a:pt x="6804139" y="1209592"/>
-                  </a:lnTo>
-                  <a:lnTo>
-                    <a:pt x="6732517" y="1204309"/>
-                  </a:lnTo>
-                  <a:lnTo>
-                    <a:pt x="6660894" y="1198870"/>
-                  </a:lnTo>
-                  <a:lnTo>
-                    <a:pt x="6589272" y="1193269"/>
-                  </a:lnTo>
-                  <a:lnTo>
-                    <a:pt x="6517649" y="1187502"/>
-                  </a:lnTo>
-                  <a:lnTo>
-                    <a:pt x="6446027" y="1181565"/>
-                  </a:lnTo>
-                  <a:lnTo>
-                    <a:pt x="6374404" y="1175451"/>
-                  </a:lnTo>
-                  <a:lnTo>
-                    <a:pt x="6302782" y="1169156"/>
-                  </a:lnTo>
-                  <a:lnTo>
-                    <a:pt x="6231159" y="1162675"/>
-                  </a:lnTo>
-                  <a:lnTo>
-                    <a:pt x="6159537" y="1156001"/>
-                  </a:lnTo>
-                  <a:lnTo>
-                    <a:pt x="6087914" y="1149129"/>
-                  </a:lnTo>
-                  <a:lnTo>
-                    <a:pt x="6016292" y="1142054"/>
-                  </a:lnTo>
-                  <a:lnTo>
-                    <a:pt x="5944669" y="1134769"/>
-                  </a:lnTo>
-                  <a:lnTo>
-                    <a:pt x="5873047" y="1127268"/>
-                  </a:lnTo>
-                  <a:lnTo>
-                    <a:pt x="5801424" y="1119545"/>
-                  </a:lnTo>
-                  <a:lnTo>
-                    <a:pt x="5729802" y="1111592"/>
-                  </a:lnTo>
-                  <a:lnTo>
-                    <a:pt x="5658179" y="1103404"/>
-                  </a:lnTo>
-                  <a:lnTo>
-                    <a:pt x="5586557" y="1094973"/>
-                  </a:lnTo>
-                  <a:lnTo>
-                    <a:pt x="5514934" y="1086292"/>
-                  </a:lnTo>
-                  <a:lnTo>
-                    <a:pt x="5443311" y="1077354"/>
-                  </a:lnTo>
-                  <a:lnTo>
-                    <a:pt x="5371689" y="1068151"/>
-                  </a:lnTo>
-                  <a:lnTo>
-                    <a:pt x="5300066" y="1058675"/>
-                  </a:lnTo>
-                  <a:lnTo>
-                    <a:pt x="5228444" y="1048918"/>
-                  </a:lnTo>
-                  <a:lnTo>
-                    <a:pt x="5156821" y="1038871"/>
-                  </a:lnTo>
-                  <a:lnTo>
-                    <a:pt x="5085199" y="1028527"/>
-                  </a:lnTo>
-                  <a:lnTo>
-                    <a:pt x="5013576" y="1017876"/>
-                  </a:lnTo>
-                  <a:lnTo>
-                    <a:pt x="4941954" y="1006910"/>
-                  </a:lnTo>
-                  <a:lnTo>
-                    <a:pt x="4870331" y="995618"/>
-                  </a:lnTo>
-                  <a:lnTo>
-                    <a:pt x="4798709" y="983991"/>
-                  </a:lnTo>
-                  <a:lnTo>
-                    <a:pt x="4727086" y="972020"/>
-                  </a:lnTo>
-                  <a:lnTo>
-                    <a:pt x="4655464" y="959694"/>
-                  </a:lnTo>
-                  <a:lnTo>
-                    <a:pt x="4583841" y="947003"/>
-                  </a:lnTo>
-                  <a:lnTo>
-                    <a:pt x="4512219" y="933935"/>
-                  </a:lnTo>
-                  <a:lnTo>
-                    <a:pt x="4440596" y="920480"/>
-                  </a:lnTo>
-                  <a:lnTo>
-                    <a:pt x="4368974" y="906625"/>
-                  </a:lnTo>
-                  <a:lnTo>
-                    <a:pt x="4297351" y="892360"/>
-                  </a:lnTo>
-                  <a:lnTo>
-                    <a:pt x="4225729" y="877673"/>
-                  </a:lnTo>
-                  <a:lnTo>
-                    <a:pt x="4154106" y="862549"/>
-                  </a:lnTo>
-                  <a:lnTo>
-                    <a:pt x="4082483" y="846978"/>
-                  </a:lnTo>
-                  <a:lnTo>
-                    <a:pt x="4010861" y="830945"/>
-                  </a:lnTo>
-                  <a:lnTo>
-                    <a:pt x="3939238" y="814436"/>
-                  </a:lnTo>
-                  <a:lnTo>
-                    <a:pt x="3867616" y="797438"/>
-                  </a:lnTo>
-                  <a:lnTo>
-                    <a:pt x="3795993" y="779936"/>
-                  </a:lnTo>
-                  <a:lnTo>
-                    <a:pt x="3724371" y="761915"/>
-                  </a:lnTo>
-                  <a:lnTo>
-                    <a:pt x="3652748" y="743360"/>
-                  </a:lnTo>
-                  <a:lnTo>
-                    <a:pt x="3581126" y="724255"/>
-                  </a:lnTo>
-                  <a:lnTo>
-                    <a:pt x="3509503" y="704583"/>
-                  </a:lnTo>
-                  <a:lnTo>
-                    <a:pt x="3437881" y="684328"/>
-                  </a:lnTo>
-                  <a:lnTo>
-                    <a:pt x="3366258" y="663473"/>
-                  </a:lnTo>
-                  <a:lnTo>
-                    <a:pt x="3294636" y="641999"/>
-                  </a:lnTo>
-                  <a:lnTo>
-                    <a:pt x="3223013" y="619889"/>
-                  </a:lnTo>
-                  <a:lnTo>
-                    <a:pt x="3151391" y="597123"/>
-                  </a:lnTo>
-                  <a:lnTo>
-                    <a:pt x="3079768" y="573682"/>
-                  </a:lnTo>
-                  <a:lnTo>
-                    <a:pt x="3008146" y="554679"/>
-                  </a:lnTo>
-                  <a:lnTo>
-                    <a:pt x="2936523" y="544495"/>
-                  </a:lnTo>
-                  <a:lnTo>
-                    <a:pt x="2864901" y="534187"/>
-                  </a:lnTo>
-                  <a:lnTo>
-                    <a:pt x="2793278" y="523752"/>
-                  </a:lnTo>
-                  <a:lnTo>
-                    <a:pt x="2721655" y="513190"/>
-                  </a:lnTo>
-                  <a:lnTo>
-                    <a:pt x="2650033" y="502499"/>
-                  </a:lnTo>
-                  <a:lnTo>
-                    <a:pt x="2578410" y="491677"/>
-                  </a:lnTo>
-                  <a:lnTo>
-                    <a:pt x="2506788" y="480723"/>
-                  </a:lnTo>
-                  <a:lnTo>
-                    <a:pt x="2435165" y="469635"/>
-                  </a:lnTo>
-                  <a:lnTo>
-                    <a:pt x="2363543" y="458411"/>
-                  </a:lnTo>
-                  <a:lnTo>
-                    <a:pt x="2291920" y="447050"/>
-                  </a:lnTo>
-                  <a:lnTo>
-                    <a:pt x="2220298" y="435551"/>
-                  </a:lnTo>
-                  <a:lnTo>
-                    <a:pt x="2148675" y="423910"/>
-                  </a:lnTo>
-                  <a:lnTo>
-                    <a:pt x="2077053" y="412128"/>
-                  </a:lnTo>
-                  <a:lnTo>
-                    <a:pt x="2005430" y="400201"/>
-                  </a:lnTo>
-                  <a:lnTo>
-                    <a:pt x="1933808" y="388129"/>
-                  </a:lnTo>
-                  <a:lnTo>
-                    <a:pt x="1862185" y="375909"/>
-                  </a:lnTo>
-                  <a:lnTo>
-                    <a:pt x="1790563" y="363539"/>
-                  </a:lnTo>
-                  <a:lnTo>
-                    <a:pt x="1718940" y="351019"/>
-                  </a:lnTo>
-                  <a:lnTo>
-                    <a:pt x="1647318" y="338345"/>
-                  </a:lnTo>
-                  <a:lnTo>
-                    <a:pt x="1575695" y="325516"/>
-                  </a:lnTo>
-                  <a:lnTo>
-                    <a:pt x="1504073" y="312531"/>
-                  </a:lnTo>
-                  <a:lnTo>
-                    <a:pt x="1432450" y="299387"/>
-                  </a:lnTo>
-                  <a:lnTo>
-                    <a:pt x="1360827" y="286082"/>
-                  </a:lnTo>
-                  <a:lnTo>
-                    <a:pt x="1289205" y="272615"/>
-                  </a:lnTo>
-                  <a:lnTo>
-                    <a:pt x="1217582" y="258982"/>
-                  </a:lnTo>
-                  <a:lnTo>
-                    <a:pt x="1145960" y="245184"/>
-                  </a:lnTo>
-                  <a:lnTo>
-                    <a:pt x="1074337" y="231216"/>
-                  </a:lnTo>
-                  <a:lnTo>
-                    <a:pt x="1002715" y="217078"/>
-                  </a:lnTo>
-                  <a:lnTo>
-                    <a:pt x="931092" y="202767"/>
-                  </a:lnTo>
-                  <a:lnTo>
-                    <a:pt x="859470" y="188281"/>
-                  </a:lnTo>
-                  <a:lnTo>
-                    <a:pt x="787847" y="173618"/>
-                  </a:lnTo>
-                  <a:lnTo>
-                    <a:pt x="716225" y="158776"/>
-                  </a:lnTo>
-                  <a:lnTo>
-                    <a:pt x="644602" y="143752"/>
-                  </a:lnTo>
-                  <a:lnTo>
-                    <a:pt x="572980" y="128545"/>
-                  </a:lnTo>
-                  <a:lnTo>
-                    <a:pt x="501357" y="113152"/>
-                  </a:lnTo>
-                  <a:lnTo>
-                    <a:pt x="429735" y="97570"/>
-                  </a:lnTo>
-                  <a:lnTo>
-                    <a:pt x="358112" y="81798"/>
-                  </a:lnTo>
-                  <a:lnTo>
-                    <a:pt x="286490" y="65834"/>
-                  </a:lnTo>
-                  <a:lnTo>
-                    <a:pt x="214867" y="49674"/>
-                  </a:lnTo>
-                  <a:lnTo>
-                    <a:pt x="143245" y="33317"/>
-                  </a:lnTo>
-                  <a:lnTo>
-                    <a:pt x="71622" y="16759"/>
-                  </a:lnTo>
-                  <a:lnTo>
-                    <a:pt x="0" y="0"/>
+                    <a:pt x="70344" y="29712"/>
+                  </a:lnTo>
+                  <a:lnTo>
+                    <a:pt x="140688" y="58568"/>
+                  </a:lnTo>
+                  <a:lnTo>
+                    <a:pt x="211033" y="86594"/>
+                  </a:lnTo>
+                  <a:lnTo>
+                    <a:pt x="281377" y="113813"/>
+                  </a:lnTo>
+                  <a:lnTo>
+                    <a:pt x="351722" y="140248"/>
+                  </a:lnTo>
+                  <a:lnTo>
+                    <a:pt x="422066" y="165922"/>
+                  </a:lnTo>
+                  <a:lnTo>
+                    <a:pt x="492411" y="190857"/>
+                  </a:lnTo>
+                  <a:lnTo>
+                    <a:pt x="562755" y="215074"/>
+                  </a:lnTo>
+                  <a:lnTo>
+                    <a:pt x="633100" y="238593"/>
+                  </a:lnTo>
+                  <a:lnTo>
+                    <a:pt x="703444" y="261436"/>
+                  </a:lnTo>
+                  <a:lnTo>
+                    <a:pt x="773789" y="283620"/>
+                  </a:lnTo>
+                  <a:lnTo>
+                    <a:pt x="844133" y="305166"/>
+                  </a:lnTo>
+                  <a:lnTo>
+                    <a:pt x="914478" y="326091"/>
+                  </a:lnTo>
+                  <a:lnTo>
+                    <a:pt x="984822" y="346414"/>
+                  </a:lnTo>
+                  <a:lnTo>
+                    <a:pt x="1055167" y="366152"/>
+                  </a:lnTo>
+                  <a:lnTo>
+                    <a:pt x="1125511" y="385321"/>
+                  </a:lnTo>
+                  <a:lnTo>
+                    <a:pt x="1195856" y="403939"/>
+                  </a:lnTo>
+                  <a:lnTo>
+                    <a:pt x="1266200" y="422020"/>
+                  </a:lnTo>
+                  <a:lnTo>
+                    <a:pt x="1336545" y="439581"/>
+                  </a:lnTo>
+                  <a:lnTo>
+                    <a:pt x="1406889" y="456636"/>
+                  </a:lnTo>
+                  <a:lnTo>
+                    <a:pt x="1477234" y="473200"/>
+                  </a:lnTo>
+                  <a:lnTo>
+                    <a:pt x="1547578" y="489287"/>
+                  </a:lnTo>
+                  <a:lnTo>
+                    <a:pt x="1617923" y="504911"/>
+                  </a:lnTo>
+                  <a:lnTo>
+                    <a:pt x="1688267" y="520085"/>
+                  </a:lnTo>
+                  <a:lnTo>
+                    <a:pt x="1758612" y="534822"/>
+                  </a:lnTo>
+                  <a:lnTo>
+                    <a:pt x="1828956" y="549135"/>
+                  </a:lnTo>
+                  <a:lnTo>
+                    <a:pt x="1899301" y="563036"/>
+                  </a:lnTo>
+                  <a:lnTo>
+                    <a:pt x="1969645" y="576536"/>
+                  </a:lnTo>
+                  <a:lnTo>
+                    <a:pt x="2039990" y="589648"/>
+                  </a:lnTo>
+                  <a:lnTo>
+                    <a:pt x="2110334" y="602382"/>
+                  </a:lnTo>
+                  <a:lnTo>
+                    <a:pt x="2180679" y="614749"/>
+                  </a:lnTo>
+                  <a:lnTo>
+                    <a:pt x="2251023" y="626761"/>
+                  </a:lnTo>
+                  <a:lnTo>
+                    <a:pt x="2321368" y="638426"/>
+                  </a:lnTo>
+                  <a:lnTo>
+                    <a:pt x="2391712" y="649756"/>
+                  </a:lnTo>
+                  <a:lnTo>
+                    <a:pt x="2462057" y="660759"/>
+                  </a:lnTo>
+                  <a:lnTo>
+                    <a:pt x="2532401" y="671446"/>
+                  </a:lnTo>
+                  <a:lnTo>
+                    <a:pt x="2602746" y="681825"/>
+                  </a:lnTo>
+                  <a:lnTo>
+                    <a:pt x="2673090" y="691905"/>
+                  </a:lnTo>
+                  <a:lnTo>
+                    <a:pt x="2743435" y="701694"/>
+                  </a:lnTo>
+                  <a:lnTo>
+                    <a:pt x="2813779" y="711202"/>
+                  </a:lnTo>
+                  <a:lnTo>
+                    <a:pt x="2884124" y="720436"/>
+                  </a:lnTo>
+                  <a:lnTo>
+                    <a:pt x="2954468" y="729405"/>
+                  </a:lnTo>
+                  <a:lnTo>
+                    <a:pt x="3024813" y="734888"/>
+                  </a:lnTo>
+                  <a:lnTo>
+                    <a:pt x="3095157" y="738475"/>
+                  </a:lnTo>
+                  <a:lnTo>
+                    <a:pt x="3165502" y="742019"/>
+                  </a:lnTo>
+                  <a:lnTo>
+                    <a:pt x="3235846" y="745519"/>
+                  </a:lnTo>
+                  <a:lnTo>
+                    <a:pt x="3306191" y="748978"/>
+                  </a:lnTo>
+                  <a:lnTo>
+                    <a:pt x="3376535" y="752395"/>
+                  </a:lnTo>
+                  <a:lnTo>
+                    <a:pt x="3446880" y="755770"/>
+                  </a:lnTo>
+                  <a:lnTo>
+                    <a:pt x="3517224" y="759105"/>
+                  </a:lnTo>
+                  <a:lnTo>
+                    <a:pt x="3587569" y="762400"/>
+                  </a:lnTo>
+                  <a:lnTo>
+                    <a:pt x="3657913" y="765654"/>
+                  </a:lnTo>
+                  <a:lnTo>
+                    <a:pt x="3728257" y="768870"/>
+                  </a:lnTo>
+                  <a:lnTo>
+                    <a:pt x="3798602" y="772046"/>
+                  </a:lnTo>
+                  <a:lnTo>
+                    <a:pt x="3868946" y="775184"/>
+                  </a:lnTo>
+                  <a:lnTo>
+                    <a:pt x="3939291" y="778285"/>
+                  </a:lnTo>
+                  <a:lnTo>
+                    <a:pt x="4009635" y="781348"/>
+                  </a:lnTo>
+                  <a:lnTo>
+                    <a:pt x="4079980" y="784373"/>
+                  </a:lnTo>
+                  <a:lnTo>
+                    <a:pt x="4150324" y="787363"/>
+                  </a:lnTo>
+                  <a:lnTo>
+                    <a:pt x="4220669" y="790316"/>
+                  </a:lnTo>
+                  <a:lnTo>
+                    <a:pt x="4291013" y="793234"/>
+                  </a:lnTo>
+                  <a:lnTo>
+                    <a:pt x="4361358" y="796116"/>
+                  </a:lnTo>
+                  <a:lnTo>
+                    <a:pt x="4431702" y="798963"/>
+                  </a:lnTo>
+                  <a:lnTo>
+                    <a:pt x="4502047" y="801777"/>
+                  </a:lnTo>
+                  <a:lnTo>
+                    <a:pt x="4572391" y="804556"/>
+                  </a:lnTo>
+                  <a:lnTo>
+                    <a:pt x="4642736" y="807301"/>
+                  </a:lnTo>
+                  <a:lnTo>
+                    <a:pt x="4713080" y="810014"/>
+                  </a:lnTo>
+                  <a:lnTo>
+                    <a:pt x="4783425" y="812693"/>
+                  </a:lnTo>
+                  <a:lnTo>
+                    <a:pt x="4853769" y="815341"/>
+                  </a:lnTo>
+                  <a:lnTo>
+                    <a:pt x="4924114" y="817956"/>
+                  </a:lnTo>
+                  <a:lnTo>
+                    <a:pt x="4994458" y="820540"/>
+                  </a:lnTo>
+                  <a:lnTo>
+                    <a:pt x="5064803" y="823092"/>
+                  </a:lnTo>
+                  <a:lnTo>
+                    <a:pt x="5135147" y="825614"/>
+                  </a:lnTo>
+                  <a:lnTo>
+                    <a:pt x="5205492" y="828105"/>
+                  </a:lnTo>
+                  <a:lnTo>
+                    <a:pt x="5275836" y="830567"/>
+                  </a:lnTo>
+                  <a:lnTo>
+                    <a:pt x="5346181" y="832998"/>
+                  </a:lnTo>
+                  <a:lnTo>
+                    <a:pt x="5416525" y="835400"/>
+                  </a:lnTo>
+                  <a:lnTo>
+                    <a:pt x="5486870" y="837773"/>
+                  </a:lnTo>
+                  <a:lnTo>
+                    <a:pt x="5557214" y="840118"/>
+                  </a:lnTo>
+                  <a:lnTo>
+                    <a:pt x="5627559" y="842434"/>
+                  </a:lnTo>
+                  <a:lnTo>
+                    <a:pt x="5697903" y="844722"/>
+                  </a:lnTo>
+                  <a:lnTo>
+                    <a:pt x="5768248" y="846983"/>
+                  </a:lnTo>
+                  <a:lnTo>
+                    <a:pt x="5838592" y="849216"/>
+                  </a:lnTo>
+                  <a:lnTo>
+                    <a:pt x="5908937" y="851422"/>
+                  </a:lnTo>
+                  <a:lnTo>
+                    <a:pt x="5979281" y="853602"/>
+                  </a:lnTo>
+                  <a:lnTo>
+                    <a:pt x="6049626" y="855755"/>
+                  </a:lnTo>
+                  <a:lnTo>
+                    <a:pt x="6119970" y="857882"/>
+                  </a:lnTo>
+                  <a:lnTo>
+                    <a:pt x="6190315" y="859984"/>
+                  </a:lnTo>
+                  <a:lnTo>
+                    <a:pt x="6260659" y="862060"/>
+                  </a:lnTo>
+                  <a:lnTo>
+                    <a:pt x="6331004" y="864111"/>
+                  </a:lnTo>
+                  <a:lnTo>
+                    <a:pt x="6401348" y="866138"/>
+                  </a:lnTo>
+                  <a:lnTo>
+                    <a:pt x="6471693" y="868139"/>
+                  </a:lnTo>
+                  <a:lnTo>
+                    <a:pt x="6542037" y="870117"/>
+                  </a:lnTo>
+                  <a:lnTo>
+                    <a:pt x="6612382" y="872071"/>
+                  </a:lnTo>
+                  <a:lnTo>
+                    <a:pt x="6682726" y="874001"/>
+                  </a:lnTo>
+                  <a:lnTo>
+                    <a:pt x="6753071" y="875908"/>
+                  </a:lnTo>
+                  <a:lnTo>
+                    <a:pt x="6823415" y="877792"/>
+                  </a:lnTo>
+                  <a:lnTo>
+                    <a:pt x="6893760" y="879653"/>
+                  </a:lnTo>
+                  <a:lnTo>
+                    <a:pt x="6964104" y="881492"/>
                   </a:lnTo>
                 </a:path>
               </a:pathLst>
@@ -4326,312 +4036,637 @@
           </p:nvSpPr>
           <p:spPr>
             <a:xfrm>
-              <a:off x="1172049" y="3565199"/>
-              <a:ext cx="7090630" cy="1734998"/>
+              <a:off x="1235312" y="2899477"/>
+              <a:ext cx="6964104" cy="443605"/>
             </a:xfrm>
             <a:custGeom>
               <a:avLst/>
               <a:pathLst>
-                <a:path w="7090630" h="1734998">
+                <a:path w="6964104" h="443605">
+                  <a:moveTo>
+                    <a:pt x="6964104" y="443605"/>
+                  </a:moveTo>
+                  <a:lnTo>
+                    <a:pt x="6893760" y="441909"/>
+                  </a:lnTo>
+                  <a:lnTo>
+                    <a:pt x="6823415" y="440163"/>
+                  </a:lnTo>
+                  <a:lnTo>
+                    <a:pt x="6753071" y="438364"/>
+                  </a:lnTo>
+                  <a:lnTo>
+                    <a:pt x="6682726" y="436513"/>
+                  </a:lnTo>
+                  <a:lnTo>
+                    <a:pt x="6612382" y="434607"/>
+                  </a:lnTo>
+                  <a:lnTo>
+                    <a:pt x="6542037" y="432644"/>
+                  </a:lnTo>
+                  <a:lnTo>
+                    <a:pt x="6471693" y="430622"/>
+                  </a:lnTo>
+                  <a:lnTo>
+                    <a:pt x="6401348" y="428541"/>
+                  </a:lnTo>
+                  <a:lnTo>
+                    <a:pt x="6331004" y="426399"/>
+                  </a:lnTo>
+                  <a:lnTo>
+                    <a:pt x="6260659" y="424192"/>
+                  </a:lnTo>
+                  <a:lnTo>
+                    <a:pt x="6190315" y="421921"/>
+                  </a:lnTo>
+                  <a:lnTo>
+                    <a:pt x="6119970" y="419582"/>
+                  </a:lnTo>
+                  <a:lnTo>
+                    <a:pt x="6049626" y="417173"/>
+                  </a:lnTo>
+                  <a:lnTo>
+                    <a:pt x="5979281" y="414693"/>
+                  </a:lnTo>
+                  <a:lnTo>
+                    <a:pt x="5908937" y="412140"/>
+                  </a:lnTo>
+                  <a:lnTo>
+                    <a:pt x="5838592" y="409511"/>
+                  </a:lnTo>
+                  <a:lnTo>
+                    <a:pt x="5768248" y="406804"/>
+                  </a:lnTo>
+                  <a:lnTo>
+                    <a:pt x="5697903" y="404017"/>
+                  </a:lnTo>
+                  <a:lnTo>
+                    <a:pt x="5627559" y="401147"/>
+                  </a:lnTo>
+                  <a:lnTo>
+                    <a:pt x="5557214" y="398192"/>
+                  </a:lnTo>
+                  <a:lnTo>
+                    <a:pt x="5486870" y="395150"/>
+                  </a:lnTo>
+                  <a:lnTo>
+                    <a:pt x="5416525" y="392017"/>
+                  </a:lnTo>
+                  <a:lnTo>
+                    <a:pt x="5346181" y="388791"/>
+                  </a:lnTo>
+                  <a:lnTo>
+                    <a:pt x="5275836" y="385470"/>
+                  </a:lnTo>
+                  <a:lnTo>
+                    <a:pt x="5205492" y="382050"/>
+                  </a:lnTo>
+                  <a:lnTo>
+                    <a:pt x="5135147" y="378529"/>
+                  </a:lnTo>
+                  <a:lnTo>
+                    <a:pt x="5064803" y="374904"/>
+                  </a:lnTo>
+                  <a:lnTo>
+                    <a:pt x="4994458" y="371171"/>
+                  </a:lnTo>
+                  <a:lnTo>
+                    <a:pt x="4924114" y="367327"/>
+                  </a:lnTo>
+                  <a:lnTo>
+                    <a:pt x="4853769" y="363370"/>
+                  </a:lnTo>
+                  <a:lnTo>
+                    <a:pt x="4783425" y="359295"/>
+                  </a:lnTo>
+                  <a:lnTo>
+                    <a:pt x="4713080" y="355099"/>
+                  </a:lnTo>
+                  <a:lnTo>
+                    <a:pt x="4642736" y="350779"/>
+                  </a:lnTo>
+                  <a:lnTo>
+                    <a:pt x="4572391" y="346331"/>
+                  </a:lnTo>
+                  <a:lnTo>
+                    <a:pt x="4502047" y="341751"/>
+                  </a:lnTo>
+                  <a:lnTo>
+                    <a:pt x="4431702" y="337035"/>
+                  </a:lnTo>
+                  <a:lnTo>
+                    <a:pt x="4361358" y="332179"/>
+                  </a:lnTo>
+                  <a:lnTo>
+                    <a:pt x="4291013" y="327179"/>
+                  </a:lnTo>
+                  <a:lnTo>
+                    <a:pt x="4220669" y="322032"/>
+                  </a:lnTo>
+                  <a:lnTo>
+                    <a:pt x="4150324" y="316731"/>
+                  </a:lnTo>
+                  <a:lnTo>
+                    <a:pt x="4079980" y="311273"/>
+                  </a:lnTo>
+                  <a:lnTo>
+                    <a:pt x="4009635" y="305654"/>
+                  </a:lnTo>
+                  <a:lnTo>
+                    <a:pt x="3939291" y="299868"/>
+                  </a:lnTo>
+                  <a:lnTo>
+                    <a:pt x="3868946" y="293910"/>
+                  </a:lnTo>
+                  <a:lnTo>
+                    <a:pt x="3798602" y="287776"/>
+                  </a:lnTo>
+                  <a:lnTo>
+                    <a:pt x="3728257" y="281460"/>
+                  </a:lnTo>
+                  <a:lnTo>
+                    <a:pt x="3657913" y="274957"/>
+                  </a:lnTo>
+                  <a:lnTo>
+                    <a:pt x="3587569" y="268261"/>
+                  </a:lnTo>
+                  <a:lnTo>
+                    <a:pt x="3517224" y="261366"/>
+                  </a:lnTo>
+                  <a:lnTo>
+                    <a:pt x="3446880" y="254267"/>
+                  </a:lnTo>
+                  <a:lnTo>
+                    <a:pt x="3376535" y="246958"/>
+                  </a:lnTo>
+                  <a:lnTo>
+                    <a:pt x="3306191" y="239431"/>
+                  </a:lnTo>
+                  <a:lnTo>
+                    <a:pt x="3235846" y="231682"/>
+                  </a:lnTo>
+                  <a:lnTo>
+                    <a:pt x="3165502" y="223703"/>
+                  </a:lnTo>
+                  <a:lnTo>
+                    <a:pt x="3095157" y="215487"/>
+                  </a:lnTo>
+                  <a:lnTo>
+                    <a:pt x="3024813" y="207028"/>
+                  </a:lnTo>
+                  <a:lnTo>
+                    <a:pt x="2954468" y="200170"/>
+                  </a:lnTo>
+                  <a:lnTo>
+                    <a:pt x="2884124" y="196495"/>
+                  </a:lnTo>
+                  <a:lnTo>
+                    <a:pt x="2813779" y="192775"/>
+                  </a:lnTo>
+                  <a:lnTo>
+                    <a:pt x="2743435" y="189010"/>
+                  </a:lnTo>
+                  <a:lnTo>
+                    <a:pt x="2673090" y="185198"/>
+                  </a:lnTo>
+                  <a:lnTo>
+                    <a:pt x="2602746" y="181340"/>
+                  </a:lnTo>
+                  <a:lnTo>
+                    <a:pt x="2532401" y="177434"/>
+                  </a:lnTo>
+                  <a:lnTo>
+                    <a:pt x="2462057" y="173481"/>
+                  </a:lnTo>
+                  <a:lnTo>
+                    <a:pt x="2391712" y="169480"/>
+                  </a:lnTo>
+                  <a:lnTo>
+                    <a:pt x="2321368" y="165429"/>
+                  </a:lnTo>
+                  <a:lnTo>
+                    <a:pt x="2251023" y="161330"/>
+                  </a:lnTo>
+                  <a:lnTo>
+                    <a:pt x="2180679" y="157180"/>
+                  </a:lnTo>
+                  <a:lnTo>
+                    <a:pt x="2110334" y="152979"/>
+                  </a:lnTo>
+                  <a:lnTo>
+                    <a:pt x="2039990" y="148727"/>
+                  </a:lnTo>
+                  <a:lnTo>
+                    <a:pt x="1969645" y="144423"/>
+                  </a:lnTo>
+                  <a:lnTo>
+                    <a:pt x="1899301" y="140066"/>
+                  </a:lnTo>
+                  <a:lnTo>
+                    <a:pt x="1828956" y="135656"/>
+                  </a:lnTo>
+                  <a:lnTo>
+                    <a:pt x="1758612" y="131192"/>
+                  </a:lnTo>
+                  <a:lnTo>
+                    <a:pt x="1688267" y="126674"/>
+                  </a:lnTo>
+                  <a:lnTo>
+                    <a:pt x="1617923" y="122100"/>
+                  </a:lnTo>
+                  <a:lnTo>
+                    <a:pt x="1547578" y="117471"/>
+                  </a:lnTo>
+                  <a:lnTo>
+                    <a:pt x="1477234" y="112785"/>
+                  </a:lnTo>
+                  <a:lnTo>
+                    <a:pt x="1406889" y="108041"/>
+                  </a:lnTo>
+                  <a:lnTo>
+                    <a:pt x="1336545" y="103240"/>
+                  </a:lnTo>
+                  <a:lnTo>
+                    <a:pt x="1266200" y="98380"/>
+                  </a:lnTo>
+                  <a:lnTo>
+                    <a:pt x="1195856" y="93460"/>
+                  </a:lnTo>
+                  <a:lnTo>
+                    <a:pt x="1125511" y="88481"/>
+                  </a:lnTo>
+                  <a:lnTo>
+                    <a:pt x="1055167" y="83440"/>
+                  </a:lnTo>
+                  <a:lnTo>
+                    <a:pt x="984822" y="78338"/>
+                  </a:lnTo>
+                  <a:lnTo>
+                    <a:pt x="914478" y="73174"/>
+                  </a:lnTo>
+                  <a:lnTo>
+                    <a:pt x="844133" y="67946"/>
+                  </a:lnTo>
+                  <a:lnTo>
+                    <a:pt x="773789" y="62654"/>
+                  </a:lnTo>
+                  <a:lnTo>
+                    <a:pt x="703444" y="57298"/>
+                  </a:lnTo>
+                  <a:lnTo>
+                    <a:pt x="633100" y="51877"/>
+                  </a:lnTo>
+                  <a:lnTo>
+                    <a:pt x="562755" y="46389"/>
+                  </a:lnTo>
+                  <a:lnTo>
+                    <a:pt x="492411" y="40833"/>
+                  </a:lnTo>
+                  <a:lnTo>
+                    <a:pt x="422066" y="35211"/>
+                  </a:lnTo>
+                  <a:lnTo>
+                    <a:pt x="351722" y="29519"/>
+                  </a:lnTo>
+                  <a:lnTo>
+                    <a:pt x="281377" y="23758"/>
+                  </a:lnTo>
+                  <a:lnTo>
+                    <a:pt x="211033" y="17926"/>
+                  </a:lnTo>
+                  <a:lnTo>
+                    <a:pt x="140688" y="12023"/>
+                  </a:lnTo>
+                  <a:lnTo>
+                    <a:pt x="70344" y="6048"/>
+                  </a:lnTo>
+                  <a:lnTo>
+                    <a:pt x="0" y="0"/>
+                  </a:lnTo>
+                </a:path>
+              </a:pathLst>
+            </a:custGeom>
+          </p:spPr>
+          <p:txBody>
+            <a:bodyPr/>
+            <a:lstStyle/>
+            <a:p/>
+          </p:txBody>
+        </p:sp>
+        <p:sp>
+          <p:nvSpPr>
+            <p:cNvPr id="26" name="pl26"/>
+            <p:cNvSpPr/>
+            <p:nvPr/>
+          </p:nvSpPr>
+          <p:spPr>
+            <a:xfrm>
+              <a:off x="1235312" y="2681410"/>
+              <a:ext cx="6964104" cy="626120"/>
+            </a:xfrm>
+            <a:custGeom>
+              <a:avLst/>
+              <a:pathLst>
+                <a:path w="6964104" h="626120">
                   <a:moveTo>
                     <a:pt x="0" y="0"/>
                   </a:moveTo>
                   <a:lnTo>
-                    <a:pt x="71622" y="40778"/>
-                  </a:lnTo>
-                  <a:lnTo>
-                    <a:pt x="143245" y="80723"/>
-                  </a:lnTo>
-                  <a:lnTo>
-                    <a:pt x="214867" y="119849"/>
-                  </a:lnTo>
-                  <a:lnTo>
-                    <a:pt x="286490" y="158174"/>
-                  </a:lnTo>
-                  <a:lnTo>
-                    <a:pt x="358112" y="195715"/>
-                  </a:lnTo>
-                  <a:lnTo>
-                    <a:pt x="429735" y="232488"/>
-                  </a:lnTo>
-                  <a:lnTo>
-                    <a:pt x="501357" y="268507"/>
-                  </a:lnTo>
-                  <a:lnTo>
-                    <a:pt x="572980" y="303790"/>
-                  </a:lnTo>
-                  <a:lnTo>
-                    <a:pt x="644602" y="338350"/>
-                  </a:lnTo>
-                  <a:lnTo>
-                    <a:pt x="716225" y="372202"/>
-                  </a:lnTo>
-                  <a:lnTo>
-                    <a:pt x="787847" y="405362"/>
-                  </a:lnTo>
-                  <a:lnTo>
-                    <a:pt x="859470" y="437843"/>
-                  </a:lnTo>
-                  <a:lnTo>
-                    <a:pt x="931092" y="469659"/>
-                  </a:lnTo>
-                  <a:lnTo>
-                    <a:pt x="1002715" y="500823"/>
-                  </a:lnTo>
-                  <a:lnTo>
-                    <a:pt x="1074337" y="531350"/>
-                  </a:lnTo>
-                  <a:lnTo>
-                    <a:pt x="1145960" y="561252"/>
-                  </a:lnTo>
-                  <a:lnTo>
-                    <a:pt x="1217582" y="590541"/>
-                  </a:lnTo>
-                  <a:lnTo>
-                    <a:pt x="1289205" y="619231"/>
-                  </a:lnTo>
-                  <a:lnTo>
-                    <a:pt x="1360827" y="647334"/>
-                  </a:lnTo>
-                  <a:lnTo>
-                    <a:pt x="1432450" y="674861"/>
-                  </a:lnTo>
-                  <a:lnTo>
-                    <a:pt x="1504073" y="701825"/>
-                  </a:lnTo>
-                  <a:lnTo>
-                    <a:pt x="1575695" y="728237"/>
-                  </a:lnTo>
-                  <a:lnTo>
-                    <a:pt x="1647318" y="754109"/>
-                  </a:lnTo>
-                  <a:lnTo>
-                    <a:pt x="1718940" y="779450"/>
-                  </a:lnTo>
-                  <a:lnTo>
-                    <a:pt x="1790563" y="804273"/>
-                  </a:lnTo>
-                  <a:lnTo>
-                    <a:pt x="1862185" y="828588"/>
-                  </a:lnTo>
-                  <a:lnTo>
-                    <a:pt x="1933808" y="852405"/>
-                  </a:lnTo>
-                  <a:lnTo>
-                    <a:pt x="2005430" y="875734"/>
-                  </a:lnTo>
-                  <a:lnTo>
-                    <a:pt x="2077053" y="898586"/>
-                  </a:lnTo>
-                  <a:lnTo>
-                    <a:pt x="2148675" y="920970"/>
-                  </a:lnTo>
-                  <a:lnTo>
-                    <a:pt x="2220298" y="942896"/>
-                  </a:lnTo>
-                  <a:lnTo>
-                    <a:pt x="2291920" y="964373"/>
-                  </a:lnTo>
-                  <a:lnTo>
-                    <a:pt x="2363543" y="985411"/>
-                  </a:lnTo>
-                  <a:lnTo>
-                    <a:pt x="2435165" y="1006017"/>
-                  </a:lnTo>
-                  <a:lnTo>
-                    <a:pt x="2506788" y="1026202"/>
-                  </a:lnTo>
-                  <a:lnTo>
-                    <a:pt x="2578410" y="1045974"/>
-                  </a:lnTo>
-                  <a:lnTo>
-                    <a:pt x="2650033" y="1065341"/>
-                  </a:lnTo>
-                  <a:lnTo>
-                    <a:pt x="2721655" y="1084311"/>
-                  </a:lnTo>
-                  <a:lnTo>
-                    <a:pt x="2793278" y="1102894"/>
-                  </a:lnTo>
-                  <a:lnTo>
-                    <a:pt x="2864901" y="1121095"/>
-                  </a:lnTo>
-                  <a:lnTo>
-                    <a:pt x="2936523" y="1138924"/>
-                  </a:lnTo>
-                  <a:lnTo>
-                    <a:pt x="3008146" y="1156389"/>
-                  </a:lnTo>
-                  <a:lnTo>
-                    <a:pt x="3079768" y="1173495"/>
-                  </a:lnTo>
-                  <a:lnTo>
-                    <a:pt x="3151391" y="1190252"/>
-                  </a:lnTo>
-                  <a:lnTo>
-                    <a:pt x="3223013" y="1206665"/>
-                  </a:lnTo>
-                  <a:lnTo>
-                    <a:pt x="3294636" y="1222743"/>
-                  </a:lnTo>
-                  <a:lnTo>
-                    <a:pt x="3366258" y="1238491"/>
-                  </a:lnTo>
-                  <a:lnTo>
-                    <a:pt x="3437881" y="1253917"/>
-                  </a:lnTo>
-                  <a:lnTo>
-                    <a:pt x="3509503" y="1269027"/>
-                  </a:lnTo>
-                  <a:lnTo>
-                    <a:pt x="3581126" y="1283828"/>
-                  </a:lnTo>
-                  <a:lnTo>
-                    <a:pt x="3652748" y="1298326"/>
-                  </a:lnTo>
-                  <a:lnTo>
-                    <a:pt x="3724371" y="1312527"/>
-                  </a:lnTo>
-                  <a:lnTo>
-                    <a:pt x="3795993" y="1326437"/>
-                  </a:lnTo>
-                  <a:lnTo>
-                    <a:pt x="3867616" y="1340063"/>
-                  </a:lnTo>
-                  <a:lnTo>
-                    <a:pt x="3939238" y="1353410"/>
-                  </a:lnTo>
-                  <a:lnTo>
-                    <a:pt x="4010861" y="1366483"/>
-                  </a:lnTo>
-                  <a:lnTo>
-                    <a:pt x="4082483" y="1379289"/>
-                  </a:lnTo>
-                  <a:lnTo>
-                    <a:pt x="4154106" y="1391833"/>
-                  </a:lnTo>
-                  <a:lnTo>
-                    <a:pt x="4225729" y="1404120"/>
-                  </a:lnTo>
-                  <a:lnTo>
-                    <a:pt x="4297351" y="1416155"/>
-                  </a:lnTo>
-                  <a:lnTo>
-                    <a:pt x="4368974" y="1427944"/>
-                  </a:lnTo>
-                  <a:lnTo>
-                    <a:pt x="4440596" y="1439492"/>
-                  </a:lnTo>
-                  <a:lnTo>
-                    <a:pt x="4512219" y="1450803"/>
-                  </a:lnTo>
-                  <a:lnTo>
-                    <a:pt x="4583841" y="1461883"/>
-                  </a:lnTo>
-                  <a:lnTo>
-                    <a:pt x="4655464" y="1472736"/>
-                  </a:lnTo>
-                  <a:lnTo>
-                    <a:pt x="4727086" y="1483367"/>
-                  </a:lnTo>
-                  <a:lnTo>
-                    <a:pt x="4798709" y="1493780"/>
-                  </a:lnTo>
-                  <a:lnTo>
-                    <a:pt x="4870331" y="1503980"/>
-                  </a:lnTo>
-                  <a:lnTo>
-                    <a:pt x="4941954" y="1513971"/>
-                  </a:lnTo>
-                  <a:lnTo>
-                    <a:pt x="5013576" y="1523758"/>
-                  </a:lnTo>
-                  <a:lnTo>
-                    <a:pt x="5085199" y="1533344"/>
-                  </a:lnTo>
-                  <a:lnTo>
-                    <a:pt x="5156821" y="1542734"/>
-                  </a:lnTo>
-                  <a:lnTo>
-                    <a:pt x="5228444" y="1551932"/>
-                  </a:lnTo>
-                  <a:lnTo>
-                    <a:pt x="5300066" y="1560942"/>
-                  </a:lnTo>
-                  <a:lnTo>
-                    <a:pt x="5371689" y="1569767"/>
-                  </a:lnTo>
-                  <a:lnTo>
-                    <a:pt x="5443311" y="1578411"/>
-                  </a:lnTo>
-                  <a:lnTo>
-                    <a:pt x="5514934" y="1586879"/>
-                  </a:lnTo>
-                  <a:lnTo>
-                    <a:pt x="5586557" y="1595173"/>
-                  </a:lnTo>
-                  <a:lnTo>
-                    <a:pt x="5658179" y="1603297"/>
-                  </a:lnTo>
-                  <a:lnTo>
-                    <a:pt x="5729802" y="1611255"/>
-                  </a:lnTo>
-                  <a:lnTo>
-                    <a:pt x="5801424" y="1619051"/>
-                  </a:lnTo>
-                  <a:lnTo>
-                    <a:pt x="5873047" y="1626686"/>
-                  </a:lnTo>
-                  <a:lnTo>
-                    <a:pt x="5944669" y="1634166"/>
-                  </a:lnTo>
-                  <a:lnTo>
-                    <a:pt x="6016292" y="1641492"/>
-                  </a:lnTo>
-                  <a:lnTo>
-                    <a:pt x="6087914" y="1648668"/>
-                  </a:lnTo>
-                  <a:lnTo>
-                    <a:pt x="6159537" y="1655697"/>
-                  </a:lnTo>
-                  <a:lnTo>
-                    <a:pt x="6231159" y="1662583"/>
-                  </a:lnTo>
-                  <a:lnTo>
-                    <a:pt x="6302782" y="1669327"/>
-                  </a:lnTo>
-                  <a:lnTo>
-                    <a:pt x="6374404" y="1675934"/>
-                  </a:lnTo>
-                  <a:lnTo>
-                    <a:pt x="6446027" y="1682405"/>
-                  </a:lnTo>
-                  <a:lnTo>
-                    <a:pt x="6517649" y="1688743"/>
-                  </a:lnTo>
-                  <a:lnTo>
-                    <a:pt x="6589272" y="1694952"/>
-                  </a:lnTo>
-                  <a:lnTo>
-                    <a:pt x="6660894" y="1701034"/>
-                  </a:lnTo>
-                  <a:lnTo>
-                    <a:pt x="6732517" y="1706992"/>
-                  </a:lnTo>
-                  <a:lnTo>
-                    <a:pt x="6804139" y="1712827"/>
-                  </a:lnTo>
-                  <a:lnTo>
-                    <a:pt x="6875762" y="1718543"/>
-                  </a:lnTo>
-                  <a:lnTo>
-                    <a:pt x="6947385" y="1724142"/>
-                  </a:lnTo>
-                  <a:lnTo>
-                    <a:pt x="7019007" y="1729626"/>
-                  </a:lnTo>
-                  <a:lnTo>
-                    <a:pt x="7090630" y="1734998"/>
+                    <a:pt x="70344" y="14716"/>
+                  </a:lnTo>
+                  <a:lnTo>
+                    <a:pt x="140688" y="29131"/>
+                  </a:lnTo>
+                  <a:lnTo>
+                    <a:pt x="211033" y="43250"/>
+                  </a:lnTo>
+                  <a:lnTo>
+                    <a:pt x="281377" y="57081"/>
+                  </a:lnTo>
+                  <a:lnTo>
+                    <a:pt x="351722" y="70629"/>
+                  </a:lnTo>
+                  <a:lnTo>
+                    <a:pt x="422066" y="83899"/>
+                  </a:lnTo>
+                  <a:lnTo>
+                    <a:pt x="492411" y="96898"/>
+                  </a:lnTo>
+                  <a:lnTo>
+                    <a:pt x="562755" y="109630"/>
+                  </a:lnTo>
+                  <a:lnTo>
+                    <a:pt x="633100" y="122102"/>
+                  </a:lnTo>
+                  <a:lnTo>
+                    <a:pt x="703444" y="134319"/>
+                  </a:lnTo>
+                  <a:lnTo>
+                    <a:pt x="773789" y="146285"/>
+                  </a:lnTo>
+                  <a:lnTo>
+                    <a:pt x="844133" y="158007"/>
+                  </a:lnTo>
+                  <a:lnTo>
+                    <a:pt x="914478" y="169488"/>
+                  </a:lnTo>
+                  <a:lnTo>
+                    <a:pt x="984822" y="180735"/>
+                  </a:lnTo>
+                  <a:lnTo>
+                    <a:pt x="1055167" y="191751"/>
+                  </a:lnTo>
+                  <a:lnTo>
+                    <a:pt x="1125511" y="202542"/>
+                  </a:lnTo>
+                  <a:lnTo>
+                    <a:pt x="1195856" y="213112"/>
+                  </a:lnTo>
+                  <a:lnTo>
+                    <a:pt x="1266200" y="223466"/>
+                  </a:lnTo>
+                  <a:lnTo>
+                    <a:pt x="1336545" y="233607"/>
+                  </a:lnTo>
+                  <a:lnTo>
+                    <a:pt x="1406889" y="243541"/>
+                  </a:lnTo>
+                  <a:lnTo>
+                    <a:pt x="1477234" y="253272"/>
+                  </a:lnTo>
+                  <a:lnTo>
+                    <a:pt x="1547578" y="262803"/>
+                  </a:lnTo>
+                  <a:lnTo>
+                    <a:pt x="1617923" y="272140"/>
+                  </a:lnTo>
+                  <a:lnTo>
+                    <a:pt x="1688267" y="281285"/>
+                  </a:lnTo>
+                  <a:lnTo>
+                    <a:pt x="1758612" y="290243"/>
+                  </a:lnTo>
+                  <a:lnTo>
+                    <a:pt x="1828956" y="299018"/>
+                  </a:lnTo>
+                  <a:lnTo>
+                    <a:pt x="1899301" y="307613"/>
+                  </a:lnTo>
+                  <a:lnTo>
+                    <a:pt x="1969645" y="316032"/>
+                  </a:lnTo>
+                  <a:lnTo>
+                    <a:pt x="2039990" y="324278"/>
+                  </a:lnTo>
+                  <a:lnTo>
+                    <a:pt x="2110334" y="332356"/>
+                  </a:lnTo>
+                  <a:lnTo>
+                    <a:pt x="2180679" y="340269"/>
+                  </a:lnTo>
+                  <a:lnTo>
+                    <a:pt x="2251023" y="348019"/>
+                  </a:lnTo>
+                  <a:lnTo>
+                    <a:pt x="2321368" y="355611"/>
+                  </a:lnTo>
+                  <a:lnTo>
+                    <a:pt x="2391712" y="363048"/>
+                  </a:lnTo>
+                  <a:lnTo>
+                    <a:pt x="2462057" y="370332"/>
+                  </a:lnTo>
+                  <a:lnTo>
+                    <a:pt x="2532401" y="377467"/>
+                  </a:lnTo>
+                  <a:lnTo>
+                    <a:pt x="2602746" y="384456"/>
+                  </a:lnTo>
+                  <a:lnTo>
+                    <a:pt x="2673090" y="391302"/>
+                  </a:lnTo>
+                  <a:lnTo>
+                    <a:pt x="2743435" y="398008"/>
+                  </a:lnTo>
+                  <a:lnTo>
+                    <a:pt x="2813779" y="404577"/>
+                  </a:lnTo>
+                  <a:lnTo>
+                    <a:pt x="2884124" y="411011"/>
+                  </a:lnTo>
+                  <a:lnTo>
+                    <a:pt x="2954468" y="417313"/>
+                  </a:lnTo>
+                  <a:lnTo>
+                    <a:pt x="3024813" y="423487"/>
+                  </a:lnTo>
+                  <a:lnTo>
+                    <a:pt x="3095157" y="429534"/>
+                  </a:lnTo>
+                  <a:lnTo>
+                    <a:pt x="3165502" y="435457"/>
+                  </a:lnTo>
+                  <a:lnTo>
+                    <a:pt x="3235846" y="441259"/>
+                  </a:lnTo>
+                  <a:lnTo>
+                    <a:pt x="3306191" y="446942"/>
+                  </a:lnTo>
+                  <a:lnTo>
+                    <a:pt x="3376535" y="452509"/>
+                  </a:lnTo>
+                  <a:lnTo>
+                    <a:pt x="3446880" y="457962"/>
+                  </a:lnTo>
+                  <a:lnTo>
+                    <a:pt x="3517224" y="463303"/>
+                  </a:lnTo>
+                  <a:lnTo>
+                    <a:pt x="3587569" y="468535"/>
+                  </a:lnTo>
+                  <a:lnTo>
+                    <a:pt x="3657913" y="473660"/>
+                  </a:lnTo>
+                  <a:lnTo>
+                    <a:pt x="3728257" y="478680"/>
+                  </a:lnTo>
+                  <a:lnTo>
+                    <a:pt x="3798602" y="483597"/>
+                  </a:lnTo>
+                  <a:lnTo>
+                    <a:pt x="3868946" y="488413"/>
+                  </a:lnTo>
+                  <a:lnTo>
+                    <a:pt x="3939291" y="493131"/>
+                  </a:lnTo>
+                  <a:lnTo>
+                    <a:pt x="4009635" y="497753"/>
+                  </a:lnTo>
+                  <a:lnTo>
+                    <a:pt x="4079980" y="502279"/>
+                  </a:lnTo>
+                  <a:lnTo>
+                    <a:pt x="4150324" y="506713"/>
+                  </a:lnTo>
+                  <a:lnTo>
+                    <a:pt x="4220669" y="511057"/>
+                  </a:lnTo>
+                  <a:lnTo>
+                    <a:pt x="4291013" y="515311"/>
+                  </a:lnTo>
+                  <a:lnTo>
+                    <a:pt x="4361358" y="519478"/>
+                  </a:lnTo>
+                  <a:lnTo>
+                    <a:pt x="4431702" y="523560"/>
+                  </a:lnTo>
+                  <a:lnTo>
+                    <a:pt x="4502047" y="527559"/>
+                  </a:lnTo>
+                  <a:lnTo>
+                    <a:pt x="4572391" y="531475"/>
+                  </a:lnTo>
+                  <a:lnTo>
+                    <a:pt x="4642736" y="535312"/>
+                  </a:lnTo>
+                  <a:lnTo>
+                    <a:pt x="4713080" y="539070"/>
+                  </a:lnTo>
+                  <a:lnTo>
+                    <a:pt x="4783425" y="542751"/>
+                  </a:lnTo>
+                  <a:lnTo>
+                    <a:pt x="4853769" y="546356"/>
+                  </a:lnTo>
+                  <a:lnTo>
+                    <a:pt x="4924114" y="549888"/>
+                  </a:lnTo>
+                  <a:lnTo>
+                    <a:pt x="4994458" y="553348"/>
+                  </a:lnTo>
+                  <a:lnTo>
+                    <a:pt x="5064803" y="556736"/>
+                  </a:lnTo>
+                  <a:lnTo>
+                    <a:pt x="5135147" y="560055"/>
+                  </a:lnTo>
+                  <a:lnTo>
+                    <a:pt x="5205492" y="563307"/>
+                  </a:lnTo>
+                  <a:lnTo>
+                    <a:pt x="5275836" y="566492"/>
+                  </a:lnTo>
+                  <a:lnTo>
+                    <a:pt x="5346181" y="569611"/>
+                  </a:lnTo>
+                  <a:lnTo>
+                    <a:pt x="5416525" y="572667"/>
+                  </a:lnTo>
+                  <a:lnTo>
+                    <a:pt x="5486870" y="575660"/>
+                  </a:lnTo>
+                  <a:lnTo>
+                    <a:pt x="5557214" y="578592"/>
+                  </a:lnTo>
+                  <a:lnTo>
+                    <a:pt x="5627559" y="581464"/>
+                  </a:lnTo>
+                  <a:lnTo>
+                    <a:pt x="5697903" y="584277"/>
+                  </a:lnTo>
+                  <a:lnTo>
+                    <a:pt x="5768248" y="587032"/>
+                  </a:lnTo>
+                  <a:lnTo>
+                    <a:pt x="5838592" y="589732"/>
+                  </a:lnTo>
+                  <a:lnTo>
+                    <a:pt x="5908937" y="592375"/>
+                  </a:lnTo>
+                  <a:lnTo>
+                    <a:pt x="5979281" y="594965"/>
+                  </a:lnTo>
+                  <a:lnTo>
+                    <a:pt x="6049626" y="597502"/>
+                  </a:lnTo>
+                  <a:lnTo>
+                    <a:pt x="6119970" y="599987"/>
+                  </a:lnTo>
+                  <a:lnTo>
+                    <a:pt x="6190315" y="602421"/>
+                  </a:lnTo>
+                  <a:lnTo>
+                    <a:pt x="6260659" y="604805"/>
+                  </a:lnTo>
+                  <a:lnTo>
+                    <a:pt x="6331004" y="607140"/>
+                  </a:lnTo>
+                  <a:lnTo>
+                    <a:pt x="6401348" y="609427"/>
+                  </a:lnTo>
+                  <a:lnTo>
+                    <a:pt x="6471693" y="611668"/>
+                  </a:lnTo>
+                  <a:lnTo>
+                    <a:pt x="6542037" y="613863"/>
+                  </a:lnTo>
+                  <a:lnTo>
+                    <a:pt x="6612382" y="616013"/>
+                  </a:lnTo>
+                  <a:lnTo>
+                    <a:pt x="6682726" y="618119"/>
+                  </a:lnTo>
+                  <a:lnTo>
+                    <a:pt x="6753071" y="620181"/>
+                  </a:lnTo>
+                  <a:lnTo>
+                    <a:pt x="6823415" y="622202"/>
+                  </a:lnTo>
+                  <a:lnTo>
+                    <a:pt x="6893760" y="624181"/>
+                  </a:lnTo>
+                  <a:lnTo>
+                    <a:pt x="6964104" y="626120"/>
                   </a:lnTo>
                 </a:path>
               </a:pathLst>
@@ -4654,27 +4689,27 @@
         </p:sp>
         <p:sp>
           <p:nvSpPr>
-            <p:cNvPr id="26" name="pl26"/>
+            <p:cNvPr id="27" name="pl27"/>
             <p:cNvSpPr/>
             <p:nvPr/>
           </p:nvSpPr>
           <p:spPr>
             <a:xfrm>
-              <a:off x="817517" y="4727786"/>
-              <a:ext cx="7799693" cy="0"/>
+              <a:off x="887106" y="3100960"/>
+              <a:ext cx="7660515" cy="0"/>
             </a:xfrm>
             <a:custGeom>
               <a:avLst/>
               <a:pathLst>
-                <a:path w="7799693" h="0">
+                <a:path w="7660515" h="0">
                   <a:moveTo>
                     <a:pt x="0" y="0"/>
                   </a:moveTo>
                   <a:lnTo>
-                    <a:pt x="7799693" y="0"/>
-                  </a:lnTo>
-                  <a:lnTo>
-                    <a:pt x="7799693" y="0"/>
+                    <a:pt x="7660515" y="0"/>
+                  </a:lnTo>
+                  <a:lnTo>
+                    <a:pt x="7660515" y="0"/>
                   </a:lnTo>
                 </a:path>
               </a:pathLst>
@@ -4697,21 +4732,21 @@
         </p:sp>
         <p:sp>
           <p:nvSpPr>
-            <p:cNvPr id="27" name="pl27"/>
+            <p:cNvPr id="28" name="pl28"/>
             <p:cNvSpPr/>
             <p:nvPr/>
           </p:nvSpPr>
           <p:spPr>
             <a:xfrm>
-              <a:off x="4205975" y="2073503"/>
-              <a:ext cx="0" cy="3649639"/>
+              <a:off x="4215100" y="2143092"/>
+              <a:ext cx="0" cy="1317069"/>
             </a:xfrm>
             <a:custGeom>
               <a:avLst/>
               <a:pathLst>
-                <a:path w="0" h="3649639">
+                <a:path w="0" h="1317069">
                   <a:moveTo>
-                    <a:pt x="0" y="3649639"/>
+                    <a:pt x="0" y="1317069"/>
                   </a:moveTo>
                   <a:lnTo>
                     <a:pt x="0" y="0"/>
@@ -4740,21 +4775,21 @@
         </p:sp>
         <p:sp>
           <p:nvSpPr>
-            <p:cNvPr id="28" name="pl28"/>
+            <p:cNvPr id="29" name="pl29"/>
             <p:cNvSpPr/>
             <p:nvPr/>
           </p:nvSpPr>
           <p:spPr>
             <a:xfrm>
-              <a:off x="3016442" y="2073503"/>
-              <a:ext cx="0" cy="3649639"/>
+              <a:off x="3046793" y="2143092"/>
+              <a:ext cx="0" cy="1317069"/>
             </a:xfrm>
             <a:custGeom>
               <a:avLst/>
               <a:pathLst>
-                <a:path w="0" h="3649639">
+                <a:path w="0" h="1317069">
                   <a:moveTo>
-                    <a:pt x="0" y="3649639"/>
+                    <a:pt x="0" y="1317069"/>
                   </a:moveTo>
                   <a:lnTo>
                     <a:pt x="0" y="0"/>
@@ -4783,21 +4818,21 @@
         </p:sp>
         <p:sp>
           <p:nvSpPr>
-            <p:cNvPr id="29" name="pl29"/>
+            <p:cNvPr id="30" name="pl30"/>
             <p:cNvSpPr/>
             <p:nvPr/>
           </p:nvSpPr>
           <p:spPr>
             <a:xfrm>
-              <a:off x="5421760" y="2073503"/>
-              <a:ext cx="0" cy="3649639"/>
+              <a:off x="5409191" y="2143092"/>
+              <a:ext cx="0" cy="1317069"/>
             </a:xfrm>
             <a:custGeom>
               <a:avLst/>
               <a:pathLst>
-                <a:path w="0" h="3649639">
+                <a:path w="0" h="1317069">
                   <a:moveTo>
-                    <a:pt x="0" y="3649639"/>
+                    <a:pt x="0" y="1317069"/>
                   </a:moveTo>
                   <a:lnTo>
                     <a:pt x="0" y="0"/>
@@ -4826,13 +4861,13 @@
         </p:sp>
         <p:sp>
           <p:nvSpPr>
-            <p:cNvPr id="30" name="tx30"/>
+            <p:cNvPr id="31" name="tx31"/>
             <p:cNvSpPr/>
             <p:nvPr/>
           </p:nvSpPr>
           <p:spPr>
             <a:xfrm>
-              <a:off x="692708" y="5517199"/>
+              <a:off x="762297" y="3360243"/>
               <a:ext cx="62179" cy="80101"/>
             </a:xfrm>
             <a:prstGeom prst="rect">
@@ -4872,13 +4907,13 @@
         </p:sp>
         <p:sp>
           <p:nvSpPr>
-            <p:cNvPr id="31" name="tx31"/>
+            <p:cNvPr id="32" name="tx32"/>
             <p:cNvSpPr/>
             <p:nvPr/>
           </p:nvSpPr>
           <p:spPr>
             <a:xfrm>
-              <a:off x="692708" y="4687735"/>
+              <a:off x="762297" y="3060909"/>
               <a:ext cx="62179" cy="80101"/>
             </a:xfrm>
             <a:prstGeom prst="rect">
@@ -4918,13 +4953,13 @@
         </p:sp>
         <p:sp>
           <p:nvSpPr>
-            <p:cNvPr id="32" name="tx32"/>
+            <p:cNvPr id="33" name="tx33"/>
             <p:cNvSpPr/>
             <p:nvPr/>
           </p:nvSpPr>
           <p:spPr>
             <a:xfrm>
-              <a:off x="692708" y="3858272"/>
+              <a:off x="762297" y="2761575"/>
               <a:ext cx="62179" cy="80101"/>
             </a:xfrm>
             <a:prstGeom prst="rect">
@@ -4964,13 +4999,13 @@
         </p:sp>
         <p:sp>
           <p:nvSpPr>
-            <p:cNvPr id="33" name="tx33"/>
+            <p:cNvPr id="34" name="tx34"/>
             <p:cNvSpPr/>
             <p:nvPr/>
           </p:nvSpPr>
           <p:spPr>
             <a:xfrm>
-              <a:off x="692708" y="3028808"/>
+              <a:off x="762297" y="2462242"/>
               <a:ext cx="62179" cy="80101"/>
             </a:xfrm>
             <a:prstGeom prst="rect">
@@ -5010,13 +5045,13 @@
         </p:sp>
         <p:sp>
           <p:nvSpPr>
-            <p:cNvPr id="34" name="tx34"/>
+            <p:cNvPr id="35" name="tx35"/>
             <p:cNvSpPr/>
             <p:nvPr/>
           </p:nvSpPr>
           <p:spPr>
             <a:xfrm>
-              <a:off x="692708" y="2199345"/>
+              <a:off x="762297" y="2162908"/>
               <a:ext cx="62179" cy="80101"/>
             </a:xfrm>
             <a:prstGeom prst="rect">
@@ -5056,13 +5091,13 @@
         </p:sp>
         <p:sp>
           <p:nvSpPr>
-            <p:cNvPr id="35" name="tx35"/>
+            <p:cNvPr id="36" name="tx36"/>
             <p:cNvSpPr/>
             <p:nvPr/>
           </p:nvSpPr>
           <p:spPr>
             <a:xfrm>
-              <a:off x="1977028" y="5785772"/>
+              <a:off x="2024485" y="3522791"/>
               <a:ext cx="161574" cy="80101"/>
             </a:xfrm>
             <a:prstGeom prst="rect">
@@ -5102,13 +5137,13 @@
         </p:sp>
         <p:sp>
           <p:nvSpPr>
-            <p:cNvPr id="36" name="tx36"/>
+            <p:cNvPr id="37" name="tx37"/>
             <p:cNvSpPr/>
             <p:nvPr/>
           </p:nvSpPr>
           <p:spPr>
             <a:xfrm>
-              <a:off x="3728813" y="5785772"/>
+              <a:off x="3745012" y="3522791"/>
               <a:ext cx="161574" cy="80101"/>
             </a:xfrm>
             <a:prstGeom prst="rect">
@@ -5148,13 +5183,13 @@
         </p:sp>
         <p:sp>
           <p:nvSpPr>
-            <p:cNvPr id="37" name="tx37"/>
+            <p:cNvPr id="38" name="tx38"/>
             <p:cNvSpPr/>
             <p:nvPr/>
           </p:nvSpPr>
           <p:spPr>
             <a:xfrm>
-              <a:off x="5530296" y="5785772"/>
+              <a:off x="5515235" y="3522791"/>
               <a:ext cx="62179" cy="80101"/>
             </a:xfrm>
             <a:prstGeom prst="rect">
@@ -5194,13 +5229,13 @@
         </p:sp>
         <p:sp>
           <p:nvSpPr>
-            <p:cNvPr id="38" name="tx38"/>
+            <p:cNvPr id="39" name="tx39"/>
             <p:cNvSpPr/>
             <p:nvPr/>
           </p:nvSpPr>
           <p:spPr>
             <a:xfrm>
-              <a:off x="7250992" y="5785772"/>
+              <a:off x="7204672" y="3522791"/>
               <a:ext cx="124358" cy="80101"/>
             </a:xfrm>
             <a:prstGeom prst="rect">
@@ -5240,13 +5275,13 @@
         </p:sp>
         <p:sp>
           <p:nvSpPr>
-            <p:cNvPr id="39" name="tx39"/>
+            <p:cNvPr id="40" name="tx40"/>
             <p:cNvSpPr/>
             <p:nvPr/>
           </p:nvSpPr>
           <p:spPr>
             <a:xfrm>
-              <a:off x="1561815" y="5925448"/>
+              <a:off x="1561815" y="3662467"/>
               <a:ext cx="6311097" cy="100218"/>
             </a:xfrm>
             <a:prstGeom prst="rect">
@@ -5286,13 +5321,13 @@
         </p:sp>
         <p:sp>
           <p:nvSpPr>
-            <p:cNvPr id="40" name="tx40"/>
+            <p:cNvPr id="41" name="tx41"/>
             <p:cNvSpPr/>
             <p:nvPr/>
           </p:nvSpPr>
           <p:spPr>
             <a:xfrm rot="-5400000">
-              <a:off x="68446" y="3848213"/>
+              <a:off x="138035" y="2751517"/>
               <a:ext cx="1016904" cy="100218"/>
             </a:xfrm>
             <a:prstGeom prst="rect">
@@ -5332,13 +5367,13 @@
         </p:sp>
         <p:sp>
           <p:nvSpPr>
-            <p:cNvPr id="41" name="tx41"/>
+            <p:cNvPr id="42" name="tx42"/>
             <p:cNvSpPr/>
             <p:nvPr/>
           </p:nvSpPr>
           <p:spPr>
             <a:xfrm>
-              <a:off x="817517" y="1896563"/>
+              <a:off x="887106" y="1966152"/>
               <a:ext cx="7026615" cy="82021"/>
             </a:xfrm>
             <a:prstGeom prst="rect">
@@ -5378,13 +5413,3746 @@
         </p:sp>
         <p:sp>
           <p:nvSpPr>
-            <p:cNvPr id="42" name="tx42"/>
+            <p:cNvPr id="43" name="tx43"/>
             <p:cNvSpPr/>
             <p:nvPr/>
           </p:nvSpPr>
           <p:spPr>
             <a:xfrm>
-              <a:off x="817517" y="1669789"/>
+              <a:off x="887106" y="1739378"/>
+              <a:ext cx="2718602" cy="120152"/>
+            </a:xfrm>
+            <a:prstGeom prst="rect">
+              <a:avLst/>
+            </a:prstGeom>
+            <a:noFill/>
+          </p:spPr>
+          <p:txBody>
+            <a:bodyPr lIns="0" rIns="0" tIns="0" bIns="0" anchorCtr="1" anchor="ctr" wrap="none"/>
+            <a:lstStyle/>
+            <a:p>
+              <a:pPr algn="l" marL="0" marR="0" indent="0">
+                <a:lnSpc>
+                  <a:spcPts val="1320"/>
+                </a:lnSpc>
+                <a:spcBef>
+                  <a:spcPts val="0"/>
+                </a:spcBef>
+                <a:spcAft>
+                  <a:spcPts val="0"/>
+                </a:spcAft>
+              </a:pPr>
+              <a:r>
+                <a:rPr sz="1320">
+                  <a:solidFill>
+                    <a:srgbClr val="000000">
+                      <a:alpha val="100000"/>
+                    </a:srgbClr>
+                  </a:solidFill>
+                  <a:latin typeface="Helvetica"/>
+                  <a:cs typeface="Helvetica"/>
+                </a:rPr>
+                <a:t>Composite Grade 3 AEs (Sensitivity)</a:t>
+              </a:r>
+            </a:p>
+          </p:txBody>
+        </p:sp>
+        <p:sp>
+          <p:nvSpPr>
+            <p:cNvPr id="44" name="pl44"/>
+            <p:cNvSpPr/>
+            <p:nvPr/>
+          </p:nvSpPr>
+          <p:spPr>
+            <a:xfrm>
+              <a:off x="887106" y="5444019"/>
+              <a:ext cx="7660515" cy="0"/>
+            </a:xfrm>
+            <a:custGeom>
+              <a:avLst/>
+              <a:pathLst>
+                <a:path w="7660515" h="0">
+                  <a:moveTo>
+                    <a:pt x="0" y="0"/>
+                  </a:moveTo>
+                  <a:lnTo>
+                    <a:pt x="7660515" y="0"/>
+                  </a:lnTo>
+                  <a:lnTo>
+                    <a:pt x="7660515" y="0"/>
+                  </a:lnTo>
+                </a:path>
+              </a:pathLst>
+            </a:custGeom>
+            <a:ln w="6775" cap="flat">
+              <a:solidFill>
+                <a:srgbClr val="EBEBEB">
+                  <a:alpha val="100000"/>
+                </a:srgbClr>
+              </a:solidFill>
+              <a:prstDash val="solid"/>
+              <a:round/>
+            </a:ln>
+          </p:spPr>
+          <p:txBody>
+            <a:bodyPr/>
+            <a:lstStyle/>
+            <a:p/>
+          </p:txBody>
+        </p:sp>
+        <p:sp>
+          <p:nvSpPr>
+            <p:cNvPr id="45" name="pl45"/>
+            <p:cNvSpPr/>
+            <p:nvPr/>
+          </p:nvSpPr>
+          <p:spPr>
+            <a:xfrm>
+              <a:off x="887106" y="5144686"/>
+              <a:ext cx="7660515" cy="0"/>
+            </a:xfrm>
+            <a:custGeom>
+              <a:avLst/>
+              <a:pathLst>
+                <a:path w="7660515" h="0">
+                  <a:moveTo>
+                    <a:pt x="0" y="0"/>
+                  </a:moveTo>
+                  <a:lnTo>
+                    <a:pt x="7660515" y="0"/>
+                  </a:lnTo>
+                  <a:lnTo>
+                    <a:pt x="7660515" y="0"/>
+                  </a:lnTo>
+                </a:path>
+              </a:pathLst>
+            </a:custGeom>
+            <a:ln w="6775" cap="flat">
+              <a:solidFill>
+                <a:srgbClr val="EBEBEB">
+                  <a:alpha val="100000"/>
+                </a:srgbClr>
+              </a:solidFill>
+              <a:prstDash val="solid"/>
+              <a:round/>
+            </a:ln>
+          </p:spPr>
+          <p:txBody>
+            <a:bodyPr/>
+            <a:lstStyle/>
+            <a:p/>
+          </p:txBody>
+        </p:sp>
+        <p:sp>
+          <p:nvSpPr>
+            <p:cNvPr id="46" name="pl46"/>
+            <p:cNvSpPr/>
+            <p:nvPr/>
+          </p:nvSpPr>
+          <p:spPr>
+            <a:xfrm>
+              <a:off x="887106" y="4845352"/>
+              <a:ext cx="7660515" cy="0"/>
+            </a:xfrm>
+            <a:custGeom>
+              <a:avLst/>
+              <a:pathLst>
+                <a:path w="7660515" h="0">
+                  <a:moveTo>
+                    <a:pt x="0" y="0"/>
+                  </a:moveTo>
+                  <a:lnTo>
+                    <a:pt x="7660515" y="0"/>
+                  </a:lnTo>
+                  <a:lnTo>
+                    <a:pt x="7660515" y="0"/>
+                  </a:lnTo>
+                </a:path>
+              </a:pathLst>
+            </a:custGeom>
+            <a:ln w="6775" cap="flat">
+              <a:solidFill>
+                <a:srgbClr val="EBEBEB">
+                  <a:alpha val="100000"/>
+                </a:srgbClr>
+              </a:solidFill>
+              <a:prstDash val="solid"/>
+              <a:round/>
+            </a:ln>
+          </p:spPr>
+          <p:txBody>
+            <a:bodyPr/>
+            <a:lstStyle/>
+            <a:p/>
+          </p:txBody>
+        </p:sp>
+        <p:sp>
+          <p:nvSpPr>
+            <p:cNvPr id="47" name="pl47"/>
+            <p:cNvSpPr/>
+            <p:nvPr/>
+          </p:nvSpPr>
+          <p:spPr>
+            <a:xfrm>
+              <a:off x="887106" y="4546018"/>
+              <a:ext cx="7660515" cy="0"/>
+            </a:xfrm>
+            <a:custGeom>
+              <a:avLst/>
+              <a:pathLst>
+                <a:path w="7660515" h="0">
+                  <a:moveTo>
+                    <a:pt x="0" y="0"/>
+                  </a:moveTo>
+                  <a:lnTo>
+                    <a:pt x="7660515" y="0"/>
+                  </a:lnTo>
+                  <a:lnTo>
+                    <a:pt x="7660515" y="0"/>
+                  </a:lnTo>
+                </a:path>
+              </a:pathLst>
+            </a:custGeom>
+            <a:ln w="6775" cap="flat">
+              <a:solidFill>
+                <a:srgbClr val="EBEBEB">
+                  <a:alpha val="100000"/>
+                </a:srgbClr>
+              </a:solidFill>
+              <a:prstDash val="solid"/>
+              <a:round/>
+            </a:ln>
+          </p:spPr>
+          <p:txBody>
+            <a:bodyPr/>
+            <a:lstStyle/>
+            <a:p/>
+          </p:txBody>
+        </p:sp>
+        <p:sp>
+          <p:nvSpPr>
+            <p:cNvPr id="48" name="pl48"/>
+            <p:cNvSpPr/>
+            <p:nvPr/>
+          </p:nvSpPr>
+          <p:spPr>
+            <a:xfrm>
+              <a:off x="1675141" y="4336484"/>
+              <a:ext cx="0" cy="1317069"/>
+            </a:xfrm>
+            <a:custGeom>
+              <a:avLst/>
+              <a:pathLst>
+                <a:path w="0" h="1317069">
+                  <a:moveTo>
+                    <a:pt x="0" y="1317069"/>
+                  </a:moveTo>
+                  <a:lnTo>
+                    <a:pt x="0" y="0"/>
+                  </a:lnTo>
+                  <a:lnTo>
+                    <a:pt x="0" y="0"/>
+                  </a:lnTo>
+                </a:path>
+              </a:pathLst>
+            </a:custGeom>
+            <a:ln w="6775" cap="flat">
+              <a:solidFill>
+                <a:srgbClr val="EBEBEB">
+                  <a:alpha val="100000"/>
+                </a:srgbClr>
+              </a:solidFill>
+              <a:prstDash val="solid"/>
+              <a:round/>
+            </a:ln>
+          </p:spPr>
+          <p:txBody>
+            <a:bodyPr/>
+            <a:lstStyle/>
+            <a:p/>
+          </p:txBody>
+        </p:sp>
+        <p:sp>
+          <p:nvSpPr>
+            <p:cNvPr id="49" name="pl49"/>
+            <p:cNvSpPr/>
+            <p:nvPr/>
+          </p:nvSpPr>
+          <p:spPr>
+            <a:xfrm>
+              <a:off x="2535404" y="4336484"/>
+              <a:ext cx="0" cy="1317069"/>
+            </a:xfrm>
+            <a:custGeom>
+              <a:avLst/>
+              <a:pathLst>
+                <a:path w="0" h="1317069">
+                  <a:moveTo>
+                    <a:pt x="0" y="1317069"/>
+                  </a:moveTo>
+                  <a:lnTo>
+                    <a:pt x="0" y="0"/>
+                  </a:lnTo>
+                  <a:lnTo>
+                    <a:pt x="0" y="0"/>
+                  </a:lnTo>
+                </a:path>
+              </a:pathLst>
+            </a:custGeom>
+            <a:ln w="6775" cap="flat">
+              <a:solidFill>
+                <a:srgbClr val="EBEBEB">
+                  <a:alpha val="100000"/>
+                </a:srgbClr>
+              </a:solidFill>
+              <a:prstDash val="solid"/>
+              <a:round/>
+            </a:ln>
+          </p:spPr>
+          <p:txBody>
+            <a:bodyPr/>
+            <a:lstStyle/>
+            <a:p/>
+          </p:txBody>
+        </p:sp>
+        <p:sp>
+          <p:nvSpPr>
+            <p:cNvPr id="50" name="pl50"/>
+            <p:cNvSpPr/>
+            <p:nvPr/>
+          </p:nvSpPr>
+          <p:spPr>
+            <a:xfrm>
+              <a:off x="3395667" y="4336484"/>
+              <a:ext cx="0" cy="1317069"/>
+            </a:xfrm>
+            <a:custGeom>
+              <a:avLst/>
+              <a:pathLst>
+                <a:path w="0" h="1317069">
+                  <a:moveTo>
+                    <a:pt x="0" y="1317069"/>
+                  </a:moveTo>
+                  <a:lnTo>
+                    <a:pt x="0" y="0"/>
+                  </a:lnTo>
+                  <a:lnTo>
+                    <a:pt x="0" y="0"/>
+                  </a:lnTo>
+                </a:path>
+              </a:pathLst>
+            </a:custGeom>
+            <a:ln w="6775" cap="flat">
+              <a:solidFill>
+                <a:srgbClr val="EBEBEB">
+                  <a:alpha val="100000"/>
+                </a:srgbClr>
+              </a:solidFill>
+              <a:prstDash val="solid"/>
+              <a:round/>
+            </a:ln>
+          </p:spPr>
+          <p:txBody>
+            <a:bodyPr/>
+            <a:lstStyle/>
+            <a:p/>
+          </p:txBody>
+        </p:sp>
+        <p:sp>
+          <p:nvSpPr>
+            <p:cNvPr id="51" name="pl51"/>
+            <p:cNvSpPr/>
+            <p:nvPr/>
+          </p:nvSpPr>
+          <p:spPr>
+            <a:xfrm>
+              <a:off x="4255930" y="4336484"/>
+              <a:ext cx="0" cy="1317069"/>
+            </a:xfrm>
+            <a:custGeom>
+              <a:avLst/>
+              <a:pathLst>
+                <a:path w="0" h="1317069">
+                  <a:moveTo>
+                    <a:pt x="0" y="1317069"/>
+                  </a:moveTo>
+                  <a:lnTo>
+                    <a:pt x="0" y="0"/>
+                  </a:lnTo>
+                  <a:lnTo>
+                    <a:pt x="0" y="0"/>
+                  </a:lnTo>
+                </a:path>
+              </a:pathLst>
+            </a:custGeom>
+            <a:ln w="6775" cap="flat">
+              <a:solidFill>
+                <a:srgbClr val="EBEBEB">
+                  <a:alpha val="100000"/>
+                </a:srgbClr>
+              </a:solidFill>
+              <a:prstDash val="solid"/>
+              <a:round/>
+            </a:ln>
+          </p:spPr>
+          <p:txBody>
+            <a:bodyPr/>
+            <a:lstStyle/>
+            <a:p/>
+          </p:txBody>
+        </p:sp>
+        <p:sp>
+          <p:nvSpPr>
+            <p:cNvPr id="52" name="pl52"/>
+            <p:cNvSpPr/>
+            <p:nvPr/>
+          </p:nvSpPr>
+          <p:spPr>
+            <a:xfrm>
+              <a:off x="5116193" y="4336484"/>
+              <a:ext cx="0" cy="1317069"/>
+            </a:xfrm>
+            <a:custGeom>
+              <a:avLst/>
+              <a:pathLst>
+                <a:path w="0" h="1317069">
+                  <a:moveTo>
+                    <a:pt x="0" y="1317069"/>
+                  </a:moveTo>
+                  <a:lnTo>
+                    <a:pt x="0" y="0"/>
+                  </a:lnTo>
+                  <a:lnTo>
+                    <a:pt x="0" y="0"/>
+                  </a:lnTo>
+                </a:path>
+              </a:pathLst>
+            </a:custGeom>
+            <a:ln w="6775" cap="flat">
+              <a:solidFill>
+                <a:srgbClr val="EBEBEB">
+                  <a:alpha val="100000"/>
+                </a:srgbClr>
+              </a:solidFill>
+              <a:prstDash val="solid"/>
+              <a:round/>
+            </a:ln>
+          </p:spPr>
+          <p:txBody>
+            <a:bodyPr/>
+            <a:lstStyle/>
+            <a:p/>
+          </p:txBody>
+        </p:sp>
+        <p:sp>
+          <p:nvSpPr>
+            <p:cNvPr id="53" name="pl53"/>
+            <p:cNvSpPr/>
+            <p:nvPr/>
+          </p:nvSpPr>
+          <p:spPr>
+            <a:xfrm>
+              <a:off x="5976457" y="4336484"/>
+              <a:ext cx="0" cy="1317069"/>
+            </a:xfrm>
+            <a:custGeom>
+              <a:avLst/>
+              <a:pathLst>
+                <a:path w="0" h="1317069">
+                  <a:moveTo>
+                    <a:pt x="0" y="1317069"/>
+                  </a:moveTo>
+                  <a:lnTo>
+                    <a:pt x="0" y="0"/>
+                  </a:lnTo>
+                  <a:lnTo>
+                    <a:pt x="0" y="0"/>
+                  </a:lnTo>
+                </a:path>
+              </a:pathLst>
+            </a:custGeom>
+            <a:ln w="6775" cap="flat">
+              <a:solidFill>
+                <a:srgbClr val="EBEBEB">
+                  <a:alpha val="100000"/>
+                </a:srgbClr>
+              </a:solidFill>
+              <a:prstDash val="solid"/>
+              <a:round/>
+            </a:ln>
+          </p:spPr>
+          <p:txBody>
+            <a:bodyPr/>
+            <a:lstStyle/>
+            <a:p/>
+          </p:txBody>
+        </p:sp>
+        <p:sp>
+          <p:nvSpPr>
+            <p:cNvPr id="54" name="pl54"/>
+            <p:cNvSpPr/>
+            <p:nvPr/>
+          </p:nvSpPr>
+          <p:spPr>
+            <a:xfrm>
+              <a:off x="6836720" y="4336484"/>
+              <a:ext cx="0" cy="1317069"/>
+            </a:xfrm>
+            <a:custGeom>
+              <a:avLst/>
+              <a:pathLst>
+                <a:path w="0" h="1317069">
+                  <a:moveTo>
+                    <a:pt x="0" y="1317069"/>
+                  </a:moveTo>
+                  <a:lnTo>
+                    <a:pt x="0" y="0"/>
+                  </a:lnTo>
+                  <a:lnTo>
+                    <a:pt x="0" y="0"/>
+                  </a:lnTo>
+                </a:path>
+              </a:pathLst>
+            </a:custGeom>
+            <a:ln w="6775" cap="flat">
+              <a:solidFill>
+                <a:srgbClr val="EBEBEB">
+                  <a:alpha val="100000"/>
+                </a:srgbClr>
+              </a:solidFill>
+              <a:prstDash val="solid"/>
+              <a:round/>
+            </a:ln>
+          </p:spPr>
+          <p:txBody>
+            <a:bodyPr/>
+            <a:lstStyle/>
+            <a:p/>
+          </p:txBody>
+        </p:sp>
+        <p:sp>
+          <p:nvSpPr>
+            <p:cNvPr id="55" name="pl55"/>
+            <p:cNvSpPr/>
+            <p:nvPr/>
+          </p:nvSpPr>
+          <p:spPr>
+            <a:xfrm>
+              <a:off x="7696983" y="4336484"/>
+              <a:ext cx="0" cy="1317069"/>
+            </a:xfrm>
+            <a:custGeom>
+              <a:avLst/>
+              <a:pathLst>
+                <a:path w="0" h="1317069">
+                  <a:moveTo>
+                    <a:pt x="0" y="1317069"/>
+                  </a:moveTo>
+                  <a:lnTo>
+                    <a:pt x="0" y="0"/>
+                  </a:lnTo>
+                  <a:lnTo>
+                    <a:pt x="0" y="0"/>
+                  </a:lnTo>
+                </a:path>
+              </a:pathLst>
+            </a:custGeom>
+            <a:ln w="6775" cap="flat">
+              <a:solidFill>
+                <a:srgbClr val="EBEBEB">
+                  <a:alpha val="100000"/>
+                </a:srgbClr>
+              </a:solidFill>
+              <a:prstDash val="solid"/>
+              <a:round/>
+            </a:ln>
+          </p:spPr>
+          <p:txBody>
+            <a:bodyPr/>
+            <a:lstStyle/>
+            <a:p/>
+          </p:txBody>
+        </p:sp>
+        <p:sp>
+          <p:nvSpPr>
+            <p:cNvPr id="56" name="pl56"/>
+            <p:cNvSpPr/>
+            <p:nvPr/>
+          </p:nvSpPr>
+          <p:spPr>
+            <a:xfrm>
+              <a:off x="887106" y="5593686"/>
+              <a:ext cx="7660515" cy="0"/>
+            </a:xfrm>
+            <a:custGeom>
+              <a:avLst/>
+              <a:pathLst>
+                <a:path w="7660515" h="0">
+                  <a:moveTo>
+                    <a:pt x="0" y="0"/>
+                  </a:moveTo>
+                  <a:lnTo>
+                    <a:pt x="7660515" y="0"/>
+                  </a:lnTo>
+                  <a:lnTo>
+                    <a:pt x="7660515" y="0"/>
+                  </a:lnTo>
+                </a:path>
+              </a:pathLst>
+            </a:custGeom>
+            <a:ln w="13550" cap="flat">
+              <a:solidFill>
+                <a:srgbClr val="EBEBEB">
+                  <a:alpha val="100000"/>
+                </a:srgbClr>
+              </a:solidFill>
+              <a:prstDash val="solid"/>
+              <a:round/>
+            </a:ln>
+          </p:spPr>
+          <p:txBody>
+            <a:bodyPr/>
+            <a:lstStyle/>
+            <a:p/>
+          </p:txBody>
+        </p:sp>
+        <p:sp>
+          <p:nvSpPr>
+            <p:cNvPr id="57" name="pl57"/>
+            <p:cNvSpPr/>
+            <p:nvPr/>
+          </p:nvSpPr>
+          <p:spPr>
+            <a:xfrm>
+              <a:off x="887106" y="5294352"/>
+              <a:ext cx="7660515" cy="0"/>
+            </a:xfrm>
+            <a:custGeom>
+              <a:avLst/>
+              <a:pathLst>
+                <a:path w="7660515" h="0">
+                  <a:moveTo>
+                    <a:pt x="0" y="0"/>
+                  </a:moveTo>
+                  <a:lnTo>
+                    <a:pt x="7660515" y="0"/>
+                  </a:lnTo>
+                  <a:lnTo>
+                    <a:pt x="7660515" y="0"/>
+                  </a:lnTo>
+                </a:path>
+              </a:pathLst>
+            </a:custGeom>
+            <a:ln w="13550" cap="flat">
+              <a:solidFill>
+                <a:srgbClr val="EBEBEB">
+                  <a:alpha val="100000"/>
+                </a:srgbClr>
+              </a:solidFill>
+              <a:prstDash val="solid"/>
+              <a:round/>
+            </a:ln>
+          </p:spPr>
+          <p:txBody>
+            <a:bodyPr/>
+            <a:lstStyle/>
+            <a:p/>
+          </p:txBody>
+        </p:sp>
+        <p:sp>
+          <p:nvSpPr>
+            <p:cNvPr id="58" name="pl58"/>
+            <p:cNvSpPr/>
+            <p:nvPr/>
+          </p:nvSpPr>
+          <p:spPr>
+            <a:xfrm>
+              <a:off x="887106" y="4995019"/>
+              <a:ext cx="7660515" cy="0"/>
+            </a:xfrm>
+            <a:custGeom>
+              <a:avLst/>
+              <a:pathLst>
+                <a:path w="7660515" h="0">
+                  <a:moveTo>
+                    <a:pt x="0" y="0"/>
+                  </a:moveTo>
+                  <a:lnTo>
+                    <a:pt x="7660515" y="0"/>
+                  </a:lnTo>
+                  <a:lnTo>
+                    <a:pt x="7660515" y="0"/>
+                  </a:lnTo>
+                </a:path>
+              </a:pathLst>
+            </a:custGeom>
+            <a:ln w="13550" cap="flat">
+              <a:solidFill>
+                <a:srgbClr val="EBEBEB">
+                  <a:alpha val="100000"/>
+                </a:srgbClr>
+              </a:solidFill>
+              <a:prstDash val="solid"/>
+              <a:round/>
+            </a:ln>
+          </p:spPr>
+          <p:txBody>
+            <a:bodyPr/>
+            <a:lstStyle/>
+            <a:p/>
+          </p:txBody>
+        </p:sp>
+        <p:sp>
+          <p:nvSpPr>
+            <p:cNvPr id="59" name="pl59"/>
+            <p:cNvSpPr/>
+            <p:nvPr/>
+          </p:nvSpPr>
+          <p:spPr>
+            <a:xfrm>
+              <a:off x="887106" y="4695685"/>
+              <a:ext cx="7660515" cy="0"/>
+            </a:xfrm>
+            <a:custGeom>
+              <a:avLst/>
+              <a:pathLst>
+                <a:path w="7660515" h="0">
+                  <a:moveTo>
+                    <a:pt x="0" y="0"/>
+                  </a:moveTo>
+                  <a:lnTo>
+                    <a:pt x="7660515" y="0"/>
+                  </a:lnTo>
+                  <a:lnTo>
+                    <a:pt x="7660515" y="0"/>
+                  </a:lnTo>
+                </a:path>
+              </a:pathLst>
+            </a:custGeom>
+            <a:ln w="13550" cap="flat">
+              <a:solidFill>
+                <a:srgbClr val="EBEBEB">
+                  <a:alpha val="100000"/>
+                </a:srgbClr>
+              </a:solidFill>
+              <a:prstDash val="solid"/>
+              <a:round/>
+            </a:ln>
+          </p:spPr>
+          <p:txBody>
+            <a:bodyPr/>
+            <a:lstStyle/>
+            <a:p/>
+          </p:txBody>
+        </p:sp>
+        <p:sp>
+          <p:nvSpPr>
+            <p:cNvPr id="60" name="pl60"/>
+            <p:cNvSpPr/>
+            <p:nvPr/>
+          </p:nvSpPr>
+          <p:spPr>
+            <a:xfrm>
+              <a:off x="887106" y="4396351"/>
+              <a:ext cx="7660515" cy="0"/>
+            </a:xfrm>
+            <a:custGeom>
+              <a:avLst/>
+              <a:pathLst>
+                <a:path w="7660515" h="0">
+                  <a:moveTo>
+                    <a:pt x="0" y="0"/>
+                  </a:moveTo>
+                  <a:lnTo>
+                    <a:pt x="7660515" y="0"/>
+                  </a:lnTo>
+                  <a:lnTo>
+                    <a:pt x="7660515" y="0"/>
+                  </a:lnTo>
+                </a:path>
+              </a:pathLst>
+            </a:custGeom>
+            <a:ln w="13550" cap="flat">
+              <a:solidFill>
+                <a:srgbClr val="EBEBEB">
+                  <a:alpha val="100000"/>
+                </a:srgbClr>
+              </a:solidFill>
+              <a:prstDash val="solid"/>
+              <a:round/>
+            </a:ln>
+          </p:spPr>
+          <p:txBody>
+            <a:bodyPr/>
+            <a:lstStyle/>
+            <a:p/>
+          </p:txBody>
+        </p:sp>
+        <p:sp>
+          <p:nvSpPr>
+            <p:cNvPr id="61" name="pl61"/>
+            <p:cNvSpPr/>
+            <p:nvPr/>
+          </p:nvSpPr>
+          <p:spPr>
+            <a:xfrm>
+              <a:off x="1245010" y="4336484"/>
+              <a:ext cx="0" cy="1317069"/>
+            </a:xfrm>
+            <a:custGeom>
+              <a:avLst/>
+              <a:pathLst>
+                <a:path w="0" h="1317069">
+                  <a:moveTo>
+                    <a:pt x="0" y="1317069"/>
+                  </a:moveTo>
+                  <a:lnTo>
+                    <a:pt x="0" y="0"/>
+                  </a:lnTo>
+                  <a:lnTo>
+                    <a:pt x="0" y="0"/>
+                  </a:lnTo>
+                </a:path>
+              </a:pathLst>
+            </a:custGeom>
+            <a:ln w="13550" cap="flat">
+              <a:solidFill>
+                <a:srgbClr val="EBEBEB">
+                  <a:alpha val="100000"/>
+                </a:srgbClr>
+              </a:solidFill>
+              <a:prstDash val="solid"/>
+              <a:round/>
+            </a:ln>
+          </p:spPr>
+          <p:txBody>
+            <a:bodyPr/>
+            <a:lstStyle/>
+            <a:p/>
+          </p:txBody>
+        </p:sp>
+        <p:sp>
+          <p:nvSpPr>
+            <p:cNvPr id="62" name="pl62"/>
+            <p:cNvSpPr/>
+            <p:nvPr/>
+          </p:nvSpPr>
+          <p:spPr>
+            <a:xfrm>
+              <a:off x="2105273" y="4336484"/>
+              <a:ext cx="0" cy="1317069"/>
+            </a:xfrm>
+            <a:custGeom>
+              <a:avLst/>
+              <a:pathLst>
+                <a:path w="0" h="1317069">
+                  <a:moveTo>
+                    <a:pt x="0" y="1317069"/>
+                  </a:moveTo>
+                  <a:lnTo>
+                    <a:pt x="0" y="0"/>
+                  </a:lnTo>
+                  <a:lnTo>
+                    <a:pt x="0" y="0"/>
+                  </a:lnTo>
+                </a:path>
+              </a:pathLst>
+            </a:custGeom>
+            <a:ln w="13550" cap="flat">
+              <a:solidFill>
+                <a:srgbClr val="EBEBEB">
+                  <a:alpha val="100000"/>
+                </a:srgbClr>
+              </a:solidFill>
+              <a:prstDash val="solid"/>
+              <a:round/>
+            </a:ln>
+          </p:spPr>
+          <p:txBody>
+            <a:bodyPr/>
+            <a:lstStyle/>
+            <a:p/>
+          </p:txBody>
+        </p:sp>
+        <p:sp>
+          <p:nvSpPr>
+            <p:cNvPr id="63" name="pl63"/>
+            <p:cNvSpPr/>
+            <p:nvPr/>
+          </p:nvSpPr>
+          <p:spPr>
+            <a:xfrm>
+              <a:off x="2965536" y="4336484"/>
+              <a:ext cx="0" cy="1317069"/>
+            </a:xfrm>
+            <a:custGeom>
+              <a:avLst/>
+              <a:pathLst>
+                <a:path w="0" h="1317069">
+                  <a:moveTo>
+                    <a:pt x="0" y="1317069"/>
+                  </a:moveTo>
+                  <a:lnTo>
+                    <a:pt x="0" y="0"/>
+                  </a:lnTo>
+                  <a:lnTo>
+                    <a:pt x="0" y="0"/>
+                  </a:lnTo>
+                </a:path>
+              </a:pathLst>
+            </a:custGeom>
+            <a:ln w="13550" cap="flat">
+              <a:solidFill>
+                <a:srgbClr val="EBEBEB">
+                  <a:alpha val="100000"/>
+                </a:srgbClr>
+              </a:solidFill>
+              <a:prstDash val="solid"/>
+              <a:round/>
+            </a:ln>
+          </p:spPr>
+          <p:txBody>
+            <a:bodyPr/>
+            <a:lstStyle/>
+            <a:p/>
+          </p:txBody>
+        </p:sp>
+        <p:sp>
+          <p:nvSpPr>
+            <p:cNvPr id="64" name="pl64"/>
+            <p:cNvSpPr/>
+            <p:nvPr/>
+          </p:nvSpPr>
+          <p:spPr>
+            <a:xfrm>
+              <a:off x="3825799" y="4336484"/>
+              <a:ext cx="0" cy="1317069"/>
+            </a:xfrm>
+            <a:custGeom>
+              <a:avLst/>
+              <a:pathLst>
+                <a:path w="0" h="1317069">
+                  <a:moveTo>
+                    <a:pt x="0" y="1317069"/>
+                  </a:moveTo>
+                  <a:lnTo>
+                    <a:pt x="0" y="0"/>
+                  </a:lnTo>
+                  <a:lnTo>
+                    <a:pt x="0" y="0"/>
+                  </a:lnTo>
+                </a:path>
+              </a:pathLst>
+            </a:custGeom>
+            <a:ln w="13550" cap="flat">
+              <a:solidFill>
+                <a:srgbClr val="EBEBEB">
+                  <a:alpha val="100000"/>
+                </a:srgbClr>
+              </a:solidFill>
+              <a:prstDash val="solid"/>
+              <a:round/>
+            </a:ln>
+          </p:spPr>
+          <p:txBody>
+            <a:bodyPr/>
+            <a:lstStyle/>
+            <a:p/>
+          </p:txBody>
+        </p:sp>
+        <p:sp>
+          <p:nvSpPr>
+            <p:cNvPr id="65" name="pl65"/>
+            <p:cNvSpPr/>
+            <p:nvPr/>
+          </p:nvSpPr>
+          <p:spPr>
+            <a:xfrm>
+              <a:off x="4686062" y="4336484"/>
+              <a:ext cx="0" cy="1317069"/>
+            </a:xfrm>
+            <a:custGeom>
+              <a:avLst/>
+              <a:pathLst>
+                <a:path w="0" h="1317069">
+                  <a:moveTo>
+                    <a:pt x="0" y="1317069"/>
+                  </a:moveTo>
+                  <a:lnTo>
+                    <a:pt x="0" y="0"/>
+                  </a:lnTo>
+                  <a:lnTo>
+                    <a:pt x="0" y="0"/>
+                  </a:lnTo>
+                </a:path>
+              </a:pathLst>
+            </a:custGeom>
+            <a:ln w="13550" cap="flat">
+              <a:solidFill>
+                <a:srgbClr val="EBEBEB">
+                  <a:alpha val="100000"/>
+                </a:srgbClr>
+              </a:solidFill>
+              <a:prstDash val="solid"/>
+              <a:round/>
+            </a:ln>
+          </p:spPr>
+          <p:txBody>
+            <a:bodyPr/>
+            <a:lstStyle/>
+            <a:p/>
+          </p:txBody>
+        </p:sp>
+        <p:sp>
+          <p:nvSpPr>
+            <p:cNvPr id="66" name="pl66"/>
+            <p:cNvSpPr/>
+            <p:nvPr/>
+          </p:nvSpPr>
+          <p:spPr>
+            <a:xfrm>
+              <a:off x="5546325" y="4336484"/>
+              <a:ext cx="0" cy="1317069"/>
+            </a:xfrm>
+            <a:custGeom>
+              <a:avLst/>
+              <a:pathLst>
+                <a:path w="0" h="1317069">
+                  <a:moveTo>
+                    <a:pt x="0" y="1317069"/>
+                  </a:moveTo>
+                  <a:lnTo>
+                    <a:pt x="0" y="0"/>
+                  </a:lnTo>
+                  <a:lnTo>
+                    <a:pt x="0" y="0"/>
+                  </a:lnTo>
+                </a:path>
+              </a:pathLst>
+            </a:custGeom>
+            <a:ln w="13550" cap="flat">
+              <a:solidFill>
+                <a:srgbClr val="EBEBEB">
+                  <a:alpha val="100000"/>
+                </a:srgbClr>
+              </a:solidFill>
+              <a:prstDash val="solid"/>
+              <a:round/>
+            </a:ln>
+          </p:spPr>
+          <p:txBody>
+            <a:bodyPr/>
+            <a:lstStyle/>
+            <a:p/>
+          </p:txBody>
+        </p:sp>
+        <p:sp>
+          <p:nvSpPr>
+            <p:cNvPr id="67" name="pl67"/>
+            <p:cNvSpPr/>
+            <p:nvPr/>
+          </p:nvSpPr>
+          <p:spPr>
+            <a:xfrm>
+              <a:off x="6406588" y="4336484"/>
+              <a:ext cx="0" cy="1317069"/>
+            </a:xfrm>
+            <a:custGeom>
+              <a:avLst/>
+              <a:pathLst>
+                <a:path w="0" h="1317069">
+                  <a:moveTo>
+                    <a:pt x="0" y="1317069"/>
+                  </a:moveTo>
+                  <a:lnTo>
+                    <a:pt x="0" y="0"/>
+                  </a:lnTo>
+                  <a:lnTo>
+                    <a:pt x="0" y="0"/>
+                  </a:lnTo>
+                </a:path>
+              </a:pathLst>
+            </a:custGeom>
+            <a:ln w="13550" cap="flat">
+              <a:solidFill>
+                <a:srgbClr val="EBEBEB">
+                  <a:alpha val="100000"/>
+                </a:srgbClr>
+              </a:solidFill>
+              <a:prstDash val="solid"/>
+              <a:round/>
+            </a:ln>
+          </p:spPr>
+          <p:txBody>
+            <a:bodyPr/>
+            <a:lstStyle/>
+            <a:p/>
+          </p:txBody>
+        </p:sp>
+        <p:sp>
+          <p:nvSpPr>
+            <p:cNvPr id="68" name="pl68"/>
+            <p:cNvSpPr/>
+            <p:nvPr/>
+          </p:nvSpPr>
+          <p:spPr>
+            <a:xfrm>
+              <a:off x="7266851" y="4336484"/>
+              <a:ext cx="0" cy="1317069"/>
+            </a:xfrm>
+            <a:custGeom>
+              <a:avLst/>
+              <a:pathLst>
+                <a:path w="0" h="1317069">
+                  <a:moveTo>
+                    <a:pt x="0" y="1317069"/>
+                  </a:moveTo>
+                  <a:lnTo>
+                    <a:pt x="0" y="0"/>
+                  </a:lnTo>
+                  <a:lnTo>
+                    <a:pt x="0" y="0"/>
+                  </a:lnTo>
+                </a:path>
+              </a:pathLst>
+            </a:custGeom>
+            <a:ln w="13550" cap="flat">
+              <a:solidFill>
+                <a:srgbClr val="EBEBEB">
+                  <a:alpha val="100000"/>
+                </a:srgbClr>
+              </a:solidFill>
+              <a:prstDash val="solid"/>
+              <a:round/>
+            </a:ln>
+          </p:spPr>
+          <p:txBody>
+            <a:bodyPr/>
+            <a:lstStyle/>
+            <a:p/>
+          </p:txBody>
+        </p:sp>
+        <p:sp>
+          <p:nvSpPr>
+            <p:cNvPr id="69" name="pl69"/>
+            <p:cNvSpPr/>
+            <p:nvPr/>
+          </p:nvSpPr>
+          <p:spPr>
+            <a:xfrm>
+              <a:off x="8127114" y="4336484"/>
+              <a:ext cx="0" cy="1317069"/>
+            </a:xfrm>
+            <a:custGeom>
+              <a:avLst/>
+              <a:pathLst>
+                <a:path w="0" h="1317069">
+                  <a:moveTo>
+                    <a:pt x="0" y="1317069"/>
+                  </a:moveTo>
+                  <a:lnTo>
+                    <a:pt x="0" y="0"/>
+                  </a:lnTo>
+                  <a:lnTo>
+                    <a:pt x="0" y="0"/>
+                  </a:lnTo>
+                </a:path>
+              </a:pathLst>
+            </a:custGeom>
+            <a:ln w="13550" cap="flat">
+              <a:solidFill>
+                <a:srgbClr val="EBEBEB">
+                  <a:alpha val="100000"/>
+                </a:srgbClr>
+              </a:solidFill>
+              <a:prstDash val="solid"/>
+              <a:round/>
+            </a:ln>
+          </p:spPr>
+          <p:txBody>
+            <a:bodyPr/>
+            <a:lstStyle/>
+            <a:p/>
+          </p:txBody>
+        </p:sp>
+        <p:sp>
+          <p:nvSpPr>
+            <p:cNvPr id="70" name="pg70"/>
+            <p:cNvSpPr/>
+            <p:nvPr/>
+          </p:nvSpPr>
+          <p:spPr>
+            <a:xfrm>
+              <a:off x="1235312" y="4561783"/>
+              <a:ext cx="6964104" cy="974692"/>
+            </a:xfrm>
+            <a:custGeom>
+              <a:avLst/>
+              <a:pathLst>
+                <a:path w="6964104" h="974692">
+                  <a:moveTo>
+                    <a:pt x="0" y="0"/>
+                  </a:moveTo>
+                  <a:lnTo>
+                    <a:pt x="70344" y="29712"/>
+                  </a:lnTo>
+                  <a:lnTo>
+                    <a:pt x="140688" y="58568"/>
+                  </a:lnTo>
+                  <a:lnTo>
+                    <a:pt x="211033" y="86594"/>
+                  </a:lnTo>
+                  <a:lnTo>
+                    <a:pt x="281377" y="113813"/>
+                  </a:lnTo>
+                  <a:lnTo>
+                    <a:pt x="351722" y="140248"/>
+                  </a:lnTo>
+                  <a:lnTo>
+                    <a:pt x="422066" y="165922"/>
+                  </a:lnTo>
+                  <a:lnTo>
+                    <a:pt x="492411" y="190857"/>
+                  </a:lnTo>
+                  <a:lnTo>
+                    <a:pt x="562755" y="215074"/>
+                  </a:lnTo>
+                  <a:lnTo>
+                    <a:pt x="633100" y="238593"/>
+                  </a:lnTo>
+                  <a:lnTo>
+                    <a:pt x="703444" y="261436"/>
+                  </a:lnTo>
+                  <a:lnTo>
+                    <a:pt x="773789" y="283620"/>
+                  </a:lnTo>
+                  <a:lnTo>
+                    <a:pt x="844133" y="305166"/>
+                  </a:lnTo>
+                  <a:lnTo>
+                    <a:pt x="914478" y="326091"/>
+                  </a:lnTo>
+                  <a:lnTo>
+                    <a:pt x="984822" y="346414"/>
+                  </a:lnTo>
+                  <a:lnTo>
+                    <a:pt x="1055167" y="366152"/>
+                  </a:lnTo>
+                  <a:lnTo>
+                    <a:pt x="1125511" y="385321"/>
+                  </a:lnTo>
+                  <a:lnTo>
+                    <a:pt x="1195856" y="403939"/>
+                  </a:lnTo>
+                  <a:lnTo>
+                    <a:pt x="1266200" y="422020"/>
+                  </a:lnTo>
+                  <a:lnTo>
+                    <a:pt x="1336545" y="439581"/>
+                  </a:lnTo>
+                  <a:lnTo>
+                    <a:pt x="1406889" y="456636"/>
+                  </a:lnTo>
+                  <a:lnTo>
+                    <a:pt x="1477234" y="473200"/>
+                  </a:lnTo>
+                  <a:lnTo>
+                    <a:pt x="1547578" y="489287"/>
+                  </a:lnTo>
+                  <a:lnTo>
+                    <a:pt x="1617923" y="504911"/>
+                  </a:lnTo>
+                  <a:lnTo>
+                    <a:pt x="1688267" y="520085"/>
+                  </a:lnTo>
+                  <a:lnTo>
+                    <a:pt x="1758612" y="534822"/>
+                  </a:lnTo>
+                  <a:lnTo>
+                    <a:pt x="1828956" y="549135"/>
+                  </a:lnTo>
+                  <a:lnTo>
+                    <a:pt x="1899301" y="563036"/>
+                  </a:lnTo>
+                  <a:lnTo>
+                    <a:pt x="1969645" y="576536"/>
+                  </a:lnTo>
+                  <a:lnTo>
+                    <a:pt x="2039990" y="589648"/>
+                  </a:lnTo>
+                  <a:lnTo>
+                    <a:pt x="2110334" y="602382"/>
+                  </a:lnTo>
+                  <a:lnTo>
+                    <a:pt x="2180679" y="614749"/>
+                  </a:lnTo>
+                  <a:lnTo>
+                    <a:pt x="2251023" y="626761"/>
+                  </a:lnTo>
+                  <a:lnTo>
+                    <a:pt x="2321368" y="638426"/>
+                  </a:lnTo>
+                  <a:lnTo>
+                    <a:pt x="2391712" y="649756"/>
+                  </a:lnTo>
+                  <a:lnTo>
+                    <a:pt x="2462057" y="660759"/>
+                  </a:lnTo>
+                  <a:lnTo>
+                    <a:pt x="2532401" y="671446"/>
+                  </a:lnTo>
+                  <a:lnTo>
+                    <a:pt x="2602746" y="681825"/>
+                  </a:lnTo>
+                  <a:lnTo>
+                    <a:pt x="2673090" y="691905"/>
+                  </a:lnTo>
+                  <a:lnTo>
+                    <a:pt x="2743435" y="701694"/>
+                  </a:lnTo>
+                  <a:lnTo>
+                    <a:pt x="2813779" y="711202"/>
+                  </a:lnTo>
+                  <a:lnTo>
+                    <a:pt x="2884124" y="720436"/>
+                  </a:lnTo>
+                  <a:lnTo>
+                    <a:pt x="2954468" y="729405"/>
+                  </a:lnTo>
+                  <a:lnTo>
+                    <a:pt x="3024813" y="734888"/>
+                  </a:lnTo>
+                  <a:lnTo>
+                    <a:pt x="3095157" y="738475"/>
+                  </a:lnTo>
+                  <a:lnTo>
+                    <a:pt x="3165502" y="742019"/>
+                  </a:lnTo>
+                  <a:lnTo>
+                    <a:pt x="3235846" y="745519"/>
+                  </a:lnTo>
+                  <a:lnTo>
+                    <a:pt x="3306191" y="748978"/>
+                  </a:lnTo>
+                  <a:lnTo>
+                    <a:pt x="3376535" y="752395"/>
+                  </a:lnTo>
+                  <a:lnTo>
+                    <a:pt x="3446880" y="755770"/>
+                  </a:lnTo>
+                  <a:lnTo>
+                    <a:pt x="3517224" y="759105"/>
+                  </a:lnTo>
+                  <a:lnTo>
+                    <a:pt x="3587569" y="762400"/>
+                  </a:lnTo>
+                  <a:lnTo>
+                    <a:pt x="3657913" y="765654"/>
+                  </a:lnTo>
+                  <a:lnTo>
+                    <a:pt x="3728257" y="768870"/>
+                  </a:lnTo>
+                  <a:lnTo>
+                    <a:pt x="3798602" y="772046"/>
+                  </a:lnTo>
+                  <a:lnTo>
+                    <a:pt x="3868946" y="775184"/>
+                  </a:lnTo>
+                  <a:lnTo>
+                    <a:pt x="3939291" y="778285"/>
+                  </a:lnTo>
+                  <a:lnTo>
+                    <a:pt x="4009635" y="781348"/>
+                  </a:lnTo>
+                  <a:lnTo>
+                    <a:pt x="4079980" y="784373"/>
+                  </a:lnTo>
+                  <a:lnTo>
+                    <a:pt x="4150324" y="787363"/>
+                  </a:lnTo>
+                  <a:lnTo>
+                    <a:pt x="4220669" y="790316"/>
+                  </a:lnTo>
+                  <a:lnTo>
+                    <a:pt x="4291013" y="793234"/>
+                  </a:lnTo>
+                  <a:lnTo>
+                    <a:pt x="4361358" y="796116"/>
+                  </a:lnTo>
+                  <a:lnTo>
+                    <a:pt x="4431702" y="798963"/>
+                  </a:lnTo>
+                  <a:lnTo>
+                    <a:pt x="4502047" y="801777"/>
+                  </a:lnTo>
+                  <a:lnTo>
+                    <a:pt x="4572391" y="804556"/>
+                  </a:lnTo>
+                  <a:lnTo>
+                    <a:pt x="4642736" y="807301"/>
+                  </a:lnTo>
+                  <a:lnTo>
+                    <a:pt x="4713080" y="810014"/>
+                  </a:lnTo>
+                  <a:lnTo>
+                    <a:pt x="4783425" y="812693"/>
+                  </a:lnTo>
+                  <a:lnTo>
+                    <a:pt x="4853769" y="815341"/>
+                  </a:lnTo>
+                  <a:lnTo>
+                    <a:pt x="4924114" y="817956"/>
+                  </a:lnTo>
+                  <a:lnTo>
+                    <a:pt x="4994458" y="820540"/>
+                  </a:lnTo>
+                  <a:lnTo>
+                    <a:pt x="5064803" y="823092"/>
+                  </a:lnTo>
+                  <a:lnTo>
+                    <a:pt x="5135147" y="825614"/>
+                  </a:lnTo>
+                  <a:lnTo>
+                    <a:pt x="5205492" y="828105"/>
+                  </a:lnTo>
+                  <a:lnTo>
+                    <a:pt x="5275836" y="830567"/>
+                  </a:lnTo>
+                  <a:lnTo>
+                    <a:pt x="5346181" y="832998"/>
+                  </a:lnTo>
+                  <a:lnTo>
+                    <a:pt x="5416525" y="835400"/>
+                  </a:lnTo>
+                  <a:lnTo>
+                    <a:pt x="5486870" y="837773"/>
+                  </a:lnTo>
+                  <a:lnTo>
+                    <a:pt x="5557214" y="840118"/>
+                  </a:lnTo>
+                  <a:lnTo>
+                    <a:pt x="5627559" y="842434"/>
+                  </a:lnTo>
+                  <a:lnTo>
+                    <a:pt x="5697903" y="844722"/>
+                  </a:lnTo>
+                  <a:lnTo>
+                    <a:pt x="5768248" y="846983"/>
+                  </a:lnTo>
+                  <a:lnTo>
+                    <a:pt x="5838592" y="849216"/>
+                  </a:lnTo>
+                  <a:lnTo>
+                    <a:pt x="5908937" y="851422"/>
+                  </a:lnTo>
+                  <a:lnTo>
+                    <a:pt x="5979281" y="853602"/>
+                  </a:lnTo>
+                  <a:lnTo>
+                    <a:pt x="6049626" y="855755"/>
+                  </a:lnTo>
+                  <a:lnTo>
+                    <a:pt x="6119970" y="857882"/>
+                  </a:lnTo>
+                  <a:lnTo>
+                    <a:pt x="6190315" y="859984"/>
+                  </a:lnTo>
+                  <a:lnTo>
+                    <a:pt x="6260659" y="862060"/>
+                  </a:lnTo>
+                  <a:lnTo>
+                    <a:pt x="6331004" y="864111"/>
+                  </a:lnTo>
+                  <a:lnTo>
+                    <a:pt x="6401348" y="866138"/>
+                  </a:lnTo>
+                  <a:lnTo>
+                    <a:pt x="6471693" y="868139"/>
+                  </a:lnTo>
+                  <a:lnTo>
+                    <a:pt x="6542037" y="870117"/>
+                  </a:lnTo>
+                  <a:lnTo>
+                    <a:pt x="6612382" y="872071"/>
+                  </a:lnTo>
+                  <a:lnTo>
+                    <a:pt x="6682726" y="874001"/>
+                  </a:lnTo>
+                  <a:lnTo>
+                    <a:pt x="6753071" y="875908"/>
+                  </a:lnTo>
+                  <a:lnTo>
+                    <a:pt x="6823415" y="877792"/>
+                  </a:lnTo>
+                  <a:lnTo>
+                    <a:pt x="6893760" y="879653"/>
+                  </a:lnTo>
+                  <a:lnTo>
+                    <a:pt x="6964104" y="881492"/>
+                  </a:lnTo>
+                  <a:lnTo>
+                    <a:pt x="6964104" y="974692"/>
+                  </a:lnTo>
+                  <a:lnTo>
+                    <a:pt x="6893760" y="972996"/>
+                  </a:lnTo>
+                  <a:lnTo>
+                    <a:pt x="6823415" y="971249"/>
+                  </a:lnTo>
+                  <a:lnTo>
+                    <a:pt x="6753071" y="969451"/>
+                  </a:lnTo>
+                  <a:lnTo>
+                    <a:pt x="6682726" y="967600"/>
+                  </a:lnTo>
+                  <a:lnTo>
+                    <a:pt x="6612382" y="965693"/>
+                  </a:lnTo>
+                  <a:lnTo>
+                    <a:pt x="6542037" y="963730"/>
+                  </a:lnTo>
+                  <a:lnTo>
+                    <a:pt x="6471693" y="961709"/>
+                  </a:lnTo>
+                  <a:lnTo>
+                    <a:pt x="6401348" y="959628"/>
+                  </a:lnTo>
+                  <a:lnTo>
+                    <a:pt x="6331004" y="957485"/>
+                  </a:lnTo>
+                  <a:lnTo>
+                    <a:pt x="6260659" y="955279"/>
+                  </a:lnTo>
+                  <a:lnTo>
+                    <a:pt x="6190315" y="953007"/>
+                  </a:lnTo>
+                  <a:lnTo>
+                    <a:pt x="6119970" y="950668"/>
+                  </a:lnTo>
+                  <a:lnTo>
+                    <a:pt x="6049626" y="948260"/>
+                  </a:lnTo>
+                  <a:lnTo>
+                    <a:pt x="5979281" y="945780"/>
+                  </a:lnTo>
+                  <a:lnTo>
+                    <a:pt x="5908937" y="943227"/>
+                  </a:lnTo>
+                  <a:lnTo>
+                    <a:pt x="5838592" y="940598"/>
+                  </a:lnTo>
+                  <a:lnTo>
+                    <a:pt x="5768248" y="937891"/>
+                  </a:lnTo>
+                  <a:lnTo>
+                    <a:pt x="5697903" y="935104"/>
+                  </a:lnTo>
+                  <a:lnTo>
+                    <a:pt x="5627559" y="932234"/>
+                  </a:lnTo>
+                  <a:lnTo>
+                    <a:pt x="5557214" y="929279"/>
+                  </a:lnTo>
+                  <a:lnTo>
+                    <a:pt x="5486870" y="926236"/>
+                  </a:lnTo>
+                  <a:lnTo>
+                    <a:pt x="5416525" y="923104"/>
+                  </a:lnTo>
+                  <a:lnTo>
+                    <a:pt x="5346181" y="919878"/>
+                  </a:lnTo>
+                  <a:lnTo>
+                    <a:pt x="5275836" y="916557"/>
+                  </a:lnTo>
+                  <a:lnTo>
+                    <a:pt x="5205492" y="913137"/>
+                  </a:lnTo>
+                  <a:lnTo>
+                    <a:pt x="5135147" y="909616"/>
+                  </a:lnTo>
+                  <a:lnTo>
+                    <a:pt x="5064803" y="905991"/>
+                  </a:lnTo>
+                  <a:lnTo>
+                    <a:pt x="4994458" y="902258"/>
+                  </a:lnTo>
+                  <a:lnTo>
+                    <a:pt x="4924114" y="898414"/>
+                  </a:lnTo>
+                  <a:lnTo>
+                    <a:pt x="4853769" y="894456"/>
+                  </a:lnTo>
+                  <a:lnTo>
+                    <a:pt x="4783425" y="890382"/>
+                  </a:lnTo>
+                  <a:lnTo>
+                    <a:pt x="4713080" y="886186"/>
+                  </a:lnTo>
+                  <a:lnTo>
+                    <a:pt x="4642736" y="881866"/>
+                  </a:lnTo>
+                  <a:lnTo>
+                    <a:pt x="4572391" y="877417"/>
+                  </a:lnTo>
+                  <a:lnTo>
+                    <a:pt x="4502047" y="872837"/>
+                  </a:lnTo>
+                  <a:lnTo>
+                    <a:pt x="4431702" y="868122"/>
+                  </a:lnTo>
+                  <a:lnTo>
+                    <a:pt x="4361358" y="863266"/>
+                  </a:lnTo>
+                  <a:lnTo>
+                    <a:pt x="4291013" y="858266"/>
+                  </a:lnTo>
+                  <a:lnTo>
+                    <a:pt x="4220669" y="853118"/>
+                  </a:lnTo>
+                  <a:lnTo>
+                    <a:pt x="4150324" y="847818"/>
+                  </a:lnTo>
+                  <a:lnTo>
+                    <a:pt x="4079980" y="842360"/>
+                  </a:lnTo>
+                  <a:lnTo>
+                    <a:pt x="4009635" y="836741"/>
+                  </a:lnTo>
+                  <a:lnTo>
+                    <a:pt x="3939291" y="830955"/>
+                  </a:lnTo>
+                  <a:lnTo>
+                    <a:pt x="3868946" y="824997"/>
+                  </a:lnTo>
+                  <a:lnTo>
+                    <a:pt x="3798602" y="818863"/>
+                  </a:lnTo>
+                  <a:lnTo>
+                    <a:pt x="3728257" y="812547"/>
+                  </a:lnTo>
+                  <a:lnTo>
+                    <a:pt x="3657913" y="806044"/>
+                  </a:lnTo>
+                  <a:lnTo>
+                    <a:pt x="3587569" y="799348"/>
+                  </a:lnTo>
+                  <a:lnTo>
+                    <a:pt x="3517224" y="792453"/>
+                  </a:lnTo>
+                  <a:lnTo>
+                    <a:pt x="3446880" y="785354"/>
+                  </a:lnTo>
+                  <a:lnTo>
+                    <a:pt x="3376535" y="778044"/>
+                  </a:lnTo>
+                  <a:lnTo>
+                    <a:pt x="3306191" y="770518"/>
+                  </a:lnTo>
+                  <a:lnTo>
+                    <a:pt x="3235846" y="762769"/>
+                  </a:lnTo>
+                  <a:lnTo>
+                    <a:pt x="3165502" y="754790"/>
+                  </a:lnTo>
+                  <a:lnTo>
+                    <a:pt x="3095157" y="746574"/>
+                  </a:lnTo>
+                  <a:lnTo>
+                    <a:pt x="3024813" y="738115"/>
+                  </a:lnTo>
+                  <a:lnTo>
+                    <a:pt x="2954468" y="731257"/>
+                  </a:lnTo>
+                  <a:lnTo>
+                    <a:pt x="2884124" y="727582"/>
+                  </a:lnTo>
+                  <a:lnTo>
+                    <a:pt x="2813779" y="723862"/>
+                  </a:lnTo>
+                  <a:lnTo>
+                    <a:pt x="2743435" y="720096"/>
+                  </a:lnTo>
+                  <a:lnTo>
+                    <a:pt x="2673090" y="716285"/>
+                  </a:lnTo>
+                  <a:lnTo>
+                    <a:pt x="2602746" y="712427"/>
+                  </a:lnTo>
+                  <a:lnTo>
+                    <a:pt x="2532401" y="708521"/>
+                  </a:lnTo>
+                  <a:lnTo>
+                    <a:pt x="2462057" y="704568"/>
+                  </a:lnTo>
+                  <a:lnTo>
+                    <a:pt x="2391712" y="700567"/>
+                  </a:lnTo>
+                  <a:lnTo>
+                    <a:pt x="2321368" y="696516"/>
+                  </a:lnTo>
+                  <a:lnTo>
+                    <a:pt x="2251023" y="692416"/>
+                  </a:lnTo>
+                  <a:lnTo>
+                    <a:pt x="2180679" y="688266"/>
+                  </a:lnTo>
+                  <a:lnTo>
+                    <a:pt x="2110334" y="684066"/>
+                  </a:lnTo>
+                  <a:lnTo>
+                    <a:pt x="2039990" y="679814"/>
+                  </a:lnTo>
+                  <a:lnTo>
+                    <a:pt x="1969645" y="675510"/>
+                  </a:lnTo>
+                  <a:lnTo>
+                    <a:pt x="1899301" y="671153"/>
+                  </a:lnTo>
+                  <a:lnTo>
+                    <a:pt x="1828956" y="666743"/>
+                  </a:lnTo>
+                  <a:lnTo>
+                    <a:pt x="1758612" y="662279"/>
+                  </a:lnTo>
+                  <a:lnTo>
+                    <a:pt x="1688267" y="657761"/>
+                  </a:lnTo>
+                  <a:lnTo>
+                    <a:pt x="1617923" y="653187"/>
+                  </a:lnTo>
+                  <a:lnTo>
+                    <a:pt x="1547578" y="648558"/>
+                  </a:lnTo>
+                  <a:lnTo>
+                    <a:pt x="1477234" y="643871"/>
+                  </a:lnTo>
+                  <a:lnTo>
+                    <a:pt x="1406889" y="639128"/>
+                  </a:lnTo>
+                  <a:lnTo>
+                    <a:pt x="1336545" y="634327"/>
+                  </a:lnTo>
+                  <a:lnTo>
+                    <a:pt x="1266200" y="629467"/>
+                  </a:lnTo>
+                  <a:lnTo>
+                    <a:pt x="1195856" y="624547"/>
+                  </a:lnTo>
+                  <a:lnTo>
+                    <a:pt x="1125511" y="619567"/>
+                  </a:lnTo>
+                  <a:lnTo>
+                    <a:pt x="1055167" y="614527"/>
+                  </a:lnTo>
+                  <a:lnTo>
+                    <a:pt x="984822" y="609425"/>
+                  </a:lnTo>
+                  <a:lnTo>
+                    <a:pt x="914478" y="604260"/>
+                  </a:lnTo>
+                  <a:lnTo>
+                    <a:pt x="844133" y="599033"/>
+                  </a:lnTo>
+                  <a:lnTo>
+                    <a:pt x="773789" y="593741"/>
+                  </a:lnTo>
+                  <a:lnTo>
+                    <a:pt x="703444" y="588385"/>
+                  </a:lnTo>
+                  <a:lnTo>
+                    <a:pt x="633100" y="582963"/>
+                  </a:lnTo>
+                  <a:lnTo>
+                    <a:pt x="562755" y="577475"/>
+                  </a:lnTo>
+                  <a:lnTo>
+                    <a:pt x="492411" y="571920"/>
+                  </a:lnTo>
+                  <a:lnTo>
+                    <a:pt x="422066" y="566297"/>
+                  </a:lnTo>
+                  <a:lnTo>
+                    <a:pt x="351722" y="560606"/>
+                  </a:lnTo>
+                  <a:lnTo>
+                    <a:pt x="281377" y="554844"/>
+                  </a:lnTo>
+                  <a:lnTo>
+                    <a:pt x="211033" y="549013"/>
+                  </a:lnTo>
+                  <a:lnTo>
+                    <a:pt x="140688" y="543110"/>
+                  </a:lnTo>
+                  <a:lnTo>
+                    <a:pt x="70344" y="537134"/>
+                  </a:lnTo>
+                  <a:lnTo>
+                    <a:pt x="0" y="531086"/>
+                  </a:lnTo>
+                  <a:close/>
+                </a:path>
+              </a:pathLst>
+            </a:custGeom>
+            <a:solidFill>
+              <a:srgbClr val="FF8C00">
+                <a:alpha val="20000"/>
+              </a:srgbClr>
+            </a:solidFill>
+          </p:spPr>
+          <p:txBody>
+            <a:bodyPr/>
+            <a:lstStyle/>
+            <a:p/>
+          </p:txBody>
+        </p:sp>
+        <p:sp>
+          <p:nvSpPr>
+            <p:cNvPr id="71" name="pl71"/>
+            <p:cNvSpPr/>
+            <p:nvPr/>
+          </p:nvSpPr>
+          <p:spPr>
+            <a:xfrm>
+              <a:off x="1235312" y="4561783"/>
+              <a:ext cx="6964104" cy="881492"/>
+            </a:xfrm>
+            <a:custGeom>
+              <a:avLst/>
+              <a:pathLst>
+                <a:path w="6964104" h="881492">
+                  <a:moveTo>
+                    <a:pt x="0" y="0"/>
+                  </a:moveTo>
+                  <a:lnTo>
+                    <a:pt x="70344" y="29712"/>
+                  </a:lnTo>
+                  <a:lnTo>
+                    <a:pt x="140688" y="58568"/>
+                  </a:lnTo>
+                  <a:lnTo>
+                    <a:pt x="211033" y="86594"/>
+                  </a:lnTo>
+                  <a:lnTo>
+                    <a:pt x="281377" y="113813"/>
+                  </a:lnTo>
+                  <a:lnTo>
+                    <a:pt x="351722" y="140248"/>
+                  </a:lnTo>
+                  <a:lnTo>
+                    <a:pt x="422066" y="165922"/>
+                  </a:lnTo>
+                  <a:lnTo>
+                    <a:pt x="492411" y="190857"/>
+                  </a:lnTo>
+                  <a:lnTo>
+                    <a:pt x="562755" y="215074"/>
+                  </a:lnTo>
+                  <a:lnTo>
+                    <a:pt x="633100" y="238593"/>
+                  </a:lnTo>
+                  <a:lnTo>
+                    <a:pt x="703444" y="261436"/>
+                  </a:lnTo>
+                  <a:lnTo>
+                    <a:pt x="773789" y="283620"/>
+                  </a:lnTo>
+                  <a:lnTo>
+                    <a:pt x="844133" y="305166"/>
+                  </a:lnTo>
+                  <a:lnTo>
+                    <a:pt x="914478" y="326091"/>
+                  </a:lnTo>
+                  <a:lnTo>
+                    <a:pt x="984822" y="346414"/>
+                  </a:lnTo>
+                  <a:lnTo>
+                    <a:pt x="1055167" y="366152"/>
+                  </a:lnTo>
+                  <a:lnTo>
+                    <a:pt x="1125511" y="385321"/>
+                  </a:lnTo>
+                  <a:lnTo>
+                    <a:pt x="1195856" y="403939"/>
+                  </a:lnTo>
+                  <a:lnTo>
+                    <a:pt x="1266200" y="422020"/>
+                  </a:lnTo>
+                  <a:lnTo>
+                    <a:pt x="1336545" y="439581"/>
+                  </a:lnTo>
+                  <a:lnTo>
+                    <a:pt x="1406889" y="456636"/>
+                  </a:lnTo>
+                  <a:lnTo>
+                    <a:pt x="1477234" y="473200"/>
+                  </a:lnTo>
+                  <a:lnTo>
+                    <a:pt x="1547578" y="489287"/>
+                  </a:lnTo>
+                  <a:lnTo>
+                    <a:pt x="1617923" y="504911"/>
+                  </a:lnTo>
+                  <a:lnTo>
+                    <a:pt x="1688267" y="520085"/>
+                  </a:lnTo>
+                  <a:lnTo>
+                    <a:pt x="1758612" y="534822"/>
+                  </a:lnTo>
+                  <a:lnTo>
+                    <a:pt x="1828956" y="549135"/>
+                  </a:lnTo>
+                  <a:lnTo>
+                    <a:pt x="1899301" y="563036"/>
+                  </a:lnTo>
+                  <a:lnTo>
+                    <a:pt x="1969645" y="576536"/>
+                  </a:lnTo>
+                  <a:lnTo>
+                    <a:pt x="2039990" y="589648"/>
+                  </a:lnTo>
+                  <a:lnTo>
+                    <a:pt x="2110334" y="602382"/>
+                  </a:lnTo>
+                  <a:lnTo>
+                    <a:pt x="2180679" y="614749"/>
+                  </a:lnTo>
+                  <a:lnTo>
+                    <a:pt x="2251023" y="626761"/>
+                  </a:lnTo>
+                  <a:lnTo>
+                    <a:pt x="2321368" y="638426"/>
+                  </a:lnTo>
+                  <a:lnTo>
+                    <a:pt x="2391712" y="649756"/>
+                  </a:lnTo>
+                  <a:lnTo>
+                    <a:pt x="2462057" y="660759"/>
+                  </a:lnTo>
+                  <a:lnTo>
+                    <a:pt x="2532401" y="671446"/>
+                  </a:lnTo>
+                  <a:lnTo>
+                    <a:pt x="2602746" y="681825"/>
+                  </a:lnTo>
+                  <a:lnTo>
+                    <a:pt x="2673090" y="691905"/>
+                  </a:lnTo>
+                  <a:lnTo>
+                    <a:pt x="2743435" y="701694"/>
+                  </a:lnTo>
+                  <a:lnTo>
+                    <a:pt x="2813779" y="711202"/>
+                  </a:lnTo>
+                  <a:lnTo>
+                    <a:pt x="2884124" y="720436"/>
+                  </a:lnTo>
+                  <a:lnTo>
+                    <a:pt x="2954468" y="729405"/>
+                  </a:lnTo>
+                  <a:lnTo>
+                    <a:pt x="3024813" y="734888"/>
+                  </a:lnTo>
+                  <a:lnTo>
+                    <a:pt x="3095157" y="738475"/>
+                  </a:lnTo>
+                  <a:lnTo>
+                    <a:pt x="3165502" y="742019"/>
+                  </a:lnTo>
+                  <a:lnTo>
+                    <a:pt x="3235846" y="745519"/>
+                  </a:lnTo>
+                  <a:lnTo>
+                    <a:pt x="3306191" y="748978"/>
+                  </a:lnTo>
+                  <a:lnTo>
+                    <a:pt x="3376535" y="752395"/>
+                  </a:lnTo>
+                  <a:lnTo>
+                    <a:pt x="3446880" y="755770"/>
+                  </a:lnTo>
+                  <a:lnTo>
+                    <a:pt x="3517224" y="759105"/>
+                  </a:lnTo>
+                  <a:lnTo>
+                    <a:pt x="3587569" y="762400"/>
+                  </a:lnTo>
+                  <a:lnTo>
+                    <a:pt x="3657913" y="765654"/>
+                  </a:lnTo>
+                  <a:lnTo>
+                    <a:pt x="3728257" y="768870"/>
+                  </a:lnTo>
+                  <a:lnTo>
+                    <a:pt x="3798602" y="772046"/>
+                  </a:lnTo>
+                  <a:lnTo>
+                    <a:pt x="3868946" y="775184"/>
+                  </a:lnTo>
+                  <a:lnTo>
+                    <a:pt x="3939291" y="778285"/>
+                  </a:lnTo>
+                  <a:lnTo>
+                    <a:pt x="4009635" y="781348"/>
+                  </a:lnTo>
+                  <a:lnTo>
+                    <a:pt x="4079980" y="784373"/>
+                  </a:lnTo>
+                  <a:lnTo>
+                    <a:pt x="4150324" y="787363"/>
+                  </a:lnTo>
+                  <a:lnTo>
+                    <a:pt x="4220669" y="790316"/>
+                  </a:lnTo>
+                  <a:lnTo>
+                    <a:pt x="4291013" y="793234"/>
+                  </a:lnTo>
+                  <a:lnTo>
+                    <a:pt x="4361358" y="796116"/>
+                  </a:lnTo>
+                  <a:lnTo>
+                    <a:pt x="4431702" y="798963"/>
+                  </a:lnTo>
+                  <a:lnTo>
+                    <a:pt x="4502047" y="801777"/>
+                  </a:lnTo>
+                  <a:lnTo>
+                    <a:pt x="4572391" y="804556"/>
+                  </a:lnTo>
+                  <a:lnTo>
+                    <a:pt x="4642736" y="807301"/>
+                  </a:lnTo>
+                  <a:lnTo>
+                    <a:pt x="4713080" y="810014"/>
+                  </a:lnTo>
+                  <a:lnTo>
+                    <a:pt x="4783425" y="812693"/>
+                  </a:lnTo>
+                  <a:lnTo>
+                    <a:pt x="4853769" y="815341"/>
+                  </a:lnTo>
+                  <a:lnTo>
+                    <a:pt x="4924114" y="817956"/>
+                  </a:lnTo>
+                  <a:lnTo>
+                    <a:pt x="4994458" y="820540"/>
+                  </a:lnTo>
+                  <a:lnTo>
+                    <a:pt x="5064803" y="823092"/>
+                  </a:lnTo>
+                  <a:lnTo>
+                    <a:pt x="5135147" y="825614"/>
+                  </a:lnTo>
+                  <a:lnTo>
+                    <a:pt x="5205492" y="828105"/>
+                  </a:lnTo>
+                  <a:lnTo>
+                    <a:pt x="5275836" y="830567"/>
+                  </a:lnTo>
+                  <a:lnTo>
+                    <a:pt x="5346181" y="832998"/>
+                  </a:lnTo>
+                  <a:lnTo>
+                    <a:pt x="5416525" y="835400"/>
+                  </a:lnTo>
+                  <a:lnTo>
+                    <a:pt x="5486870" y="837773"/>
+                  </a:lnTo>
+                  <a:lnTo>
+                    <a:pt x="5557214" y="840118"/>
+                  </a:lnTo>
+                  <a:lnTo>
+                    <a:pt x="5627559" y="842434"/>
+                  </a:lnTo>
+                  <a:lnTo>
+                    <a:pt x="5697903" y="844722"/>
+                  </a:lnTo>
+                  <a:lnTo>
+                    <a:pt x="5768248" y="846983"/>
+                  </a:lnTo>
+                  <a:lnTo>
+                    <a:pt x="5838592" y="849216"/>
+                  </a:lnTo>
+                  <a:lnTo>
+                    <a:pt x="5908937" y="851422"/>
+                  </a:lnTo>
+                  <a:lnTo>
+                    <a:pt x="5979281" y="853602"/>
+                  </a:lnTo>
+                  <a:lnTo>
+                    <a:pt x="6049626" y="855755"/>
+                  </a:lnTo>
+                  <a:lnTo>
+                    <a:pt x="6119970" y="857882"/>
+                  </a:lnTo>
+                  <a:lnTo>
+                    <a:pt x="6190315" y="859984"/>
+                  </a:lnTo>
+                  <a:lnTo>
+                    <a:pt x="6260659" y="862060"/>
+                  </a:lnTo>
+                  <a:lnTo>
+                    <a:pt x="6331004" y="864111"/>
+                  </a:lnTo>
+                  <a:lnTo>
+                    <a:pt x="6401348" y="866138"/>
+                  </a:lnTo>
+                  <a:lnTo>
+                    <a:pt x="6471693" y="868139"/>
+                  </a:lnTo>
+                  <a:lnTo>
+                    <a:pt x="6542037" y="870117"/>
+                  </a:lnTo>
+                  <a:lnTo>
+                    <a:pt x="6612382" y="872071"/>
+                  </a:lnTo>
+                  <a:lnTo>
+                    <a:pt x="6682726" y="874001"/>
+                  </a:lnTo>
+                  <a:lnTo>
+                    <a:pt x="6753071" y="875908"/>
+                  </a:lnTo>
+                  <a:lnTo>
+                    <a:pt x="6823415" y="877792"/>
+                  </a:lnTo>
+                  <a:lnTo>
+                    <a:pt x="6893760" y="879653"/>
+                  </a:lnTo>
+                  <a:lnTo>
+                    <a:pt x="6964104" y="881492"/>
+                  </a:lnTo>
+                </a:path>
+              </a:pathLst>
+            </a:custGeom>
+          </p:spPr>
+          <p:txBody>
+            <a:bodyPr/>
+            <a:lstStyle/>
+            <a:p/>
+          </p:txBody>
+        </p:sp>
+        <p:sp>
+          <p:nvSpPr>
+            <p:cNvPr id="72" name="pl72"/>
+            <p:cNvSpPr/>
+            <p:nvPr/>
+          </p:nvSpPr>
+          <p:spPr>
+            <a:xfrm>
+              <a:off x="1235312" y="5092870"/>
+              <a:ext cx="6964104" cy="443605"/>
+            </a:xfrm>
+            <a:custGeom>
+              <a:avLst/>
+              <a:pathLst>
+                <a:path w="6964104" h="443605">
+                  <a:moveTo>
+                    <a:pt x="6964104" y="443605"/>
+                  </a:moveTo>
+                  <a:lnTo>
+                    <a:pt x="6893760" y="441909"/>
+                  </a:lnTo>
+                  <a:lnTo>
+                    <a:pt x="6823415" y="440163"/>
+                  </a:lnTo>
+                  <a:lnTo>
+                    <a:pt x="6753071" y="438364"/>
+                  </a:lnTo>
+                  <a:lnTo>
+                    <a:pt x="6682726" y="436513"/>
+                  </a:lnTo>
+                  <a:lnTo>
+                    <a:pt x="6612382" y="434607"/>
+                  </a:lnTo>
+                  <a:lnTo>
+                    <a:pt x="6542037" y="432644"/>
+                  </a:lnTo>
+                  <a:lnTo>
+                    <a:pt x="6471693" y="430622"/>
+                  </a:lnTo>
+                  <a:lnTo>
+                    <a:pt x="6401348" y="428541"/>
+                  </a:lnTo>
+                  <a:lnTo>
+                    <a:pt x="6331004" y="426399"/>
+                  </a:lnTo>
+                  <a:lnTo>
+                    <a:pt x="6260659" y="424192"/>
+                  </a:lnTo>
+                  <a:lnTo>
+                    <a:pt x="6190315" y="421921"/>
+                  </a:lnTo>
+                  <a:lnTo>
+                    <a:pt x="6119970" y="419582"/>
+                  </a:lnTo>
+                  <a:lnTo>
+                    <a:pt x="6049626" y="417173"/>
+                  </a:lnTo>
+                  <a:lnTo>
+                    <a:pt x="5979281" y="414693"/>
+                  </a:lnTo>
+                  <a:lnTo>
+                    <a:pt x="5908937" y="412140"/>
+                  </a:lnTo>
+                  <a:lnTo>
+                    <a:pt x="5838592" y="409511"/>
+                  </a:lnTo>
+                  <a:lnTo>
+                    <a:pt x="5768248" y="406804"/>
+                  </a:lnTo>
+                  <a:lnTo>
+                    <a:pt x="5697903" y="404017"/>
+                  </a:lnTo>
+                  <a:lnTo>
+                    <a:pt x="5627559" y="401147"/>
+                  </a:lnTo>
+                  <a:lnTo>
+                    <a:pt x="5557214" y="398192"/>
+                  </a:lnTo>
+                  <a:lnTo>
+                    <a:pt x="5486870" y="395150"/>
+                  </a:lnTo>
+                  <a:lnTo>
+                    <a:pt x="5416525" y="392017"/>
+                  </a:lnTo>
+                  <a:lnTo>
+                    <a:pt x="5346181" y="388791"/>
+                  </a:lnTo>
+                  <a:lnTo>
+                    <a:pt x="5275836" y="385470"/>
+                  </a:lnTo>
+                  <a:lnTo>
+                    <a:pt x="5205492" y="382050"/>
+                  </a:lnTo>
+                  <a:lnTo>
+                    <a:pt x="5135147" y="378529"/>
+                  </a:lnTo>
+                  <a:lnTo>
+                    <a:pt x="5064803" y="374904"/>
+                  </a:lnTo>
+                  <a:lnTo>
+                    <a:pt x="4994458" y="371171"/>
+                  </a:lnTo>
+                  <a:lnTo>
+                    <a:pt x="4924114" y="367327"/>
+                  </a:lnTo>
+                  <a:lnTo>
+                    <a:pt x="4853769" y="363370"/>
+                  </a:lnTo>
+                  <a:lnTo>
+                    <a:pt x="4783425" y="359295"/>
+                  </a:lnTo>
+                  <a:lnTo>
+                    <a:pt x="4713080" y="355099"/>
+                  </a:lnTo>
+                  <a:lnTo>
+                    <a:pt x="4642736" y="350779"/>
+                  </a:lnTo>
+                  <a:lnTo>
+                    <a:pt x="4572391" y="346331"/>
+                  </a:lnTo>
+                  <a:lnTo>
+                    <a:pt x="4502047" y="341751"/>
+                  </a:lnTo>
+                  <a:lnTo>
+                    <a:pt x="4431702" y="337035"/>
+                  </a:lnTo>
+                  <a:lnTo>
+                    <a:pt x="4361358" y="332179"/>
+                  </a:lnTo>
+                  <a:lnTo>
+                    <a:pt x="4291013" y="327179"/>
+                  </a:lnTo>
+                  <a:lnTo>
+                    <a:pt x="4220669" y="322032"/>
+                  </a:lnTo>
+                  <a:lnTo>
+                    <a:pt x="4150324" y="316731"/>
+                  </a:lnTo>
+                  <a:lnTo>
+                    <a:pt x="4079980" y="311273"/>
+                  </a:lnTo>
+                  <a:lnTo>
+                    <a:pt x="4009635" y="305654"/>
+                  </a:lnTo>
+                  <a:lnTo>
+                    <a:pt x="3939291" y="299868"/>
+                  </a:lnTo>
+                  <a:lnTo>
+                    <a:pt x="3868946" y="293910"/>
+                  </a:lnTo>
+                  <a:lnTo>
+                    <a:pt x="3798602" y="287776"/>
+                  </a:lnTo>
+                  <a:lnTo>
+                    <a:pt x="3728257" y="281460"/>
+                  </a:lnTo>
+                  <a:lnTo>
+                    <a:pt x="3657913" y="274957"/>
+                  </a:lnTo>
+                  <a:lnTo>
+                    <a:pt x="3587569" y="268261"/>
+                  </a:lnTo>
+                  <a:lnTo>
+                    <a:pt x="3517224" y="261366"/>
+                  </a:lnTo>
+                  <a:lnTo>
+                    <a:pt x="3446880" y="254267"/>
+                  </a:lnTo>
+                  <a:lnTo>
+                    <a:pt x="3376535" y="246958"/>
+                  </a:lnTo>
+                  <a:lnTo>
+                    <a:pt x="3306191" y="239431"/>
+                  </a:lnTo>
+                  <a:lnTo>
+                    <a:pt x="3235846" y="231682"/>
+                  </a:lnTo>
+                  <a:lnTo>
+                    <a:pt x="3165502" y="223703"/>
+                  </a:lnTo>
+                  <a:lnTo>
+                    <a:pt x="3095157" y="215487"/>
+                  </a:lnTo>
+                  <a:lnTo>
+                    <a:pt x="3024813" y="207028"/>
+                  </a:lnTo>
+                  <a:lnTo>
+                    <a:pt x="2954468" y="200170"/>
+                  </a:lnTo>
+                  <a:lnTo>
+                    <a:pt x="2884124" y="196495"/>
+                  </a:lnTo>
+                  <a:lnTo>
+                    <a:pt x="2813779" y="192775"/>
+                  </a:lnTo>
+                  <a:lnTo>
+                    <a:pt x="2743435" y="189010"/>
+                  </a:lnTo>
+                  <a:lnTo>
+                    <a:pt x="2673090" y="185198"/>
+                  </a:lnTo>
+                  <a:lnTo>
+                    <a:pt x="2602746" y="181340"/>
+                  </a:lnTo>
+                  <a:lnTo>
+                    <a:pt x="2532401" y="177434"/>
+                  </a:lnTo>
+                  <a:lnTo>
+                    <a:pt x="2462057" y="173481"/>
+                  </a:lnTo>
+                  <a:lnTo>
+                    <a:pt x="2391712" y="169480"/>
+                  </a:lnTo>
+                  <a:lnTo>
+                    <a:pt x="2321368" y="165429"/>
+                  </a:lnTo>
+                  <a:lnTo>
+                    <a:pt x="2251023" y="161330"/>
+                  </a:lnTo>
+                  <a:lnTo>
+                    <a:pt x="2180679" y="157180"/>
+                  </a:lnTo>
+                  <a:lnTo>
+                    <a:pt x="2110334" y="152979"/>
+                  </a:lnTo>
+                  <a:lnTo>
+                    <a:pt x="2039990" y="148727"/>
+                  </a:lnTo>
+                  <a:lnTo>
+                    <a:pt x="1969645" y="144423"/>
+                  </a:lnTo>
+                  <a:lnTo>
+                    <a:pt x="1899301" y="140066"/>
+                  </a:lnTo>
+                  <a:lnTo>
+                    <a:pt x="1828956" y="135656"/>
+                  </a:lnTo>
+                  <a:lnTo>
+                    <a:pt x="1758612" y="131192"/>
+                  </a:lnTo>
+                  <a:lnTo>
+                    <a:pt x="1688267" y="126674"/>
+                  </a:lnTo>
+                  <a:lnTo>
+                    <a:pt x="1617923" y="122100"/>
+                  </a:lnTo>
+                  <a:lnTo>
+                    <a:pt x="1547578" y="117471"/>
+                  </a:lnTo>
+                  <a:lnTo>
+                    <a:pt x="1477234" y="112785"/>
+                  </a:lnTo>
+                  <a:lnTo>
+                    <a:pt x="1406889" y="108041"/>
+                  </a:lnTo>
+                  <a:lnTo>
+                    <a:pt x="1336545" y="103240"/>
+                  </a:lnTo>
+                  <a:lnTo>
+                    <a:pt x="1266200" y="98380"/>
+                  </a:lnTo>
+                  <a:lnTo>
+                    <a:pt x="1195856" y="93460"/>
+                  </a:lnTo>
+                  <a:lnTo>
+                    <a:pt x="1125511" y="88481"/>
+                  </a:lnTo>
+                  <a:lnTo>
+                    <a:pt x="1055167" y="83440"/>
+                  </a:lnTo>
+                  <a:lnTo>
+                    <a:pt x="984822" y="78338"/>
+                  </a:lnTo>
+                  <a:lnTo>
+                    <a:pt x="914478" y="73174"/>
+                  </a:lnTo>
+                  <a:lnTo>
+                    <a:pt x="844133" y="67946"/>
+                  </a:lnTo>
+                  <a:lnTo>
+                    <a:pt x="773789" y="62654"/>
+                  </a:lnTo>
+                  <a:lnTo>
+                    <a:pt x="703444" y="57298"/>
+                  </a:lnTo>
+                  <a:lnTo>
+                    <a:pt x="633100" y="51877"/>
+                  </a:lnTo>
+                  <a:lnTo>
+                    <a:pt x="562755" y="46389"/>
+                  </a:lnTo>
+                  <a:lnTo>
+                    <a:pt x="492411" y="40833"/>
+                  </a:lnTo>
+                  <a:lnTo>
+                    <a:pt x="422066" y="35211"/>
+                  </a:lnTo>
+                  <a:lnTo>
+                    <a:pt x="351722" y="29519"/>
+                  </a:lnTo>
+                  <a:lnTo>
+                    <a:pt x="281377" y="23758"/>
+                  </a:lnTo>
+                  <a:lnTo>
+                    <a:pt x="211033" y="17926"/>
+                  </a:lnTo>
+                  <a:lnTo>
+                    <a:pt x="140688" y="12023"/>
+                  </a:lnTo>
+                  <a:lnTo>
+                    <a:pt x="70344" y="6048"/>
+                  </a:lnTo>
+                  <a:lnTo>
+                    <a:pt x="0" y="0"/>
+                  </a:lnTo>
+                </a:path>
+              </a:pathLst>
+            </a:custGeom>
+          </p:spPr>
+          <p:txBody>
+            <a:bodyPr/>
+            <a:lstStyle/>
+            <a:p/>
+          </p:txBody>
+        </p:sp>
+        <p:sp>
+          <p:nvSpPr>
+            <p:cNvPr id="73" name="pl73"/>
+            <p:cNvSpPr/>
+            <p:nvPr/>
+          </p:nvSpPr>
+          <p:spPr>
+            <a:xfrm>
+              <a:off x="1235312" y="4874802"/>
+              <a:ext cx="6964104" cy="626120"/>
+            </a:xfrm>
+            <a:custGeom>
+              <a:avLst/>
+              <a:pathLst>
+                <a:path w="6964104" h="626120">
+                  <a:moveTo>
+                    <a:pt x="0" y="0"/>
+                  </a:moveTo>
+                  <a:lnTo>
+                    <a:pt x="70344" y="14716"/>
+                  </a:lnTo>
+                  <a:lnTo>
+                    <a:pt x="140688" y="29131"/>
+                  </a:lnTo>
+                  <a:lnTo>
+                    <a:pt x="211033" y="43250"/>
+                  </a:lnTo>
+                  <a:lnTo>
+                    <a:pt x="281377" y="57081"/>
+                  </a:lnTo>
+                  <a:lnTo>
+                    <a:pt x="351722" y="70629"/>
+                  </a:lnTo>
+                  <a:lnTo>
+                    <a:pt x="422066" y="83899"/>
+                  </a:lnTo>
+                  <a:lnTo>
+                    <a:pt x="492411" y="96898"/>
+                  </a:lnTo>
+                  <a:lnTo>
+                    <a:pt x="562755" y="109630"/>
+                  </a:lnTo>
+                  <a:lnTo>
+                    <a:pt x="633100" y="122102"/>
+                  </a:lnTo>
+                  <a:lnTo>
+                    <a:pt x="703444" y="134319"/>
+                  </a:lnTo>
+                  <a:lnTo>
+                    <a:pt x="773789" y="146285"/>
+                  </a:lnTo>
+                  <a:lnTo>
+                    <a:pt x="844133" y="158007"/>
+                  </a:lnTo>
+                  <a:lnTo>
+                    <a:pt x="914478" y="169488"/>
+                  </a:lnTo>
+                  <a:lnTo>
+                    <a:pt x="984822" y="180735"/>
+                  </a:lnTo>
+                  <a:lnTo>
+                    <a:pt x="1055167" y="191751"/>
+                  </a:lnTo>
+                  <a:lnTo>
+                    <a:pt x="1125511" y="202542"/>
+                  </a:lnTo>
+                  <a:lnTo>
+                    <a:pt x="1195856" y="213112"/>
+                  </a:lnTo>
+                  <a:lnTo>
+                    <a:pt x="1266200" y="223466"/>
+                  </a:lnTo>
+                  <a:lnTo>
+                    <a:pt x="1336545" y="233607"/>
+                  </a:lnTo>
+                  <a:lnTo>
+                    <a:pt x="1406889" y="243541"/>
+                  </a:lnTo>
+                  <a:lnTo>
+                    <a:pt x="1477234" y="253272"/>
+                  </a:lnTo>
+                  <a:lnTo>
+                    <a:pt x="1547578" y="262803"/>
+                  </a:lnTo>
+                  <a:lnTo>
+                    <a:pt x="1617923" y="272140"/>
+                  </a:lnTo>
+                  <a:lnTo>
+                    <a:pt x="1688267" y="281285"/>
+                  </a:lnTo>
+                  <a:lnTo>
+                    <a:pt x="1758612" y="290243"/>
+                  </a:lnTo>
+                  <a:lnTo>
+                    <a:pt x="1828956" y="299018"/>
+                  </a:lnTo>
+                  <a:lnTo>
+                    <a:pt x="1899301" y="307613"/>
+                  </a:lnTo>
+                  <a:lnTo>
+                    <a:pt x="1969645" y="316032"/>
+                  </a:lnTo>
+                  <a:lnTo>
+                    <a:pt x="2039990" y="324278"/>
+                  </a:lnTo>
+                  <a:lnTo>
+                    <a:pt x="2110334" y="332356"/>
+                  </a:lnTo>
+                  <a:lnTo>
+                    <a:pt x="2180679" y="340269"/>
+                  </a:lnTo>
+                  <a:lnTo>
+                    <a:pt x="2251023" y="348019"/>
+                  </a:lnTo>
+                  <a:lnTo>
+                    <a:pt x="2321368" y="355611"/>
+                  </a:lnTo>
+                  <a:lnTo>
+                    <a:pt x="2391712" y="363048"/>
+                  </a:lnTo>
+                  <a:lnTo>
+                    <a:pt x="2462057" y="370332"/>
+                  </a:lnTo>
+                  <a:lnTo>
+                    <a:pt x="2532401" y="377467"/>
+                  </a:lnTo>
+                  <a:lnTo>
+                    <a:pt x="2602746" y="384456"/>
+                  </a:lnTo>
+                  <a:lnTo>
+                    <a:pt x="2673090" y="391302"/>
+                  </a:lnTo>
+                  <a:lnTo>
+                    <a:pt x="2743435" y="398008"/>
+                  </a:lnTo>
+                  <a:lnTo>
+                    <a:pt x="2813779" y="404577"/>
+                  </a:lnTo>
+                  <a:lnTo>
+                    <a:pt x="2884124" y="411011"/>
+                  </a:lnTo>
+                  <a:lnTo>
+                    <a:pt x="2954468" y="417313"/>
+                  </a:lnTo>
+                  <a:lnTo>
+                    <a:pt x="3024813" y="423487"/>
+                  </a:lnTo>
+                  <a:lnTo>
+                    <a:pt x="3095157" y="429534"/>
+                  </a:lnTo>
+                  <a:lnTo>
+                    <a:pt x="3165502" y="435457"/>
+                  </a:lnTo>
+                  <a:lnTo>
+                    <a:pt x="3235846" y="441259"/>
+                  </a:lnTo>
+                  <a:lnTo>
+                    <a:pt x="3306191" y="446942"/>
+                  </a:lnTo>
+                  <a:lnTo>
+                    <a:pt x="3376535" y="452509"/>
+                  </a:lnTo>
+                  <a:lnTo>
+                    <a:pt x="3446880" y="457962"/>
+                  </a:lnTo>
+                  <a:lnTo>
+                    <a:pt x="3517224" y="463303"/>
+                  </a:lnTo>
+                  <a:lnTo>
+                    <a:pt x="3587569" y="468535"/>
+                  </a:lnTo>
+                  <a:lnTo>
+                    <a:pt x="3657913" y="473660"/>
+                  </a:lnTo>
+                  <a:lnTo>
+                    <a:pt x="3728257" y="478680"/>
+                  </a:lnTo>
+                  <a:lnTo>
+                    <a:pt x="3798602" y="483597"/>
+                  </a:lnTo>
+                  <a:lnTo>
+                    <a:pt x="3868946" y="488413"/>
+                  </a:lnTo>
+                  <a:lnTo>
+                    <a:pt x="3939291" y="493131"/>
+                  </a:lnTo>
+                  <a:lnTo>
+                    <a:pt x="4009635" y="497753"/>
+                  </a:lnTo>
+                  <a:lnTo>
+                    <a:pt x="4079980" y="502279"/>
+                  </a:lnTo>
+                  <a:lnTo>
+                    <a:pt x="4150324" y="506713"/>
+                  </a:lnTo>
+                  <a:lnTo>
+                    <a:pt x="4220669" y="511057"/>
+                  </a:lnTo>
+                  <a:lnTo>
+                    <a:pt x="4291013" y="515311"/>
+                  </a:lnTo>
+                  <a:lnTo>
+                    <a:pt x="4361358" y="519478"/>
+                  </a:lnTo>
+                  <a:lnTo>
+                    <a:pt x="4431702" y="523560"/>
+                  </a:lnTo>
+                  <a:lnTo>
+                    <a:pt x="4502047" y="527559"/>
+                  </a:lnTo>
+                  <a:lnTo>
+                    <a:pt x="4572391" y="531475"/>
+                  </a:lnTo>
+                  <a:lnTo>
+                    <a:pt x="4642736" y="535312"/>
+                  </a:lnTo>
+                  <a:lnTo>
+                    <a:pt x="4713080" y="539070"/>
+                  </a:lnTo>
+                  <a:lnTo>
+                    <a:pt x="4783425" y="542751"/>
+                  </a:lnTo>
+                  <a:lnTo>
+                    <a:pt x="4853769" y="546356"/>
+                  </a:lnTo>
+                  <a:lnTo>
+                    <a:pt x="4924114" y="549888"/>
+                  </a:lnTo>
+                  <a:lnTo>
+                    <a:pt x="4994458" y="553348"/>
+                  </a:lnTo>
+                  <a:lnTo>
+                    <a:pt x="5064803" y="556736"/>
+                  </a:lnTo>
+                  <a:lnTo>
+                    <a:pt x="5135147" y="560055"/>
+                  </a:lnTo>
+                  <a:lnTo>
+                    <a:pt x="5205492" y="563307"/>
+                  </a:lnTo>
+                  <a:lnTo>
+                    <a:pt x="5275836" y="566492"/>
+                  </a:lnTo>
+                  <a:lnTo>
+                    <a:pt x="5346181" y="569611"/>
+                  </a:lnTo>
+                  <a:lnTo>
+                    <a:pt x="5416525" y="572667"/>
+                  </a:lnTo>
+                  <a:lnTo>
+                    <a:pt x="5486870" y="575660"/>
+                  </a:lnTo>
+                  <a:lnTo>
+                    <a:pt x="5557214" y="578592"/>
+                  </a:lnTo>
+                  <a:lnTo>
+                    <a:pt x="5627559" y="581464"/>
+                  </a:lnTo>
+                  <a:lnTo>
+                    <a:pt x="5697903" y="584277"/>
+                  </a:lnTo>
+                  <a:lnTo>
+                    <a:pt x="5768248" y="587032"/>
+                  </a:lnTo>
+                  <a:lnTo>
+                    <a:pt x="5838592" y="589732"/>
+                  </a:lnTo>
+                  <a:lnTo>
+                    <a:pt x="5908937" y="592375"/>
+                  </a:lnTo>
+                  <a:lnTo>
+                    <a:pt x="5979281" y="594965"/>
+                  </a:lnTo>
+                  <a:lnTo>
+                    <a:pt x="6049626" y="597502"/>
+                  </a:lnTo>
+                  <a:lnTo>
+                    <a:pt x="6119970" y="599987"/>
+                  </a:lnTo>
+                  <a:lnTo>
+                    <a:pt x="6190315" y="602421"/>
+                  </a:lnTo>
+                  <a:lnTo>
+                    <a:pt x="6260659" y="604805"/>
+                  </a:lnTo>
+                  <a:lnTo>
+                    <a:pt x="6331004" y="607140"/>
+                  </a:lnTo>
+                  <a:lnTo>
+                    <a:pt x="6401348" y="609427"/>
+                  </a:lnTo>
+                  <a:lnTo>
+                    <a:pt x="6471693" y="611668"/>
+                  </a:lnTo>
+                  <a:lnTo>
+                    <a:pt x="6542037" y="613863"/>
+                  </a:lnTo>
+                  <a:lnTo>
+                    <a:pt x="6612382" y="616013"/>
+                  </a:lnTo>
+                  <a:lnTo>
+                    <a:pt x="6682726" y="618119"/>
+                  </a:lnTo>
+                  <a:lnTo>
+                    <a:pt x="6753071" y="620181"/>
+                  </a:lnTo>
+                  <a:lnTo>
+                    <a:pt x="6823415" y="622202"/>
+                  </a:lnTo>
+                  <a:lnTo>
+                    <a:pt x="6893760" y="624181"/>
+                  </a:lnTo>
+                  <a:lnTo>
+                    <a:pt x="6964104" y="626120"/>
+                  </a:lnTo>
+                </a:path>
+              </a:pathLst>
+            </a:custGeom>
+            <a:ln w="27101" cap="flat">
+              <a:solidFill>
+                <a:srgbClr val="FF8C00">
+                  <a:alpha val="100000"/>
+                </a:srgbClr>
+              </a:solidFill>
+              <a:prstDash val="solid"/>
+              <a:round/>
+            </a:ln>
+          </p:spPr>
+          <p:txBody>
+            <a:bodyPr/>
+            <a:lstStyle/>
+            <a:p/>
+          </p:txBody>
+        </p:sp>
+        <p:sp>
+          <p:nvSpPr>
+            <p:cNvPr id="74" name="pl74"/>
+            <p:cNvSpPr/>
+            <p:nvPr/>
+          </p:nvSpPr>
+          <p:spPr>
+            <a:xfrm>
+              <a:off x="887106" y="5294352"/>
+              <a:ext cx="7660515" cy="0"/>
+            </a:xfrm>
+            <a:custGeom>
+              <a:avLst/>
+              <a:pathLst>
+                <a:path w="7660515" h="0">
+                  <a:moveTo>
+                    <a:pt x="0" y="0"/>
+                  </a:moveTo>
+                  <a:lnTo>
+                    <a:pt x="7660515" y="0"/>
+                  </a:lnTo>
+                  <a:lnTo>
+                    <a:pt x="7660515" y="0"/>
+                  </a:lnTo>
+                </a:path>
+              </a:pathLst>
+            </a:custGeom>
+            <a:ln w="13550" cap="flat">
+              <a:solidFill>
+                <a:srgbClr val="7F7F7F">
+                  <a:alpha val="100000"/>
+                </a:srgbClr>
+              </a:solidFill>
+              <a:prstDash val="dash"/>
+              <a:round/>
+            </a:ln>
+          </p:spPr>
+          <p:txBody>
+            <a:bodyPr/>
+            <a:lstStyle/>
+            <a:p/>
+          </p:txBody>
+        </p:sp>
+        <p:sp>
+          <p:nvSpPr>
+            <p:cNvPr id="75" name="pl75"/>
+            <p:cNvSpPr/>
+            <p:nvPr/>
+          </p:nvSpPr>
+          <p:spPr>
+            <a:xfrm>
+              <a:off x="4215100" y="4336484"/>
+              <a:ext cx="0" cy="1317069"/>
+            </a:xfrm>
+            <a:custGeom>
+              <a:avLst/>
+              <a:pathLst>
+                <a:path w="0" h="1317069">
+                  <a:moveTo>
+                    <a:pt x="0" y="1317069"/>
+                  </a:moveTo>
+                  <a:lnTo>
+                    <a:pt x="0" y="0"/>
+                  </a:lnTo>
+                  <a:lnTo>
+                    <a:pt x="0" y="0"/>
+                  </a:lnTo>
+                </a:path>
+              </a:pathLst>
+            </a:custGeom>
+            <a:ln w="13550" cap="flat">
+              <a:solidFill>
+                <a:srgbClr val="666666">
+                  <a:alpha val="100000"/>
+                </a:srgbClr>
+              </a:solidFill>
+              <a:prstDash val="dot"/>
+              <a:round/>
+            </a:ln>
+          </p:spPr>
+          <p:txBody>
+            <a:bodyPr/>
+            <a:lstStyle/>
+            <a:p/>
+          </p:txBody>
+        </p:sp>
+        <p:sp>
+          <p:nvSpPr>
+            <p:cNvPr id="76" name="pl76"/>
+            <p:cNvSpPr/>
+            <p:nvPr/>
+          </p:nvSpPr>
+          <p:spPr>
+            <a:xfrm>
+              <a:off x="3046793" y="4336484"/>
+              <a:ext cx="0" cy="1317069"/>
+            </a:xfrm>
+            <a:custGeom>
+              <a:avLst/>
+              <a:pathLst>
+                <a:path w="0" h="1317069">
+                  <a:moveTo>
+                    <a:pt x="0" y="1317069"/>
+                  </a:moveTo>
+                  <a:lnTo>
+                    <a:pt x="0" y="0"/>
+                  </a:lnTo>
+                  <a:lnTo>
+                    <a:pt x="0" y="0"/>
+                  </a:lnTo>
+                </a:path>
+              </a:pathLst>
+            </a:custGeom>
+            <a:ln w="13550" cap="flat">
+              <a:solidFill>
+                <a:srgbClr val="4682B4">
+                  <a:alpha val="69803"/>
+                </a:srgbClr>
+              </a:solidFill>
+              <a:prstDash val="dash"/>
+              <a:round/>
+            </a:ln>
+          </p:spPr>
+          <p:txBody>
+            <a:bodyPr/>
+            <a:lstStyle/>
+            <a:p/>
+          </p:txBody>
+        </p:sp>
+        <p:sp>
+          <p:nvSpPr>
+            <p:cNvPr id="77" name="pl77"/>
+            <p:cNvSpPr/>
+            <p:nvPr/>
+          </p:nvSpPr>
+          <p:spPr>
+            <a:xfrm>
+              <a:off x="5409191" y="4336484"/>
+              <a:ext cx="0" cy="1317069"/>
+            </a:xfrm>
+            <a:custGeom>
+              <a:avLst/>
+              <a:pathLst>
+                <a:path w="0" h="1317069">
+                  <a:moveTo>
+                    <a:pt x="0" y="1317069"/>
+                  </a:moveTo>
+                  <a:lnTo>
+                    <a:pt x="0" y="0"/>
+                  </a:lnTo>
+                  <a:lnTo>
+                    <a:pt x="0" y="0"/>
+                  </a:lnTo>
+                </a:path>
+              </a:pathLst>
+            </a:custGeom>
+            <a:ln w="13550" cap="flat">
+              <a:solidFill>
+                <a:srgbClr val="4682B4">
+                  <a:alpha val="69803"/>
+                </a:srgbClr>
+              </a:solidFill>
+              <a:prstDash val="dash"/>
+              <a:round/>
+            </a:ln>
+          </p:spPr>
+          <p:txBody>
+            <a:bodyPr/>
+            <a:lstStyle/>
+            <a:p/>
+          </p:txBody>
+        </p:sp>
+        <p:sp>
+          <p:nvSpPr>
+            <p:cNvPr id="78" name="tx78"/>
+            <p:cNvSpPr/>
+            <p:nvPr/>
+          </p:nvSpPr>
+          <p:spPr>
+            <a:xfrm>
+              <a:off x="762297" y="5553636"/>
+              <a:ext cx="62179" cy="80101"/>
+            </a:xfrm>
+            <a:prstGeom prst="rect">
+              <a:avLst/>
+            </a:prstGeom>
+            <a:noFill/>
+          </p:spPr>
+          <p:txBody>
+            <a:bodyPr lIns="0" rIns="0" tIns="0" bIns="0" anchorCtr="1" anchor="ctr" wrap="none"/>
+            <a:lstStyle/>
+            <a:p>
+              <a:pPr algn="l" marL="0" marR="0" indent="0">
+                <a:lnSpc>
+                  <a:spcPts val="880"/>
+                </a:lnSpc>
+                <a:spcBef>
+                  <a:spcPts val="0"/>
+                </a:spcBef>
+                <a:spcAft>
+                  <a:spcPts val="0"/>
+                </a:spcAft>
+              </a:pPr>
+              <a:r>
+                <a:rPr sz="880">
+                  <a:solidFill>
+                    <a:srgbClr val="4D4D4D">
+                      <a:alpha val="100000"/>
+                    </a:srgbClr>
+                  </a:solidFill>
+                  <a:latin typeface="Helvetica"/>
+                  <a:cs typeface="Helvetica"/>
+                </a:rPr>
+                <a:t>0</a:t>
+              </a:r>
+            </a:p>
+          </p:txBody>
+        </p:sp>
+        <p:sp>
+          <p:nvSpPr>
+            <p:cNvPr id="79" name="tx79"/>
+            <p:cNvSpPr/>
+            <p:nvPr/>
+          </p:nvSpPr>
+          <p:spPr>
+            <a:xfrm>
+              <a:off x="762297" y="5254302"/>
+              <a:ext cx="62179" cy="80101"/>
+            </a:xfrm>
+            <a:prstGeom prst="rect">
+              <a:avLst/>
+            </a:prstGeom>
+            <a:noFill/>
+          </p:spPr>
+          <p:txBody>
+            <a:bodyPr lIns="0" rIns="0" tIns="0" bIns="0" anchorCtr="1" anchor="ctr" wrap="none"/>
+            <a:lstStyle/>
+            <a:p>
+              <a:pPr algn="l" marL="0" marR="0" indent="0">
+                <a:lnSpc>
+                  <a:spcPts val="880"/>
+                </a:lnSpc>
+                <a:spcBef>
+                  <a:spcPts val="0"/>
+                </a:spcBef>
+                <a:spcAft>
+                  <a:spcPts val="0"/>
+                </a:spcAft>
+              </a:pPr>
+              <a:r>
+                <a:rPr sz="880">
+                  <a:solidFill>
+                    <a:srgbClr val="4D4D4D">
+                      <a:alpha val="100000"/>
+                    </a:srgbClr>
+                  </a:solidFill>
+                  <a:latin typeface="Helvetica"/>
+                  <a:cs typeface="Helvetica"/>
+                </a:rPr>
+                <a:t>1</a:t>
+              </a:r>
+            </a:p>
+          </p:txBody>
+        </p:sp>
+        <p:sp>
+          <p:nvSpPr>
+            <p:cNvPr id="80" name="tx80"/>
+            <p:cNvSpPr/>
+            <p:nvPr/>
+          </p:nvSpPr>
+          <p:spPr>
+            <a:xfrm>
+              <a:off x="762297" y="4954968"/>
+              <a:ext cx="62179" cy="80101"/>
+            </a:xfrm>
+            <a:prstGeom prst="rect">
+              <a:avLst/>
+            </a:prstGeom>
+            <a:noFill/>
+          </p:spPr>
+          <p:txBody>
+            <a:bodyPr lIns="0" rIns="0" tIns="0" bIns="0" anchorCtr="1" anchor="ctr" wrap="none"/>
+            <a:lstStyle/>
+            <a:p>
+              <a:pPr algn="l" marL="0" marR="0" indent="0">
+                <a:lnSpc>
+                  <a:spcPts val="880"/>
+                </a:lnSpc>
+                <a:spcBef>
+                  <a:spcPts val="0"/>
+                </a:spcBef>
+                <a:spcAft>
+                  <a:spcPts val="0"/>
+                </a:spcAft>
+              </a:pPr>
+              <a:r>
+                <a:rPr sz="880">
+                  <a:solidFill>
+                    <a:srgbClr val="4D4D4D">
+                      <a:alpha val="100000"/>
+                    </a:srgbClr>
+                  </a:solidFill>
+                  <a:latin typeface="Helvetica"/>
+                  <a:cs typeface="Helvetica"/>
+                </a:rPr>
+                <a:t>2</a:t>
+              </a:r>
+            </a:p>
+          </p:txBody>
+        </p:sp>
+        <p:sp>
+          <p:nvSpPr>
+            <p:cNvPr id="81" name="tx81"/>
+            <p:cNvSpPr/>
+            <p:nvPr/>
+          </p:nvSpPr>
+          <p:spPr>
+            <a:xfrm>
+              <a:off x="762297" y="4655634"/>
+              <a:ext cx="62179" cy="80101"/>
+            </a:xfrm>
+            <a:prstGeom prst="rect">
+              <a:avLst/>
+            </a:prstGeom>
+            <a:noFill/>
+          </p:spPr>
+          <p:txBody>
+            <a:bodyPr lIns="0" rIns="0" tIns="0" bIns="0" anchorCtr="1" anchor="ctr" wrap="none"/>
+            <a:lstStyle/>
+            <a:p>
+              <a:pPr algn="l" marL="0" marR="0" indent="0">
+                <a:lnSpc>
+                  <a:spcPts val="880"/>
+                </a:lnSpc>
+                <a:spcBef>
+                  <a:spcPts val="0"/>
+                </a:spcBef>
+                <a:spcAft>
+                  <a:spcPts val="0"/>
+                </a:spcAft>
+              </a:pPr>
+              <a:r>
+                <a:rPr sz="880">
+                  <a:solidFill>
+                    <a:srgbClr val="4D4D4D">
+                      <a:alpha val="100000"/>
+                    </a:srgbClr>
+                  </a:solidFill>
+                  <a:latin typeface="Helvetica"/>
+                  <a:cs typeface="Helvetica"/>
+                </a:rPr>
+                <a:t>3</a:t>
+              </a:r>
+            </a:p>
+          </p:txBody>
+        </p:sp>
+        <p:sp>
+          <p:nvSpPr>
+            <p:cNvPr id="82" name="tx82"/>
+            <p:cNvSpPr/>
+            <p:nvPr/>
+          </p:nvSpPr>
+          <p:spPr>
+            <a:xfrm>
+              <a:off x="762297" y="4356300"/>
+              <a:ext cx="62179" cy="80101"/>
+            </a:xfrm>
+            <a:prstGeom prst="rect">
+              <a:avLst/>
+            </a:prstGeom>
+            <a:noFill/>
+          </p:spPr>
+          <p:txBody>
+            <a:bodyPr lIns="0" rIns="0" tIns="0" bIns="0" anchorCtr="1" anchor="ctr" wrap="none"/>
+            <a:lstStyle/>
+            <a:p>
+              <a:pPr algn="l" marL="0" marR="0" indent="0">
+                <a:lnSpc>
+                  <a:spcPts val="880"/>
+                </a:lnSpc>
+                <a:spcBef>
+                  <a:spcPts val="0"/>
+                </a:spcBef>
+                <a:spcAft>
+                  <a:spcPts val="0"/>
+                </a:spcAft>
+              </a:pPr>
+              <a:r>
+                <a:rPr sz="880">
+                  <a:solidFill>
+                    <a:srgbClr val="4D4D4D">
+                      <a:alpha val="100000"/>
+                    </a:srgbClr>
+                  </a:solidFill>
+                  <a:latin typeface="Helvetica"/>
+                  <a:cs typeface="Helvetica"/>
+                </a:rPr>
+                <a:t>4</a:t>
+              </a:r>
+            </a:p>
+          </p:txBody>
+        </p:sp>
+        <p:sp>
+          <p:nvSpPr>
+            <p:cNvPr id="83" name="tx83"/>
+            <p:cNvSpPr/>
+            <p:nvPr/>
+          </p:nvSpPr>
+          <p:spPr>
+            <a:xfrm>
+              <a:off x="1164222" y="5716183"/>
+              <a:ext cx="161574" cy="80101"/>
+            </a:xfrm>
+            <a:prstGeom prst="rect">
+              <a:avLst/>
+            </a:prstGeom>
+            <a:noFill/>
+          </p:spPr>
+          <p:txBody>
+            <a:bodyPr lIns="0" rIns="0" tIns="0" bIns="0" anchorCtr="1" anchor="ctr" wrap="none"/>
+            <a:lstStyle/>
+            <a:p>
+              <a:pPr algn="l" marL="0" marR="0" indent="0">
+                <a:lnSpc>
+                  <a:spcPts val="880"/>
+                </a:lnSpc>
+                <a:spcBef>
+                  <a:spcPts val="0"/>
+                </a:spcBef>
+                <a:spcAft>
+                  <a:spcPts val="0"/>
+                </a:spcAft>
+              </a:pPr>
+              <a:r>
+                <a:rPr sz="880">
+                  <a:solidFill>
+                    <a:srgbClr val="4D4D4D">
+                      <a:alpha val="100000"/>
+                    </a:srgbClr>
+                  </a:solidFill>
+                  <a:latin typeface="Helvetica"/>
+                  <a:cs typeface="Helvetica"/>
+                </a:rPr>
+                <a:t>-50</a:t>
+              </a:r>
+            </a:p>
+          </p:txBody>
+        </p:sp>
+        <p:sp>
+          <p:nvSpPr>
+            <p:cNvPr id="84" name="tx84"/>
+            <p:cNvSpPr/>
+            <p:nvPr/>
+          </p:nvSpPr>
+          <p:spPr>
+            <a:xfrm>
+              <a:off x="2024485" y="5716183"/>
+              <a:ext cx="161574" cy="80101"/>
+            </a:xfrm>
+            <a:prstGeom prst="rect">
+              <a:avLst/>
+            </a:prstGeom>
+            <a:noFill/>
+          </p:spPr>
+          <p:txBody>
+            <a:bodyPr lIns="0" rIns="0" tIns="0" bIns="0" anchorCtr="1" anchor="ctr" wrap="none"/>
+            <a:lstStyle/>
+            <a:p>
+              <a:pPr algn="l" marL="0" marR="0" indent="0">
+                <a:lnSpc>
+                  <a:spcPts val="880"/>
+                </a:lnSpc>
+                <a:spcBef>
+                  <a:spcPts val="0"/>
+                </a:spcBef>
+                <a:spcAft>
+                  <a:spcPts val="0"/>
+                </a:spcAft>
+              </a:pPr>
+              <a:r>
+                <a:rPr sz="880">
+                  <a:solidFill>
+                    <a:srgbClr val="4D4D4D">
+                      <a:alpha val="100000"/>
+                    </a:srgbClr>
+                  </a:solidFill>
+                  <a:latin typeface="Helvetica"/>
+                  <a:cs typeface="Helvetica"/>
+                </a:rPr>
+                <a:t>-40</a:t>
+              </a:r>
+            </a:p>
+          </p:txBody>
+        </p:sp>
+        <p:sp>
+          <p:nvSpPr>
+            <p:cNvPr id="85" name="tx85"/>
+            <p:cNvSpPr/>
+            <p:nvPr/>
+          </p:nvSpPr>
+          <p:spPr>
+            <a:xfrm>
+              <a:off x="2884749" y="5716183"/>
+              <a:ext cx="161574" cy="80101"/>
+            </a:xfrm>
+            <a:prstGeom prst="rect">
+              <a:avLst/>
+            </a:prstGeom>
+            <a:noFill/>
+          </p:spPr>
+          <p:txBody>
+            <a:bodyPr lIns="0" rIns="0" tIns="0" bIns="0" anchorCtr="1" anchor="ctr" wrap="none"/>
+            <a:lstStyle/>
+            <a:p>
+              <a:pPr algn="l" marL="0" marR="0" indent="0">
+                <a:lnSpc>
+                  <a:spcPts val="880"/>
+                </a:lnSpc>
+                <a:spcBef>
+                  <a:spcPts val="0"/>
+                </a:spcBef>
+                <a:spcAft>
+                  <a:spcPts val="0"/>
+                </a:spcAft>
+              </a:pPr>
+              <a:r>
+                <a:rPr sz="880">
+                  <a:solidFill>
+                    <a:srgbClr val="4D4D4D">
+                      <a:alpha val="100000"/>
+                    </a:srgbClr>
+                  </a:solidFill>
+                  <a:latin typeface="Helvetica"/>
+                  <a:cs typeface="Helvetica"/>
+                </a:rPr>
+                <a:t>-30</a:t>
+              </a:r>
+            </a:p>
+          </p:txBody>
+        </p:sp>
+        <p:sp>
+          <p:nvSpPr>
+            <p:cNvPr id="86" name="tx86"/>
+            <p:cNvSpPr/>
+            <p:nvPr/>
+          </p:nvSpPr>
+          <p:spPr>
+            <a:xfrm>
+              <a:off x="3745012" y="5716183"/>
+              <a:ext cx="161574" cy="80101"/>
+            </a:xfrm>
+            <a:prstGeom prst="rect">
+              <a:avLst/>
+            </a:prstGeom>
+            <a:noFill/>
+          </p:spPr>
+          <p:txBody>
+            <a:bodyPr lIns="0" rIns="0" tIns="0" bIns="0" anchorCtr="1" anchor="ctr" wrap="none"/>
+            <a:lstStyle/>
+            <a:p>
+              <a:pPr algn="l" marL="0" marR="0" indent="0">
+                <a:lnSpc>
+                  <a:spcPts val="880"/>
+                </a:lnSpc>
+                <a:spcBef>
+                  <a:spcPts val="0"/>
+                </a:spcBef>
+                <a:spcAft>
+                  <a:spcPts val="0"/>
+                </a:spcAft>
+              </a:pPr>
+              <a:r>
+                <a:rPr sz="880">
+                  <a:solidFill>
+                    <a:srgbClr val="4D4D4D">
+                      <a:alpha val="100000"/>
+                    </a:srgbClr>
+                  </a:solidFill>
+                  <a:latin typeface="Helvetica"/>
+                  <a:cs typeface="Helvetica"/>
+                </a:rPr>
+                <a:t>-20</a:t>
+              </a:r>
+            </a:p>
+          </p:txBody>
+        </p:sp>
+        <p:sp>
+          <p:nvSpPr>
+            <p:cNvPr id="87" name="tx87"/>
+            <p:cNvSpPr/>
+            <p:nvPr/>
+          </p:nvSpPr>
+          <p:spPr>
+            <a:xfrm>
+              <a:off x="4605275" y="5716183"/>
+              <a:ext cx="161574" cy="80101"/>
+            </a:xfrm>
+            <a:prstGeom prst="rect">
+              <a:avLst/>
+            </a:prstGeom>
+            <a:noFill/>
+          </p:spPr>
+          <p:txBody>
+            <a:bodyPr lIns="0" rIns="0" tIns="0" bIns="0" anchorCtr="1" anchor="ctr" wrap="none"/>
+            <a:lstStyle/>
+            <a:p>
+              <a:pPr algn="l" marL="0" marR="0" indent="0">
+                <a:lnSpc>
+                  <a:spcPts val="880"/>
+                </a:lnSpc>
+                <a:spcBef>
+                  <a:spcPts val="0"/>
+                </a:spcBef>
+                <a:spcAft>
+                  <a:spcPts val="0"/>
+                </a:spcAft>
+              </a:pPr>
+              <a:r>
+                <a:rPr sz="880">
+                  <a:solidFill>
+                    <a:srgbClr val="4D4D4D">
+                      <a:alpha val="100000"/>
+                    </a:srgbClr>
+                  </a:solidFill>
+                  <a:latin typeface="Helvetica"/>
+                  <a:cs typeface="Helvetica"/>
+                </a:rPr>
+                <a:t>-10</a:t>
+              </a:r>
+            </a:p>
+          </p:txBody>
+        </p:sp>
+        <p:sp>
+          <p:nvSpPr>
+            <p:cNvPr id="88" name="tx88"/>
+            <p:cNvSpPr/>
+            <p:nvPr/>
+          </p:nvSpPr>
+          <p:spPr>
+            <a:xfrm>
+              <a:off x="5515235" y="5716183"/>
+              <a:ext cx="62179" cy="80101"/>
+            </a:xfrm>
+            <a:prstGeom prst="rect">
+              <a:avLst/>
+            </a:prstGeom>
+            <a:noFill/>
+          </p:spPr>
+          <p:txBody>
+            <a:bodyPr lIns="0" rIns="0" tIns="0" bIns="0" anchorCtr="1" anchor="ctr" wrap="none"/>
+            <a:lstStyle/>
+            <a:p>
+              <a:pPr algn="l" marL="0" marR="0" indent="0">
+                <a:lnSpc>
+                  <a:spcPts val="880"/>
+                </a:lnSpc>
+                <a:spcBef>
+                  <a:spcPts val="0"/>
+                </a:spcBef>
+                <a:spcAft>
+                  <a:spcPts val="0"/>
+                </a:spcAft>
+              </a:pPr>
+              <a:r>
+                <a:rPr sz="880">
+                  <a:solidFill>
+                    <a:srgbClr val="4D4D4D">
+                      <a:alpha val="100000"/>
+                    </a:srgbClr>
+                  </a:solidFill>
+                  <a:latin typeface="Helvetica"/>
+                  <a:cs typeface="Helvetica"/>
+                </a:rPr>
+                <a:t>0</a:t>
+              </a:r>
+            </a:p>
+          </p:txBody>
+        </p:sp>
+        <p:sp>
+          <p:nvSpPr>
+            <p:cNvPr id="89" name="tx89"/>
+            <p:cNvSpPr/>
+            <p:nvPr/>
+          </p:nvSpPr>
+          <p:spPr>
+            <a:xfrm>
+              <a:off x="6344409" y="5716183"/>
+              <a:ext cx="124358" cy="80101"/>
+            </a:xfrm>
+            <a:prstGeom prst="rect">
+              <a:avLst/>
+            </a:prstGeom>
+            <a:noFill/>
+          </p:spPr>
+          <p:txBody>
+            <a:bodyPr lIns="0" rIns="0" tIns="0" bIns="0" anchorCtr="1" anchor="ctr" wrap="none"/>
+            <a:lstStyle/>
+            <a:p>
+              <a:pPr algn="l" marL="0" marR="0" indent="0">
+                <a:lnSpc>
+                  <a:spcPts val="880"/>
+                </a:lnSpc>
+                <a:spcBef>
+                  <a:spcPts val="0"/>
+                </a:spcBef>
+                <a:spcAft>
+                  <a:spcPts val="0"/>
+                </a:spcAft>
+              </a:pPr>
+              <a:r>
+                <a:rPr sz="880">
+                  <a:solidFill>
+                    <a:srgbClr val="4D4D4D">
+                      <a:alpha val="100000"/>
+                    </a:srgbClr>
+                  </a:solidFill>
+                  <a:latin typeface="Helvetica"/>
+                  <a:cs typeface="Helvetica"/>
+                </a:rPr>
+                <a:t>10</a:t>
+              </a:r>
+            </a:p>
+          </p:txBody>
+        </p:sp>
+        <p:sp>
+          <p:nvSpPr>
+            <p:cNvPr id="90" name="tx90"/>
+            <p:cNvSpPr/>
+            <p:nvPr/>
+          </p:nvSpPr>
+          <p:spPr>
+            <a:xfrm>
+              <a:off x="7204672" y="5716183"/>
+              <a:ext cx="124358" cy="80101"/>
+            </a:xfrm>
+            <a:prstGeom prst="rect">
+              <a:avLst/>
+            </a:prstGeom>
+            <a:noFill/>
+          </p:spPr>
+          <p:txBody>
+            <a:bodyPr lIns="0" rIns="0" tIns="0" bIns="0" anchorCtr="1" anchor="ctr" wrap="none"/>
+            <a:lstStyle/>
+            <a:p>
+              <a:pPr algn="l" marL="0" marR="0" indent="0">
+                <a:lnSpc>
+                  <a:spcPts val="880"/>
+                </a:lnSpc>
+                <a:spcBef>
+                  <a:spcPts val="0"/>
+                </a:spcBef>
+                <a:spcAft>
+                  <a:spcPts val="0"/>
+                </a:spcAft>
+              </a:pPr>
+              <a:r>
+                <a:rPr sz="880">
+                  <a:solidFill>
+                    <a:srgbClr val="4D4D4D">
+                      <a:alpha val="100000"/>
+                    </a:srgbClr>
+                  </a:solidFill>
+                  <a:latin typeface="Helvetica"/>
+                  <a:cs typeface="Helvetica"/>
+                </a:rPr>
+                <a:t>20</a:t>
+              </a:r>
+            </a:p>
+          </p:txBody>
+        </p:sp>
+        <p:sp>
+          <p:nvSpPr>
+            <p:cNvPr id="91" name="tx91"/>
+            <p:cNvSpPr/>
+            <p:nvPr/>
+          </p:nvSpPr>
+          <p:spPr>
+            <a:xfrm>
+              <a:off x="8064935" y="5716183"/>
+              <a:ext cx="124358" cy="80101"/>
+            </a:xfrm>
+            <a:prstGeom prst="rect">
+              <a:avLst/>
+            </a:prstGeom>
+            <a:noFill/>
+          </p:spPr>
+          <p:txBody>
+            <a:bodyPr lIns="0" rIns="0" tIns="0" bIns="0" anchorCtr="1" anchor="ctr" wrap="none"/>
+            <a:lstStyle/>
+            <a:p>
+              <a:pPr algn="l" marL="0" marR="0" indent="0">
+                <a:lnSpc>
+                  <a:spcPts val="880"/>
+                </a:lnSpc>
+                <a:spcBef>
+                  <a:spcPts val="0"/>
+                </a:spcBef>
+                <a:spcAft>
+                  <a:spcPts val="0"/>
+                </a:spcAft>
+              </a:pPr>
+              <a:r>
+                <a:rPr sz="880">
+                  <a:solidFill>
+                    <a:srgbClr val="4D4D4D">
+                      <a:alpha val="100000"/>
+                    </a:srgbClr>
+                  </a:solidFill>
+                  <a:latin typeface="Helvetica"/>
+                  <a:cs typeface="Helvetica"/>
+                </a:rPr>
+                <a:t>30</a:t>
+              </a:r>
+            </a:p>
+          </p:txBody>
+        </p:sp>
+        <p:sp>
+          <p:nvSpPr>
+            <p:cNvPr id="92" name="tx92"/>
+            <p:cNvSpPr/>
+            <p:nvPr/>
+          </p:nvSpPr>
+          <p:spPr>
+            <a:xfrm>
+              <a:off x="1561815" y="5855859"/>
+              <a:ext cx="6311097" cy="100218"/>
+            </a:xfrm>
+            <a:prstGeom prst="rect">
+              <a:avLst/>
+            </a:prstGeom>
+            <a:noFill/>
+          </p:spPr>
+          <p:txBody>
+            <a:bodyPr lIns="0" rIns="0" tIns="0" bIns="0" anchorCtr="1" anchor="ctr" wrap="none"/>
+            <a:lstStyle/>
+            <a:p>
+              <a:pPr algn="l" marL="0" marR="0" indent="0">
+                <a:lnSpc>
+                  <a:spcPts val="1100"/>
+                </a:lnSpc>
+                <a:spcBef>
+                  <a:spcPts val="0"/>
+                </a:spcBef>
+                <a:spcAft>
+                  <a:spcPts val="0"/>
+                </a:spcAft>
+              </a:pPr>
+              <a:r>
+                <a:rPr sz="1100">
+                  <a:solidFill>
+                    <a:srgbClr val="000000">
+                      <a:alpha val="100000"/>
+                    </a:srgbClr>
+                  </a:solidFill>
+                  <a:latin typeface="Helvetica"/>
+                  <a:cs typeface="Helvetica"/>
+                </a:rPr>
+                <a:t>Sensitivity eGFR Difference (%): 100 × (CKD-EPI 2012 CysC − CKD-EPI 2021 Cr) / CKD-EPI 2021 Cr</a:t>
+              </a:r>
+            </a:p>
+          </p:txBody>
+        </p:sp>
+        <p:sp>
+          <p:nvSpPr>
+            <p:cNvPr id="93" name="tx93"/>
+            <p:cNvSpPr/>
+            <p:nvPr/>
+          </p:nvSpPr>
+          <p:spPr>
+            <a:xfrm rot="-5400000">
+              <a:off x="138035" y="4944909"/>
+              <a:ext cx="1016904" cy="100218"/>
+            </a:xfrm>
+            <a:prstGeom prst="rect">
+              <a:avLst/>
+            </a:prstGeom>
+            <a:noFill/>
+          </p:spPr>
+          <p:txBody>
+            <a:bodyPr lIns="0" rIns="0" tIns="0" bIns="0" anchorCtr="1" anchor="ctr" wrap="none"/>
+            <a:lstStyle/>
+            <a:p>
+              <a:pPr algn="l" marL="0" marR="0" indent="0">
+                <a:lnSpc>
+                  <a:spcPts val="1100"/>
+                </a:lnSpc>
+                <a:spcBef>
+                  <a:spcPts val="0"/>
+                </a:spcBef>
+                <a:spcAft>
+                  <a:spcPts val="0"/>
+                </a:spcAft>
+              </a:pPr>
+              <a:r>
+                <a:rPr sz="1100">
+                  <a:solidFill>
+                    <a:srgbClr val="000000">
+                      <a:alpha val="100000"/>
+                    </a:srgbClr>
+                  </a:solidFill>
+                  <a:latin typeface="Helvetica"/>
+                  <a:cs typeface="Helvetica"/>
+                </a:rPr>
+                <a:t>subHR (95% CI)</a:t>
+              </a:r>
+            </a:p>
+          </p:txBody>
+        </p:sp>
+        <p:sp>
+          <p:nvSpPr>
+            <p:cNvPr id="94" name="tx94"/>
+            <p:cNvSpPr/>
+            <p:nvPr/>
+          </p:nvSpPr>
+          <p:spPr>
+            <a:xfrm>
+              <a:off x="887106" y="4159544"/>
+              <a:ext cx="7026615" cy="82021"/>
+            </a:xfrm>
+            <a:prstGeom prst="rect">
+              <a:avLst/>
+            </a:prstGeom>
+            <a:noFill/>
+          </p:spPr>
+          <p:txBody>
+            <a:bodyPr lIns="0" rIns="0" tIns="0" bIns="0" anchorCtr="1" anchor="ctr" wrap="none"/>
+            <a:lstStyle/>
+            <a:p>
+              <a:pPr algn="l" marL="0" marR="0" indent="0">
+                <a:lnSpc>
+                  <a:spcPts val="900"/>
+                </a:lnSpc>
+                <a:spcBef>
+                  <a:spcPts val="0"/>
+                </a:spcBef>
+                <a:spcAft>
+                  <a:spcPts val="0"/>
+                </a:spcAft>
+              </a:pPr>
+              <a:r>
+                <a:rPr sz="900">
+                  <a:solidFill>
+                    <a:srgbClr val="404040">
+                      <a:alpha val="100000"/>
+                    </a:srgbClr>
+                  </a:solidFill>
+                  <a:latin typeface="Helvetica"/>
+                  <a:cs typeface="Helvetica"/>
+                </a:rPr>
+                <a:t>subHR per 10 % decline: 1.29 (1.16-1.43), p_Bonf = &lt;0.001 (n = 6)  |  per IQR decline (Δ = 27.5 %): 2.00 (1.50-2.67)  |  IQR: [-29.1, -1.6] %</a:t>
+              </a:r>
+            </a:p>
+          </p:txBody>
+        </p:sp>
+        <p:sp>
+          <p:nvSpPr>
+            <p:cNvPr id="95" name="tx95"/>
+            <p:cNvSpPr/>
+            <p:nvPr/>
+          </p:nvSpPr>
+          <p:spPr>
+            <a:xfrm>
+              <a:off x="887106" y="3932770"/>
               <a:ext cx="2718602" cy="120152"/>
             </a:xfrm>
             <a:prstGeom prst="rect">
